--- a/Результаты работы.pptx
+++ b/Результаты работы.pptx
@@ -3,17 +3,19 @@
 <p:presentation xmlns:a="http://schemas.openxmlformats.org/drawingml/2006/main" xmlns:p="http://schemas.openxmlformats.org/presentationml/2006/main" xmlns:r="http://schemas.openxmlformats.org/officeDocument/2006/relationships" xmlns:p14="http://schemas.microsoft.com/office/powerpoint/2010/main" xmlns:p15="http://schemas.microsoft.com/office/powerpoint/2012/main" xmlns:mc="http://schemas.openxmlformats.org/markup-compatibility/2006">
   <p:sldMasterIdLst>
     <p:sldMasterId id="2147483648" r:id="rId2"/>
+    <p:sldMasterId id="2147483650" r:id="rId3"/>
   </p:sldMasterIdLst>
   <p:sldIdLst>
-    <p:sldId id="256" r:id="rId3"/>
-    <p:sldId id="257" r:id="rId4"/>
-    <p:sldId id="258" r:id="rId5"/>
-    <p:sldId id="259" r:id="rId6"/>
-    <p:sldId id="260" r:id="rId7"/>
-    <p:sldId id="261" r:id="rId8"/>
-    <p:sldId id="262" r:id="rId9"/>
-    <p:sldId id="263" r:id="rId10"/>
-    <p:sldId id="264" r:id="rId11"/>
+    <p:sldId id="256" r:id="rId4"/>
+    <p:sldId id="257" r:id="rId5"/>
+    <p:sldId id="258" r:id="rId6"/>
+    <p:sldId id="259" r:id="rId7"/>
+    <p:sldId id="260" r:id="rId8"/>
+    <p:sldId id="261" r:id="rId9"/>
+    <p:sldId id="262" r:id="rId10"/>
+    <p:sldId id="263" r:id="rId11"/>
+    <p:sldId id="264" r:id="rId12"/>
+    <p:sldId id="265" r:id="rId13"/>
   </p:sldIdLst>
   <p:sldSz cx="9144000" cy="6858000"/>
   <p:notesSz cx="7559675" cy="10691813"/>
@@ -131,10 +133,12 @@
                         <a:srgbClr val="000000"/>
                       </a:solidFill>
                       <a:latin typeface="Arial"/>
+                      <a:ea typeface="DejaVu Sans"/>
                     </a:defRPr>
                   </a:pPr>
                 </a:p>
               </c:txPr>
+              <c:dLblPos val="bestFit"/>
               <c:showLegendKey val="0"/>
               <c:showVal val="0"/>
               <c:showCatName val="0"/>
@@ -154,10 +158,12 @@
                         <a:srgbClr val="000000"/>
                       </a:solidFill>
                       <a:latin typeface="Arial"/>
+                      <a:ea typeface="DejaVu Sans"/>
                     </a:defRPr>
                   </a:pPr>
                 </a:p>
               </c:txPr>
+              <c:dLblPos val="bestFit"/>
               <c:showLegendKey val="0"/>
               <c:showVal val="0"/>
               <c:showCatName val="0"/>
@@ -177,10 +183,12 @@
                         <a:srgbClr val="000000"/>
                       </a:solidFill>
                       <a:latin typeface="Arial"/>
+                      <a:ea typeface="DejaVu Sans"/>
                     </a:defRPr>
                   </a:pPr>
                 </a:p>
               </c:txPr>
+              <c:dLblPos val="bestFit"/>
               <c:showLegendKey val="0"/>
               <c:showVal val="0"/>
               <c:showCatName val="0"/>
@@ -200,10 +208,12 @@
                         <a:srgbClr val="000000"/>
                       </a:solidFill>
                       <a:latin typeface="Arial"/>
+                      <a:ea typeface="DejaVu Sans"/>
                     </a:defRPr>
                   </a:pPr>
                 </a:p>
               </c:txPr>
+              <c:dLblPos val="bestFit"/>
               <c:showLegendKey val="0"/>
               <c:showVal val="0"/>
               <c:showCatName val="0"/>
@@ -223,10 +233,12 @@
                         <a:srgbClr val="000000"/>
                       </a:solidFill>
                       <a:latin typeface="Arial"/>
+                      <a:ea typeface="DejaVu Sans"/>
                     </a:defRPr>
                   </a:pPr>
                 </a:p>
               </c:txPr>
+              <c:dLblPos val="bestFit"/>
               <c:showLegendKey val="0"/>
               <c:showVal val="0"/>
               <c:showCatName val="0"/>
@@ -246,10 +258,12 @@
                         <a:srgbClr val="000000"/>
                       </a:solidFill>
                       <a:latin typeface="Arial"/>
+                      <a:ea typeface="DejaVu Sans"/>
                     </a:defRPr>
                   </a:pPr>
                 </a:p>
               </c:txPr>
+              <c:dLblPos val="bestFit"/>
               <c:showLegendKey val="0"/>
               <c:showVal val="0"/>
               <c:showCatName val="0"/>
@@ -267,10 +281,12 @@
                       <a:srgbClr val="000000"/>
                     </a:solidFill>
                     <a:latin typeface="Arial"/>
+                    <a:ea typeface="DejaVu Sans"/>
                   </a:defRPr>
                 </a:pPr>
               </a:p>
             </c:txPr>
+            <c:dLblPos val="bestFit"/>
             <c:showLegendKey val="0"/>
             <c:showVal val="0"/>
             <c:showCatName val="0"/>
@@ -361,12 +377,14 @@
                 <a:srgbClr val="000000"/>
               </a:solidFill>
               <a:latin typeface="Arial"/>
+              <a:ea typeface="DejaVu Sans"/>
             </a:defRPr>
           </a:pPr>
         </a:p>
       </c:txPr>
     </c:legend>
     <c:plotVisOnly val="1"/>
+    <c:dispBlanksAs val="zero"/>
   </c:chart>
   <c:spPr>
     <a:solidFill>
@@ -396,6 +414,7 @@
                   <a:srgbClr val="000000"/>
                 </a:solidFill>
                 <a:latin typeface="Arial"/>
+                <a:ea typeface="DejaVu Sans"/>
               </a:defRPr>
             </a:pPr>
             <a:r>
@@ -404,6 +423,7 @@
                   <a:srgbClr val="000000"/>
                 </a:solidFill>
                 <a:latin typeface="Arial"/>
+                <a:ea typeface="DejaVu Sans"/>
               </a:rPr>
               <a:t>Распределение по выходным оценкам</a:t>
             </a:r>
@@ -524,6 +544,7 @@
                         <a:srgbClr val="000000"/>
                       </a:solidFill>
                       <a:latin typeface="Arial"/>
+                      <a:ea typeface="DejaVu Sans"/>
                     </a:defRPr>
                   </a:pPr>
                 </a:p>
@@ -548,6 +569,7 @@
                         <a:srgbClr val="000000"/>
                       </a:solidFill>
                       <a:latin typeface="Arial"/>
+                      <a:ea typeface="DejaVu Sans"/>
                     </a:defRPr>
                   </a:pPr>
                 </a:p>
@@ -572,6 +594,7 @@
                         <a:srgbClr val="000000"/>
                       </a:solidFill>
                       <a:latin typeface="Arial"/>
+                      <a:ea typeface="DejaVu Sans"/>
                     </a:defRPr>
                   </a:pPr>
                 </a:p>
@@ -596,6 +619,7 @@
                         <a:srgbClr val="000000"/>
                       </a:solidFill>
                       <a:latin typeface="Arial"/>
+                      <a:ea typeface="DejaVu Sans"/>
                     </a:defRPr>
                   </a:pPr>
                 </a:p>
@@ -620,6 +644,7 @@
                         <a:srgbClr val="000000"/>
                       </a:solidFill>
                       <a:latin typeface="Arial"/>
+                      <a:ea typeface="DejaVu Sans"/>
                     </a:defRPr>
                   </a:pPr>
                 </a:p>
@@ -644,6 +669,7 @@
                         <a:srgbClr val="000000"/>
                       </a:solidFill>
                       <a:latin typeface="Arial"/>
+                      <a:ea typeface="DejaVu Sans"/>
                     </a:defRPr>
                   </a:pPr>
                 </a:p>
@@ -666,6 +692,7 @@
                       <a:srgbClr val="000000"/>
                     </a:solidFill>
                     <a:latin typeface="Arial"/>
+                    <a:ea typeface="DejaVu Sans"/>
                   </a:defRPr>
                 </a:pPr>
               </a:p>
@@ -761,6 +788,7 @@
                 <a:srgbClr val="000000"/>
               </a:solidFill>
               <a:latin typeface="Arial"/>
+              <a:ea typeface="DejaVu Sans"/>
             </a:defRPr>
           </a:pPr>
         </a:p>
@@ -891,10 +919,12 @@
                         <a:srgbClr val="000000"/>
                       </a:solidFill>
                       <a:latin typeface="Arial"/>
+                      <a:ea typeface="DejaVu Sans"/>
                     </a:defRPr>
                   </a:pPr>
                 </a:p>
               </c:txPr>
+              <c:dLblPos val="bestFit"/>
               <c:showLegendKey val="0"/>
               <c:showVal val="0"/>
               <c:showCatName val="0"/>
@@ -914,10 +944,12 @@
                         <a:srgbClr val="000000"/>
                       </a:solidFill>
                       <a:latin typeface="Arial"/>
+                      <a:ea typeface="DejaVu Sans"/>
                     </a:defRPr>
                   </a:pPr>
                 </a:p>
               </c:txPr>
+              <c:dLblPos val="bestFit"/>
               <c:showLegendKey val="0"/>
               <c:showVal val="0"/>
               <c:showCatName val="0"/>
@@ -937,10 +969,12 @@
                         <a:srgbClr val="000000"/>
                       </a:solidFill>
                       <a:latin typeface="Arial"/>
+                      <a:ea typeface="DejaVu Sans"/>
                     </a:defRPr>
                   </a:pPr>
                 </a:p>
               </c:txPr>
+              <c:dLblPos val="bestFit"/>
               <c:showLegendKey val="0"/>
               <c:showVal val="0"/>
               <c:showCatName val="0"/>
@@ -960,10 +994,12 @@
                         <a:srgbClr val="000000"/>
                       </a:solidFill>
                       <a:latin typeface="Arial"/>
+                      <a:ea typeface="DejaVu Sans"/>
                     </a:defRPr>
                   </a:pPr>
                 </a:p>
               </c:txPr>
+              <c:dLblPos val="bestFit"/>
               <c:showLegendKey val="0"/>
               <c:showVal val="0"/>
               <c:showCatName val="0"/>
@@ -983,10 +1019,12 @@
                         <a:srgbClr val="000000"/>
                       </a:solidFill>
                       <a:latin typeface="Arial"/>
+                      <a:ea typeface="DejaVu Sans"/>
                     </a:defRPr>
                   </a:pPr>
                 </a:p>
               </c:txPr>
+              <c:dLblPos val="bestFit"/>
               <c:showLegendKey val="0"/>
               <c:showVal val="0"/>
               <c:showCatName val="0"/>
@@ -1006,10 +1044,12 @@
                         <a:srgbClr val="000000"/>
                       </a:solidFill>
                       <a:latin typeface="Arial"/>
+                      <a:ea typeface="DejaVu Sans"/>
                     </a:defRPr>
                   </a:pPr>
                 </a:p>
               </c:txPr>
+              <c:dLblPos val="bestFit"/>
               <c:showLegendKey val="0"/>
               <c:showVal val="0"/>
               <c:showCatName val="0"/>
@@ -1027,10 +1067,12 @@
                       <a:srgbClr val="000000"/>
                     </a:solidFill>
                     <a:latin typeface="Arial"/>
+                    <a:ea typeface="DejaVu Sans"/>
                   </a:defRPr>
                 </a:pPr>
               </a:p>
             </c:txPr>
+            <c:dLblPos val="bestFit"/>
             <c:showLegendKey val="0"/>
             <c:showVal val="0"/>
             <c:showCatName val="0"/>
@@ -1121,12 +1163,14 @@
                 <a:srgbClr val="000000"/>
               </a:solidFill>
               <a:latin typeface="Arial"/>
+              <a:ea typeface="DejaVu Sans"/>
             </a:defRPr>
           </a:pPr>
         </a:p>
       </c:txPr>
     </c:legend>
     <c:plotVisOnly val="1"/>
+    <c:dispBlanksAs val="zero"/>
   </c:chart>
   <c:spPr>
     <a:solidFill>
@@ -1295,11 +1339,11 @@
         </c:ser>
         <c:gapWidth val="150"/>
         <c:overlap val="0"/>
-        <c:axId val="36368854"/>
-        <c:axId val="15268390"/>
+        <c:axId val="1095585"/>
+        <c:axId val="50445220"/>
       </c:barChart>
       <c:catAx>
-        <c:axId val="36368854"/>
+        <c:axId val="1095585"/>
         <c:scaling>
           <c:orientation val="minMax"/>
         </c:scaling>
@@ -1343,7 +1387,7 @@
             </a:pPr>
           </a:p>
         </c:txPr>
-        <c:crossAx val="15268390"/>
+        <c:crossAx val="50445220"/>
         <c:crosses val="autoZero"/>
         <c:auto val="1"/>
         <c:lblAlgn val="ctr"/>
@@ -1351,7 +1395,7 @@
         <c:noMultiLvlLbl val="0"/>
       </c:catAx>
       <c:valAx>
-        <c:axId val="15268390"/>
+        <c:axId val="50445220"/>
         <c:scaling>
           <c:orientation val="minMax"/>
         </c:scaling>
@@ -1395,7 +1439,7 @@
             </a:pPr>
           </a:p>
         </c:txPr>
-        <c:crossAx val="36368854"/>
+        <c:crossAx val="1095585"/>
         <c:crosses val="autoZero"/>
         <c:crossBetween val="between"/>
       </c:valAx>
@@ -2020,11 +2064,11 @@
           </c:spPr>
         </c:hiLowLines>
         <c:marker val="1"/>
-        <c:axId val="89007392"/>
-        <c:axId val="6024991"/>
+        <c:axId val="6333173"/>
+        <c:axId val="95844586"/>
       </c:lineChart>
       <c:catAx>
-        <c:axId val="89007392"/>
+        <c:axId val="6333173"/>
         <c:scaling>
           <c:orientation val="minMax"/>
         </c:scaling>
@@ -2068,7 +2112,7 @@
             </a:pPr>
           </a:p>
         </c:txPr>
-        <c:crossAx val="6024991"/>
+        <c:crossAx val="95844586"/>
         <c:crosses val="autoZero"/>
         <c:auto val="1"/>
         <c:lblAlgn val="ctr"/>
@@ -2076,7 +2120,7 @@
         <c:noMultiLvlLbl val="0"/>
       </c:catAx>
       <c:valAx>
-        <c:axId val="6024991"/>
+        <c:axId val="95844586"/>
         <c:scaling>
           <c:orientation val="minMax"/>
         </c:scaling>
@@ -2120,7 +2164,7 @@
             </a:pPr>
           </a:p>
         </c:txPr>
-        <c:crossAx val="89007392"/>
+        <c:crossAx val="6333173"/>
         <c:crosses val="autoZero"/>
         <c:crossBetween val="between"/>
       </c:valAx>
@@ -2203,7 +2247,7 @@
         <p:spPr>
           <a:xfrm>
             <a:off x="457200" y="91080"/>
-            <a:ext cx="8229240" cy="1509480"/>
+            <a:ext cx="8228880" cy="1509120"/>
           </a:xfrm>
           <a:prstGeom prst="rect">
             <a:avLst/>
@@ -2221,7 +2265,7 @@
             <a:pPr indent="0" algn="ctr">
               <a:buNone/>
             </a:pPr>
-            <a:endParaRPr b="0" lang="ru-RU" sz="5320" spc="-1" strike="noStrike">
+            <a:endParaRPr b="0" lang="ru-RU" sz="4400" spc="-1" strike="noStrike">
               <a:solidFill>
                 <a:srgbClr val="000000"/>
               </a:solidFill>
@@ -2243,7 +2287,7 @@
         <p:spPr>
           <a:xfrm>
             <a:off x="457200" y="1604520"/>
-            <a:ext cx="8229240" cy="3977280"/>
+            <a:ext cx="8228880" cy="3976920"/>
           </a:xfrm>
           <a:prstGeom prst="rect">
             <a:avLst/>
@@ -2277,7 +2321,7 @@
             <a:spLocks noGrp="1"/>
           </p:cNvSpPr>
           <p:nvPr>
-            <p:ph type="ftr" idx="2"/>
+            <p:ph type="ftr" idx="1"/>
           </p:nvPr>
         </p:nvSpPr>
         <p:spPr/>
@@ -2297,14 +2341,14 @@
             <a:spLocks noGrp="1"/>
           </p:cNvSpPr>
           <p:nvPr>
-            <p:ph type="sldNum" idx="3"/>
+            <p:ph type="sldNum" idx="2"/>
           </p:nvPr>
         </p:nvSpPr>
         <p:spPr/>
         <p:txBody>
           <a:bodyPr/>
           <a:p>
-            <a:fld id="{6E0DEED5-5EB0-48AC-9DB8-69E2F1A231BE}" type="slidenum">
+            <a:fld id="{C2F5C7FA-946C-4610-A63C-AC544FB5D4E1}" type="slidenum">
               <a:t>&lt;#&gt;</a:t>
             </a:fld>
           </a:p>
@@ -2317,7 +2361,7 @@
             <a:spLocks noGrp="1"/>
           </p:cNvSpPr>
           <p:nvPr>
-            <p:ph type="dt" idx="1"/>
+            <p:ph type="dt" idx="3"/>
           </p:nvPr>
         </p:nvSpPr>
         <p:spPr/>
@@ -2338,7 +2382,7 @@
 
 <file path=ppt/slideLayouts/slideLayout2.xml><?xml version="1.0" encoding="utf-8"?>
 <p:sldLayout xmlns:a="http://schemas.openxmlformats.org/drawingml/2006/main" xmlns:p="http://schemas.openxmlformats.org/presentationml/2006/main" xmlns:r="http://schemas.openxmlformats.org/officeDocument/2006/relationships" xmlns:p14="http://schemas.microsoft.com/office/powerpoint/2010/main" xmlns:p15="http://schemas.microsoft.com/office/powerpoint/2012/main" xmlns:mc="http://schemas.openxmlformats.org/markup-compatibility/2006" type="tx" preserve="1">
-  <p:cSld name="Обычный">
+  <p:cSld name="Обычный 1">
     <p:spTree>
       <p:nvGrpSpPr>
         <p:cNvPr id="1" name=""/>
@@ -2355,7 +2399,7 @@
       </p:grpSpPr>
       <p:sp>
         <p:nvSpPr>
-          <p:cNvPr id="7" name="PlaceHolder 1"/>
+          <p:cNvPr id="12" name="PlaceHolder 1"/>
           <p:cNvSpPr>
             <a:spLocks noGrp="1"/>
           </p:cNvSpPr>
@@ -2366,7 +2410,7 @@
         <p:spPr>
           <a:xfrm>
             <a:off x="457200" y="91080"/>
-            <a:ext cx="8229240" cy="1509480"/>
+            <a:ext cx="8228880" cy="1509120"/>
           </a:xfrm>
           <a:prstGeom prst="rect">
             <a:avLst/>
@@ -2384,7 +2428,7 @@
             <a:pPr indent="0" algn="ctr">
               <a:buNone/>
             </a:pPr>
-            <a:endParaRPr b="0" lang="ru-RU" sz="5320" spc="-1" strike="noStrike">
+            <a:endParaRPr b="0" lang="ru-RU" sz="4400" spc="-1" strike="noStrike">
               <a:solidFill>
                 <a:srgbClr val="000000"/>
               </a:solidFill>
@@ -2395,7 +2439,7 @@
       </p:sp>
       <p:sp>
         <p:nvSpPr>
-          <p:cNvPr id="8" name="PlaceHolder 2"/>
+          <p:cNvPr id="13" name="PlaceHolder 2"/>
           <p:cNvSpPr>
             <a:spLocks noGrp="1"/>
           </p:cNvSpPr>
@@ -2406,7 +2450,7 @@
         <p:spPr>
           <a:xfrm>
             <a:off x="457200" y="1604520"/>
-            <a:ext cx="8229240" cy="3977280"/>
+            <a:ext cx="8228880" cy="3976920"/>
           </a:xfrm>
           <a:prstGeom prst="rect">
             <a:avLst/>
@@ -2423,11 +2467,11 @@
           <a:p>
             <a:pPr indent="0">
               <a:spcBef>
-                <a:spcPts val="1712"/>
+                <a:spcPts val="1417"/>
               </a:spcBef>
               <a:buNone/>
             </a:pPr>
-            <a:endParaRPr b="0" lang="ru-RU" sz="3870" spc="-1" strike="noStrike">
+            <a:endParaRPr b="0" lang="ru-RU" sz="3200" spc="-1" strike="noStrike">
               <a:solidFill>
                 <a:srgbClr val="000000"/>
               </a:solidFill>
@@ -2443,7 +2487,7 @@
             <a:spLocks noGrp="1"/>
           </p:cNvSpPr>
           <p:nvPr>
-            <p:ph type="ftr" idx="2"/>
+            <p:ph type="ftr" idx="4"/>
           </p:nvPr>
         </p:nvSpPr>
         <p:spPr/>
@@ -2463,14 +2507,14 @@
             <a:spLocks noGrp="1"/>
           </p:cNvSpPr>
           <p:nvPr>
-            <p:ph type="sldNum" idx="3"/>
+            <p:ph type="sldNum" idx="5"/>
           </p:nvPr>
         </p:nvSpPr>
         <p:spPr/>
         <p:txBody>
           <a:bodyPr/>
           <a:p>
-            <a:fld id="{DB250F0E-355B-4B63-82B5-50BB8A551119}" type="slidenum">
+            <a:fld id="{3416B6EF-5CC3-4C96-9D9D-2A436155C452}" type="slidenum">
               <a:t>&lt;#&gt;</a:t>
             </a:fld>
           </a:p>
@@ -2483,7 +2527,7 @@
             <a:spLocks noGrp="1"/>
           </p:cNvSpPr>
           <p:nvPr>
-            <p:ph type="dt" idx="1"/>
+            <p:ph type="dt" idx="6"/>
           </p:nvPr>
         </p:nvSpPr>
         <p:spPr/>
@@ -2531,8 +2575,8 @@
         </p:nvSpPr>
         <p:spPr>
           <a:xfrm>
-            <a:off x="457200" y="273240"/>
-            <a:ext cx="8229240" cy="1144800"/>
+            <a:off x="457200" y="91080"/>
+            <a:ext cx="8228880" cy="1509120"/>
           </a:xfrm>
           <a:prstGeom prst="rect">
             <a:avLst/>
@@ -2547,11 +2591,11 @@
             <a:noAutofit/>
           </a:bodyPr>
           <a:p>
-            <a:pPr indent="0" algn="ctr">
+            <a:pPr indent="0">
               <a:buNone/>
             </a:pPr>
             <a:r>
-              <a:rPr b="0" lang="ru-RU" sz="5320" spc="-1" strike="noStrike">
+              <a:rPr b="0" lang="ru-RU" sz="1800" spc="-1" strike="noStrike">
                 <a:solidFill>
                   <a:srgbClr val="000000"/>
                 </a:solidFill>
@@ -2559,7 +2603,7 @@
               </a:rPr>
               <a:t>Для правки текста заглавия щёлкните мышью</a:t>
             </a:r>
-            <a:endParaRPr b="0" lang="ru-RU" sz="5320" spc="-1" strike="noStrike">
+            <a:endParaRPr b="0" lang="ru-RU" sz="1800" spc="-1" strike="noStrike">
               <a:solidFill>
                 <a:srgbClr val="000000"/>
               </a:solidFill>
@@ -2575,13 +2619,13 @@
             <a:spLocks noGrp="1"/>
           </p:cNvSpPr>
           <p:nvPr>
-            <p:ph type="body"/>
+            <p:ph type="ftr" idx="1"/>
           </p:nvPr>
         </p:nvSpPr>
         <p:spPr>
           <a:xfrm>
-            <a:off x="457200" y="1604520"/>
-            <a:ext cx="8229240" cy="3977280"/>
+            <a:off x="3126960" y="6247440"/>
+            <a:ext cx="2898000" cy="471960"/>
           </a:xfrm>
           <a:prstGeom prst="rect">
             <a:avLst/>
@@ -2593,202 +2637,49 @@
         </p:spPr>
         <p:txBody>
           <a:bodyPr lIns="0" rIns="0" tIns="0" bIns="0" anchor="t">
-            <a:normAutofit/>
+            <a:noAutofit/>
           </a:bodyPr>
-          <a:p>
-            <a:pPr marL="432000" indent="-324000">
-              <a:spcBef>
-                <a:spcPts val="1712"/>
-              </a:spcBef>
-              <a:buClr>
-                <a:srgbClr val="000000"/>
-              </a:buClr>
-              <a:buSzPct val="45000"/>
-              <a:buFont typeface="Wingdings" charset="2"/>
-              <a:buChar char=""/>
-            </a:pPr>
-            <a:r>
-              <a:rPr b="0" lang="ru-RU" sz="3870" spc="-1" strike="noStrike">
+          <a:lstStyle>
+            <a:lvl1pPr indent="0" algn="ctr">
+              <a:lnSpc>
+                <a:spcPct val="100000"/>
+              </a:lnSpc>
+              <a:buNone/>
+              <a:tabLst>
+                <a:tab algn="l" pos="0"/>
+              </a:tabLst>
+              <a:defRPr b="0" lang="ru-RU" sz="1400" spc="-1" strike="noStrike">
                 <a:solidFill>
                   <a:srgbClr val="000000"/>
                 </a:solidFill>
-                <a:latin typeface="Arial"/>
+                <a:latin typeface="Times New Roman"/>
+              </a:defRPr>
+            </a:lvl1pPr>
+          </a:lstStyle>
+          <a:p>
+            <a:pPr indent="0" algn="ctr">
+              <a:lnSpc>
+                <a:spcPct val="100000"/>
+              </a:lnSpc>
+              <a:buNone/>
+              <a:tabLst>
+                <a:tab algn="l" pos="0"/>
+              </a:tabLst>
+            </a:pPr>
+            <a:r>
+              <a:rPr b="0" lang="ru-RU" sz="1400" spc="-1" strike="noStrike">
+                <a:solidFill>
+                  <a:srgbClr val="000000"/>
+                </a:solidFill>
+                <a:latin typeface="Times New Roman"/>
               </a:rPr>
-              <a:t>Для правки структуры щёлкните мышью</a:t>
+              <a:t>&lt;нижний колонтитул&gt;</a:t>
             </a:r>
-            <a:endParaRPr b="0" lang="ru-RU" sz="3870" spc="-1" strike="noStrike">
+            <a:endParaRPr b="0" lang="ru-RU" sz="1400" spc="-1" strike="noStrike">
               <a:solidFill>
                 <a:srgbClr val="000000"/>
               </a:solidFill>
-              <a:latin typeface="Arial"/>
-            </a:endParaRPr>
-          </a:p>
-          <a:p>
-            <a:pPr lvl="1" marL="864000" indent="-324000">
-              <a:spcBef>
-                <a:spcPts val="1369"/>
-              </a:spcBef>
-              <a:buClr>
-                <a:srgbClr val="000000"/>
-              </a:buClr>
-              <a:buSzPct val="75000"/>
-              <a:buFont typeface="Symbol" charset="2"/>
-              <a:buChar char=""/>
-            </a:pPr>
-            <a:r>
-              <a:rPr b="0" lang="ru-RU" sz="3390" spc="-1" strike="noStrike">
-                <a:solidFill>
-                  <a:srgbClr val="000000"/>
-                </a:solidFill>
-                <a:latin typeface="Arial"/>
-              </a:rPr>
-              <a:t>Второй уровень структуры</a:t>
-            </a:r>
-            <a:endParaRPr b="0" lang="ru-RU" sz="3390" spc="-1" strike="noStrike">
-              <a:solidFill>
-                <a:srgbClr val="000000"/>
-              </a:solidFill>
-              <a:latin typeface="Arial"/>
-            </a:endParaRPr>
-          </a:p>
-          <a:p>
-            <a:pPr lvl="2" marL="1296000" indent="-288000">
-              <a:spcBef>
-                <a:spcPts val="1026"/>
-              </a:spcBef>
-              <a:buClr>
-                <a:srgbClr val="000000"/>
-              </a:buClr>
-              <a:buSzPct val="45000"/>
-              <a:buFont typeface="Wingdings" charset="2"/>
-              <a:buChar char=""/>
-            </a:pPr>
-            <a:r>
-              <a:rPr b="0" lang="ru-RU" sz="2900" spc="-1" strike="noStrike">
-                <a:solidFill>
-                  <a:srgbClr val="000000"/>
-                </a:solidFill>
-                <a:latin typeface="Arial"/>
-              </a:rPr>
-              <a:t>Третий уровень структуры</a:t>
-            </a:r>
-            <a:endParaRPr b="0" lang="ru-RU" sz="2900" spc="-1" strike="noStrike">
-              <a:solidFill>
-                <a:srgbClr val="000000"/>
-              </a:solidFill>
-              <a:latin typeface="Arial"/>
-            </a:endParaRPr>
-          </a:p>
-          <a:p>
-            <a:pPr lvl="3" marL="1728000" indent="-216000">
-              <a:spcBef>
-                <a:spcPts val="683"/>
-              </a:spcBef>
-              <a:buClr>
-                <a:srgbClr val="000000"/>
-              </a:buClr>
-              <a:buSzPct val="75000"/>
-              <a:buFont typeface="Symbol" charset="2"/>
-              <a:buChar char=""/>
-            </a:pPr>
-            <a:r>
-              <a:rPr b="0" lang="ru-RU" sz="2420" spc="-1" strike="noStrike">
-                <a:solidFill>
-                  <a:srgbClr val="000000"/>
-                </a:solidFill>
-                <a:latin typeface="Arial"/>
-              </a:rPr>
-              <a:t>Четвёртый уровень структуры</a:t>
-            </a:r>
-            <a:endParaRPr b="0" lang="ru-RU" sz="2420" spc="-1" strike="noStrike">
-              <a:solidFill>
-                <a:srgbClr val="000000"/>
-              </a:solidFill>
-              <a:latin typeface="Arial"/>
-            </a:endParaRPr>
-          </a:p>
-          <a:p>
-            <a:pPr lvl="4" marL="2160000" indent="-216000">
-              <a:spcBef>
-                <a:spcPts val="340"/>
-              </a:spcBef>
-              <a:buClr>
-                <a:srgbClr val="000000"/>
-              </a:buClr>
-              <a:buSzPct val="45000"/>
-              <a:buFont typeface="Wingdings" charset="2"/>
-              <a:buChar char=""/>
-            </a:pPr>
-            <a:r>
-              <a:rPr b="0" lang="ru-RU" sz="2420" spc="-1" strike="noStrike">
-                <a:solidFill>
-                  <a:srgbClr val="000000"/>
-                </a:solidFill>
-                <a:latin typeface="Arial"/>
-              </a:rPr>
-              <a:t>Пятый уровень структуры</a:t>
-            </a:r>
-            <a:endParaRPr b="0" lang="ru-RU" sz="2420" spc="-1" strike="noStrike">
-              <a:solidFill>
-                <a:srgbClr val="000000"/>
-              </a:solidFill>
-              <a:latin typeface="Arial"/>
-            </a:endParaRPr>
-          </a:p>
-          <a:p>
-            <a:pPr lvl="5" marL="2592000" indent="-216000">
-              <a:spcBef>
-                <a:spcPts val="340"/>
-              </a:spcBef>
-              <a:buClr>
-                <a:srgbClr val="000000"/>
-              </a:buClr>
-              <a:buSzPct val="45000"/>
-              <a:buFont typeface="Wingdings" charset="2"/>
-              <a:buChar char=""/>
-            </a:pPr>
-            <a:r>
-              <a:rPr b="0" lang="ru-RU" sz="2420" spc="-1" strike="noStrike">
-                <a:solidFill>
-                  <a:srgbClr val="000000"/>
-                </a:solidFill>
-                <a:latin typeface="Arial"/>
-              </a:rPr>
-              <a:t>Шестой уровень структуры</a:t>
-            </a:r>
-            <a:endParaRPr b="0" lang="ru-RU" sz="2420" spc="-1" strike="noStrike">
-              <a:solidFill>
-                <a:srgbClr val="000000"/>
-              </a:solidFill>
-              <a:latin typeface="Arial"/>
-            </a:endParaRPr>
-          </a:p>
-          <a:p>
-            <a:pPr lvl="6" marL="3024000" indent="-216000">
-              <a:spcBef>
-                <a:spcPts val="340"/>
-              </a:spcBef>
-              <a:buClr>
-                <a:srgbClr val="000000"/>
-              </a:buClr>
-              <a:buSzPct val="45000"/>
-              <a:buFont typeface="Wingdings" charset="2"/>
-              <a:buChar char=""/>
-            </a:pPr>
-            <a:r>
-              <a:rPr b="0" lang="ru-RU" sz="2420" spc="-1" strike="noStrike">
-                <a:solidFill>
-                  <a:srgbClr val="000000"/>
-                </a:solidFill>
-                <a:latin typeface="Arial"/>
-              </a:rPr>
-              <a:t>Седьмой уровень структуры</a:t>
-            </a:r>
-            <a:endParaRPr b="0" lang="ru-RU" sz="2420" spc="-1" strike="noStrike">
-              <a:solidFill>
-                <a:srgbClr val="000000"/>
-              </a:solidFill>
-              <a:latin typeface="Arial"/>
+              <a:latin typeface="Times New Roman"/>
             </a:endParaRPr>
           </a:p>
         </p:txBody>
@@ -2800,13 +2691,85 @@
             <a:spLocks noGrp="1"/>
           </p:cNvSpPr>
           <p:nvPr>
-            <p:ph type="dt" idx="1"/>
+            <p:ph type="sldNum" idx="2"/>
+          </p:nvPr>
+        </p:nvSpPr>
+        <p:spPr>
+          <a:xfrm>
+            <a:off x="6555960" y="6247440"/>
+            <a:ext cx="2129760" cy="471960"/>
+          </a:xfrm>
+          <a:prstGeom prst="rect">
+            <a:avLst/>
+          </a:prstGeom>
+          <a:noFill/>
+          <a:ln w="0">
+            <a:noFill/>
+          </a:ln>
+        </p:spPr>
+        <p:txBody>
+          <a:bodyPr lIns="0" rIns="0" tIns="0" bIns="0" anchor="t">
+            <a:noAutofit/>
+          </a:bodyPr>
+          <a:lstStyle>
+            <a:lvl1pPr indent="0" algn="r">
+              <a:lnSpc>
+                <a:spcPct val="100000"/>
+              </a:lnSpc>
+              <a:buNone/>
+              <a:tabLst>
+                <a:tab algn="l" pos="0"/>
+              </a:tabLst>
+              <a:defRPr b="0" lang="ru-RU" sz="1400" spc="-1" strike="noStrike">
+                <a:solidFill>
+                  <a:srgbClr val="000000"/>
+                </a:solidFill>
+                <a:latin typeface="Times New Roman"/>
+              </a:defRPr>
+            </a:lvl1pPr>
+          </a:lstStyle>
+          <a:p>
+            <a:pPr indent="0" algn="r">
+              <a:lnSpc>
+                <a:spcPct val="100000"/>
+              </a:lnSpc>
+              <a:buNone/>
+              <a:tabLst>
+                <a:tab algn="l" pos="0"/>
+              </a:tabLst>
+            </a:pPr>
+            <a:fld id="{94F1C47F-FF59-441C-8EEB-04B87A6C5116}" type="slidenum">
+              <a:rPr b="0" lang="ru-RU" sz="1400" spc="-1" strike="noStrike">
+                <a:solidFill>
+                  <a:srgbClr val="000000"/>
+                </a:solidFill>
+                <a:latin typeface="Times New Roman"/>
+              </a:rPr>
+              <a:t>&lt;номер&gt;</a:t>
+            </a:fld>
+            <a:endParaRPr b="0" lang="ru-RU" sz="1400" spc="-1" strike="noStrike">
+              <a:solidFill>
+                <a:srgbClr val="000000"/>
+              </a:solidFill>
+              <a:latin typeface="Times New Roman"/>
+            </a:endParaRPr>
+          </a:p>
+        </p:txBody>
+      </p:sp>
+      <p:sp>
+        <p:nvSpPr>
+          <p:cNvPr id="3" name="PlaceHolder 4"/>
+          <p:cNvSpPr>
+            <a:spLocks noGrp="1"/>
+          </p:cNvSpPr>
+          <p:nvPr>
+            <p:ph type="dt" idx="3"/>
           </p:nvPr>
         </p:nvSpPr>
         <p:spPr>
           <a:xfrm>
             <a:off x="457200" y="6247440"/>
-            <a:ext cx="2130120" cy="472320"/>
+            <a:ext cx="2129760" cy="471960"/>
           </a:xfrm>
           <a:prstGeom prst="rect">
             <a:avLst/>
@@ -2855,18 +2818,543 @@
       </p:sp>
       <p:sp>
         <p:nvSpPr>
-          <p:cNvPr id="3" name="PlaceHolder 4"/>
+          <p:cNvPr id="4" name="PlaceHolder 5"/>
           <p:cNvSpPr>
             <a:spLocks noGrp="1"/>
           </p:cNvSpPr>
           <p:nvPr>
-            <p:ph type="ftr" idx="2"/>
+            <p:ph type="body"/>
+          </p:nvPr>
+        </p:nvSpPr>
+        <p:spPr>
+          <a:xfrm>
+            <a:off x="457200" y="1604520"/>
+            <a:ext cx="8229240" cy="3977280"/>
+          </a:xfrm>
+          <a:prstGeom prst="rect">
+            <a:avLst/>
+          </a:prstGeom>
+          <a:noFill/>
+          <a:ln w="0">
+            <a:noFill/>
+          </a:ln>
+        </p:spPr>
+        <p:txBody>
+          <a:bodyPr lIns="0" rIns="0" tIns="0" bIns="0" anchor="t">
+            <a:normAutofit/>
+          </a:bodyPr>
+          <a:p>
+            <a:pPr marL="432000" indent="-324000">
+              <a:spcBef>
+                <a:spcPts val="1417"/>
+              </a:spcBef>
+              <a:buClr>
+                <a:srgbClr val="000000"/>
+              </a:buClr>
+              <a:buSzPct val="45000"/>
+              <a:buFont typeface="Wingdings" charset="2"/>
+              <a:buChar char=""/>
+            </a:pPr>
+            <a:r>
+              <a:rPr b="0" lang="ru-RU" sz="3200" spc="-1" strike="noStrike">
+                <a:solidFill>
+                  <a:srgbClr val="000000"/>
+                </a:solidFill>
+                <a:latin typeface="Arial"/>
+              </a:rPr>
+              <a:t>Для правки структуры щёлкните мышью</a:t>
+            </a:r>
+            <a:endParaRPr b="0" lang="ru-RU" sz="3200" spc="-1" strike="noStrike">
+              <a:solidFill>
+                <a:srgbClr val="000000"/>
+              </a:solidFill>
+              <a:latin typeface="Arial"/>
+            </a:endParaRPr>
+          </a:p>
+          <a:p>
+            <a:pPr lvl="1" marL="864000" indent="-324000">
+              <a:spcBef>
+                <a:spcPts val="1134"/>
+              </a:spcBef>
+              <a:buClr>
+                <a:srgbClr val="000000"/>
+              </a:buClr>
+              <a:buSzPct val="75000"/>
+              <a:buFont typeface="Symbol" charset="2"/>
+              <a:buChar char=""/>
+            </a:pPr>
+            <a:r>
+              <a:rPr b="0" lang="ru-RU" sz="2800" spc="-1" strike="noStrike">
+                <a:solidFill>
+                  <a:srgbClr val="000000"/>
+                </a:solidFill>
+                <a:latin typeface="Arial"/>
+              </a:rPr>
+              <a:t>Второй уровень структуры</a:t>
+            </a:r>
+            <a:endParaRPr b="0" lang="ru-RU" sz="2800" spc="-1" strike="noStrike">
+              <a:solidFill>
+                <a:srgbClr val="000000"/>
+              </a:solidFill>
+              <a:latin typeface="Arial"/>
+            </a:endParaRPr>
+          </a:p>
+          <a:p>
+            <a:pPr lvl="2" marL="1296000" indent="-288000">
+              <a:spcBef>
+                <a:spcPts val="850"/>
+              </a:spcBef>
+              <a:buClr>
+                <a:srgbClr val="000000"/>
+              </a:buClr>
+              <a:buSzPct val="45000"/>
+              <a:buFont typeface="Wingdings" charset="2"/>
+              <a:buChar char=""/>
+            </a:pPr>
+            <a:r>
+              <a:rPr b="0" lang="ru-RU" sz="2400" spc="-1" strike="noStrike">
+                <a:solidFill>
+                  <a:srgbClr val="000000"/>
+                </a:solidFill>
+                <a:latin typeface="Arial"/>
+              </a:rPr>
+              <a:t>Третий уровень структуры</a:t>
+            </a:r>
+            <a:endParaRPr b="0" lang="ru-RU" sz="2400" spc="-1" strike="noStrike">
+              <a:solidFill>
+                <a:srgbClr val="000000"/>
+              </a:solidFill>
+              <a:latin typeface="Arial"/>
+            </a:endParaRPr>
+          </a:p>
+          <a:p>
+            <a:pPr lvl="3" marL="1728000" indent="-216000">
+              <a:spcBef>
+                <a:spcPts val="567"/>
+              </a:spcBef>
+              <a:buClr>
+                <a:srgbClr val="000000"/>
+              </a:buClr>
+              <a:buSzPct val="75000"/>
+              <a:buFont typeface="Symbol" charset="2"/>
+              <a:buChar char=""/>
+            </a:pPr>
+            <a:r>
+              <a:rPr b="0" lang="ru-RU" sz="2000" spc="-1" strike="noStrike">
+                <a:solidFill>
+                  <a:srgbClr val="000000"/>
+                </a:solidFill>
+                <a:latin typeface="Arial"/>
+              </a:rPr>
+              <a:t>Четвёртый уровень структуры</a:t>
+            </a:r>
+            <a:endParaRPr b="0" lang="ru-RU" sz="2000" spc="-1" strike="noStrike">
+              <a:solidFill>
+                <a:srgbClr val="000000"/>
+              </a:solidFill>
+              <a:latin typeface="Arial"/>
+            </a:endParaRPr>
+          </a:p>
+          <a:p>
+            <a:pPr lvl="4" marL="2160000" indent="-216000">
+              <a:spcBef>
+                <a:spcPts val="283"/>
+              </a:spcBef>
+              <a:buClr>
+                <a:srgbClr val="000000"/>
+              </a:buClr>
+              <a:buSzPct val="45000"/>
+              <a:buFont typeface="Wingdings" charset="2"/>
+              <a:buChar char=""/>
+            </a:pPr>
+            <a:r>
+              <a:rPr b="0" lang="ru-RU" sz="2000" spc="-1" strike="noStrike">
+                <a:solidFill>
+                  <a:srgbClr val="000000"/>
+                </a:solidFill>
+                <a:latin typeface="Arial"/>
+              </a:rPr>
+              <a:t>Пятый уровень структуры</a:t>
+            </a:r>
+            <a:endParaRPr b="0" lang="ru-RU" sz="2000" spc="-1" strike="noStrike">
+              <a:solidFill>
+                <a:srgbClr val="000000"/>
+              </a:solidFill>
+              <a:latin typeface="Arial"/>
+            </a:endParaRPr>
+          </a:p>
+          <a:p>
+            <a:pPr lvl="5" marL="2592000" indent="-216000">
+              <a:spcBef>
+                <a:spcPts val="283"/>
+              </a:spcBef>
+              <a:buClr>
+                <a:srgbClr val="000000"/>
+              </a:buClr>
+              <a:buSzPct val="45000"/>
+              <a:buFont typeface="Wingdings" charset="2"/>
+              <a:buChar char=""/>
+            </a:pPr>
+            <a:r>
+              <a:rPr b="0" lang="ru-RU" sz="2000" spc="-1" strike="noStrike">
+                <a:solidFill>
+                  <a:srgbClr val="000000"/>
+                </a:solidFill>
+                <a:latin typeface="Arial"/>
+              </a:rPr>
+              <a:t>Шестой уровень структуры</a:t>
+            </a:r>
+            <a:endParaRPr b="0" lang="ru-RU" sz="2000" spc="-1" strike="noStrike">
+              <a:solidFill>
+                <a:srgbClr val="000000"/>
+              </a:solidFill>
+              <a:latin typeface="Arial"/>
+            </a:endParaRPr>
+          </a:p>
+          <a:p>
+            <a:pPr lvl="6" marL="3024000" indent="-216000">
+              <a:spcBef>
+                <a:spcPts val="283"/>
+              </a:spcBef>
+              <a:buClr>
+                <a:srgbClr val="000000"/>
+              </a:buClr>
+              <a:buSzPct val="45000"/>
+              <a:buFont typeface="Wingdings" charset="2"/>
+              <a:buChar char=""/>
+            </a:pPr>
+            <a:r>
+              <a:rPr b="0" lang="ru-RU" sz="2000" spc="-1" strike="noStrike">
+                <a:solidFill>
+                  <a:srgbClr val="000000"/>
+                </a:solidFill>
+                <a:latin typeface="Arial"/>
+              </a:rPr>
+              <a:t>Седьмой уровень структуры</a:t>
+            </a:r>
+            <a:endParaRPr b="0" lang="ru-RU" sz="2000" spc="-1" strike="noStrike">
+              <a:solidFill>
+                <a:srgbClr val="000000"/>
+              </a:solidFill>
+              <a:latin typeface="Arial"/>
+            </a:endParaRPr>
+          </a:p>
+        </p:txBody>
+      </p:sp>
+    </p:spTree>
+  </p:cSld>
+  <p:clrMap bg1="lt1" bg2="lt2" tx1="dk1" tx2="dk2" accent1="accent1" accent2="accent2" accent3="accent3" accent4="accent4" accent5="accent5" accent6="accent6" hlink="hlink" folHlink="folHlink"/>
+  <p:sldLayoutIdLst>
+    <p:sldLayoutId id="2147483649" r:id="rId2"/>
+  </p:sldLayoutIdLst>
+</p:sldMaster>
+</file>
+
+<file path=ppt/slideMasters/slideMaster2.xml><?xml version="1.0" encoding="utf-8"?>
+<p:sldMaster xmlns:a="http://schemas.openxmlformats.org/drawingml/2006/main" xmlns:p="http://schemas.openxmlformats.org/presentationml/2006/main" xmlns:r="http://schemas.openxmlformats.org/officeDocument/2006/relationships" xmlns:p14="http://schemas.microsoft.com/office/powerpoint/2010/main" xmlns:p15="http://schemas.microsoft.com/office/powerpoint/2012/main" xmlns:mc="http://schemas.openxmlformats.org/markup-compatibility/2006">
+  <p:cSld>
+    <p:spTree>
+      <p:nvGrpSpPr>
+        <p:cNvPr id="1" name=""/>
+        <p:cNvGrpSpPr/>
+        <p:nvPr/>
+      </p:nvGrpSpPr>
+      <p:grpSpPr>
+        <a:xfrm>
+          <a:off x="0" y="0"/>
+          <a:ext cx="0" cy="0"/>
+          <a:chOff x="0" y="0"/>
+          <a:chExt cx="0" cy="0"/>
+        </a:xfrm>
+      </p:grpSpPr>
+      <p:sp>
+        <p:nvSpPr>
+          <p:cNvPr id="7" name="PlaceHolder 1"/>
+          <p:cNvSpPr>
+            <a:spLocks noGrp="1"/>
+          </p:cNvSpPr>
+          <p:nvPr>
+            <p:ph type="title"/>
+          </p:nvPr>
+        </p:nvSpPr>
+        <p:spPr>
+          <a:xfrm>
+            <a:off x="457200" y="91080"/>
+            <a:ext cx="8228880" cy="1509120"/>
+          </a:xfrm>
+          <a:prstGeom prst="rect">
+            <a:avLst/>
+          </a:prstGeom>
+          <a:noFill/>
+          <a:ln w="0">
+            <a:noFill/>
+          </a:ln>
+        </p:spPr>
+        <p:txBody>
+          <a:bodyPr lIns="0" rIns="0" tIns="0" bIns="0" anchor="ctr">
+            <a:noAutofit/>
+          </a:bodyPr>
+          <a:p>
+            <a:pPr indent="0">
+              <a:buNone/>
+            </a:pPr>
+            <a:r>
+              <a:rPr b="0" lang="ru-RU" sz="1800" spc="-1" strike="noStrike">
+                <a:solidFill>
+                  <a:srgbClr val="000000"/>
+                </a:solidFill>
+                <a:latin typeface="Arial"/>
+              </a:rPr>
+              <a:t>Для правки текста заглавия щёлкните мышью</a:t>
+            </a:r>
+            <a:endParaRPr b="0" lang="ru-RU" sz="1800" spc="-1" strike="noStrike">
+              <a:solidFill>
+                <a:srgbClr val="000000"/>
+              </a:solidFill>
+              <a:latin typeface="Arial"/>
+            </a:endParaRPr>
+          </a:p>
+        </p:txBody>
+      </p:sp>
+      <p:sp>
+        <p:nvSpPr>
+          <p:cNvPr id="8" name="PlaceHolder 2"/>
+          <p:cNvSpPr>
+            <a:spLocks noGrp="1"/>
+          </p:cNvSpPr>
+          <p:nvPr>
+            <p:ph type="body"/>
+          </p:nvPr>
+        </p:nvSpPr>
+        <p:spPr>
+          <a:xfrm>
+            <a:off x="457200" y="1604520"/>
+            <a:ext cx="8228880" cy="3976920"/>
+          </a:xfrm>
+          <a:prstGeom prst="rect">
+            <a:avLst/>
+          </a:prstGeom>
+          <a:noFill/>
+          <a:ln w="0">
+            <a:noFill/>
+          </a:ln>
+        </p:spPr>
+        <p:txBody>
+          <a:bodyPr lIns="0" rIns="0" tIns="0" bIns="0" anchor="t">
+            <a:normAutofit/>
+          </a:bodyPr>
+          <a:p>
+            <a:pPr marL="432000" indent="-324000">
+              <a:spcBef>
+                <a:spcPts val="1417"/>
+              </a:spcBef>
+              <a:buClr>
+                <a:srgbClr val="000000"/>
+              </a:buClr>
+              <a:buSzPct val="45000"/>
+              <a:buFont typeface="Wingdings" charset="2"/>
+              <a:buChar char=""/>
+            </a:pPr>
+            <a:r>
+              <a:rPr b="0" lang="ru-RU" sz="1800" spc="-1" strike="noStrike">
+                <a:solidFill>
+                  <a:srgbClr val="000000"/>
+                </a:solidFill>
+                <a:latin typeface="Arial"/>
+              </a:rPr>
+              <a:t>Для правки структуры щёлкните мышью</a:t>
+            </a:r>
+            <a:endParaRPr b="0" lang="ru-RU" sz="1800" spc="-1" strike="noStrike">
+              <a:solidFill>
+                <a:srgbClr val="000000"/>
+              </a:solidFill>
+              <a:latin typeface="Arial"/>
+            </a:endParaRPr>
+          </a:p>
+          <a:p>
+            <a:pPr lvl="1" marL="864000" indent="-324000">
+              <a:spcBef>
+                <a:spcPts val="1134"/>
+              </a:spcBef>
+              <a:buClr>
+                <a:srgbClr val="000000"/>
+              </a:buClr>
+              <a:buSzPct val="75000"/>
+              <a:buFont typeface="Symbol" charset="2"/>
+              <a:buChar char=""/>
+            </a:pPr>
+            <a:r>
+              <a:rPr b="0" lang="ru-RU" sz="1800" spc="-1" strike="noStrike">
+                <a:solidFill>
+                  <a:srgbClr val="000000"/>
+                </a:solidFill>
+                <a:latin typeface="Arial"/>
+              </a:rPr>
+              <a:t>Второй уровень структуры</a:t>
+            </a:r>
+            <a:endParaRPr b="0" lang="ru-RU" sz="1800" spc="-1" strike="noStrike">
+              <a:solidFill>
+                <a:srgbClr val="000000"/>
+              </a:solidFill>
+              <a:latin typeface="Arial"/>
+            </a:endParaRPr>
+          </a:p>
+          <a:p>
+            <a:pPr lvl="2" marL="1296000" indent="-288000">
+              <a:spcBef>
+                <a:spcPts val="850"/>
+              </a:spcBef>
+              <a:buClr>
+                <a:srgbClr val="000000"/>
+              </a:buClr>
+              <a:buSzPct val="45000"/>
+              <a:buFont typeface="Wingdings" charset="2"/>
+              <a:buChar char=""/>
+            </a:pPr>
+            <a:r>
+              <a:rPr b="0" lang="ru-RU" sz="1800" spc="-1" strike="noStrike">
+                <a:solidFill>
+                  <a:srgbClr val="000000"/>
+                </a:solidFill>
+                <a:latin typeface="Arial"/>
+              </a:rPr>
+              <a:t>Третий уровень структуры</a:t>
+            </a:r>
+            <a:endParaRPr b="0" lang="ru-RU" sz="1800" spc="-1" strike="noStrike">
+              <a:solidFill>
+                <a:srgbClr val="000000"/>
+              </a:solidFill>
+              <a:latin typeface="Arial"/>
+            </a:endParaRPr>
+          </a:p>
+          <a:p>
+            <a:pPr lvl="3" marL="1728000" indent="-216000">
+              <a:spcBef>
+                <a:spcPts val="567"/>
+              </a:spcBef>
+              <a:buClr>
+                <a:srgbClr val="000000"/>
+              </a:buClr>
+              <a:buSzPct val="75000"/>
+              <a:buFont typeface="Symbol" charset="2"/>
+              <a:buChar char=""/>
+            </a:pPr>
+            <a:r>
+              <a:rPr b="0" lang="ru-RU" sz="1800" spc="-1" strike="noStrike">
+                <a:solidFill>
+                  <a:srgbClr val="000000"/>
+                </a:solidFill>
+                <a:latin typeface="Arial"/>
+              </a:rPr>
+              <a:t>Четвёртый уровень структуры</a:t>
+            </a:r>
+            <a:endParaRPr b="0" lang="ru-RU" sz="1800" spc="-1" strike="noStrike">
+              <a:solidFill>
+                <a:srgbClr val="000000"/>
+              </a:solidFill>
+              <a:latin typeface="Arial"/>
+            </a:endParaRPr>
+          </a:p>
+          <a:p>
+            <a:pPr lvl="4" marL="2160000" indent="-216000">
+              <a:spcBef>
+                <a:spcPts val="283"/>
+              </a:spcBef>
+              <a:buClr>
+                <a:srgbClr val="000000"/>
+              </a:buClr>
+              <a:buSzPct val="45000"/>
+              <a:buFont typeface="Wingdings" charset="2"/>
+              <a:buChar char=""/>
+            </a:pPr>
+            <a:r>
+              <a:rPr b="0" lang="ru-RU" sz="1800" spc="-1" strike="noStrike">
+                <a:solidFill>
+                  <a:srgbClr val="000000"/>
+                </a:solidFill>
+                <a:latin typeface="Arial"/>
+              </a:rPr>
+              <a:t>Пятый уровень структуры</a:t>
+            </a:r>
+            <a:endParaRPr b="0" lang="ru-RU" sz="1800" spc="-1" strike="noStrike">
+              <a:solidFill>
+                <a:srgbClr val="000000"/>
+              </a:solidFill>
+              <a:latin typeface="Arial"/>
+            </a:endParaRPr>
+          </a:p>
+          <a:p>
+            <a:pPr lvl="5" marL="2592000" indent="-216000">
+              <a:spcBef>
+                <a:spcPts val="283"/>
+              </a:spcBef>
+              <a:buClr>
+                <a:srgbClr val="000000"/>
+              </a:buClr>
+              <a:buSzPct val="45000"/>
+              <a:buFont typeface="Wingdings" charset="2"/>
+              <a:buChar char=""/>
+            </a:pPr>
+            <a:r>
+              <a:rPr b="0" lang="ru-RU" sz="1800" spc="-1" strike="noStrike">
+                <a:solidFill>
+                  <a:srgbClr val="000000"/>
+                </a:solidFill>
+                <a:latin typeface="Arial"/>
+              </a:rPr>
+              <a:t>Шестой уровень структуры</a:t>
+            </a:r>
+            <a:endParaRPr b="0" lang="ru-RU" sz="1800" spc="-1" strike="noStrike">
+              <a:solidFill>
+                <a:srgbClr val="000000"/>
+              </a:solidFill>
+              <a:latin typeface="Arial"/>
+            </a:endParaRPr>
+          </a:p>
+          <a:p>
+            <a:pPr lvl="6" marL="3024000" indent="-216000">
+              <a:spcBef>
+                <a:spcPts val="283"/>
+              </a:spcBef>
+              <a:buClr>
+                <a:srgbClr val="000000"/>
+              </a:buClr>
+              <a:buSzPct val="45000"/>
+              <a:buFont typeface="Wingdings" charset="2"/>
+              <a:buChar char=""/>
+            </a:pPr>
+            <a:r>
+              <a:rPr b="0" lang="ru-RU" sz="1800" spc="-1" strike="noStrike">
+                <a:solidFill>
+                  <a:srgbClr val="000000"/>
+                </a:solidFill>
+                <a:latin typeface="Arial"/>
+              </a:rPr>
+              <a:t>Седьмой уровень структуры</a:t>
+            </a:r>
+            <a:endParaRPr b="0" lang="ru-RU" sz="1800" spc="-1" strike="noStrike">
+              <a:solidFill>
+                <a:srgbClr val="000000"/>
+              </a:solidFill>
+              <a:latin typeface="Arial"/>
+            </a:endParaRPr>
+          </a:p>
+        </p:txBody>
+      </p:sp>
+      <p:sp>
+        <p:nvSpPr>
+          <p:cNvPr id="9" name="PlaceHolder 3"/>
+          <p:cNvSpPr>
+            <a:spLocks noGrp="1"/>
+          </p:cNvSpPr>
+          <p:nvPr>
+            <p:ph type="ftr" idx="4"/>
           </p:nvPr>
         </p:nvSpPr>
         <p:spPr>
           <a:xfrm>
             <a:off x="3126960" y="6247440"/>
-            <a:ext cx="2898360" cy="472320"/>
+            <a:ext cx="2898000" cy="471960"/>
           </a:xfrm>
           <a:prstGeom prst="rect">
             <a:avLst/>
@@ -2882,7 +3370,13 @@
           </a:bodyPr>
           <a:lstStyle>
             <a:lvl1pPr indent="0" algn="ctr">
+              <a:lnSpc>
+                <a:spcPct val="100000"/>
+              </a:lnSpc>
               <a:buNone/>
+              <a:tabLst>
+                <a:tab algn="l" pos="0"/>
+              </a:tabLst>
               <a:defRPr b="0" lang="ru-RU" sz="1400" spc="-1" strike="noStrike">
                 <a:solidFill>
                   <a:srgbClr val="000000"/>
@@ -2893,7 +3387,13 @@
           </a:lstStyle>
           <a:p>
             <a:pPr indent="0" algn="ctr">
+              <a:lnSpc>
+                <a:spcPct val="100000"/>
+              </a:lnSpc>
               <a:buNone/>
+              <a:tabLst>
+                <a:tab algn="l" pos="0"/>
+              </a:tabLst>
             </a:pPr>
             <a:r>
               <a:rPr b="0" lang="ru-RU" sz="1400" spc="-1" strike="noStrike">
@@ -2915,18 +3415,18 @@
       </p:sp>
       <p:sp>
         <p:nvSpPr>
-          <p:cNvPr id="4" name="PlaceHolder 5"/>
+          <p:cNvPr id="10" name="PlaceHolder 4"/>
           <p:cNvSpPr>
             <a:spLocks noGrp="1"/>
           </p:cNvSpPr>
           <p:nvPr>
-            <p:ph type="sldNum" idx="3"/>
+            <p:ph type="sldNum" idx="5"/>
           </p:nvPr>
         </p:nvSpPr>
         <p:spPr>
           <a:xfrm>
             <a:off x="6555960" y="6247440"/>
-            <a:ext cx="2130120" cy="472320"/>
+            <a:ext cx="2129760" cy="471960"/>
           </a:xfrm>
           <a:prstGeom prst="rect">
             <a:avLst/>
@@ -2942,7 +3442,13 @@
           </a:bodyPr>
           <a:lstStyle>
             <a:lvl1pPr indent="0" algn="r">
+              <a:lnSpc>
+                <a:spcPct val="100000"/>
+              </a:lnSpc>
               <a:buNone/>
+              <a:tabLst>
+                <a:tab algn="l" pos="0"/>
+              </a:tabLst>
               <a:defRPr b="0" lang="ru-RU" sz="1400" spc="-1" strike="noStrike">
                 <a:solidFill>
                   <a:srgbClr val="000000"/>
@@ -2953,9 +3459,15 @@
           </a:lstStyle>
           <a:p>
             <a:pPr indent="0" algn="r">
+              <a:lnSpc>
+                <a:spcPct val="100000"/>
+              </a:lnSpc>
               <a:buNone/>
+              <a:tabLst>
+                <a:tab algn="l" pos="0"/>
+              </a:tabLst>
             </a:pPr>
-            <a:fld id="{EFCBBFAE-C70F-4FBD-9B4D-CD3D6B39DF7D}" type="slidenum">
+            <a:fld id="{3BED112B-0BC0-412A-8AE5-B5010F3AB76D}" type="slidenum">
               <a:rPr b="0" lang="ru-RU" sz="1400" spc="-1" strike="noStrike">
                 <a:solidFill>
                   <a:srgbClr val="000000"/>
@@ -2973,12 +3485,71 @@
           </a:p>
         </p:txBody>
       </p:sp>
+      <p:sp>
+        <p:nvSpPr>
+          <p:cNvPr id="11" name="PlaceHolder 5"/>
+          <p:cNvSpPr>
+            <a:spLocks noGrp="1"/>
+          </p:cNvSpPr>
+          <p:nvPr>
+            <p:ph type="dt" idx="6"/>
+          </p:nvPr>
+        </p:nvSpPr>
+        <p:spPr>
+          <a:xfrm>
+            <a:off x="457200" y="6247440"/>
+            <a:ext cx="2129760" cy="471960"/>
+          </a:xfrm>
+          <a:prstGeom prst="rect">
+            <a:avLst/>
+          </a:prstGeom>
+          <a:noFill/>
+          <a:ln w="0">
+            <a:noFill/>
+          </a:ln>
+        </p:spPr>
+        <p:txBody>
+          <a:bodyPr lIns="0" rIns="0" tIns="0" bIns="0" anchor="t">
+            <a:noAutofit/>
+          </a:bodyPr>
+          <a:lstStyle>
+            <a:lvl1pPr indent="0">
+              <a:buNone/>
+              <a:defRPr b="0" lang="ru-RU" sz="1400" spc="-1" strike="noStrike">
+                <a:solidFill>
+                  <a:srgbClr val="000000"/>
+                </a:solidFill>
+                <a:latin typeface="Times New Roman"/>
+              </a:defRPr>
+            </a:lvl1pPr>
+          </a:lstStyle>
+          <a:p>
+            <a:pPr indent="0">
+              <a:buNone/>
+            </a:pPr>
+            <a:r>
+              <a:rPr b="0" lang="ru-RU" sz="1400" spc="-1" strike="noStrike">
+                <a:solidFill>
+                  <a:srgbClr val="000000"/>
+                </a:solidFill>
+                <a:latin typeface="Times New Roman"/>
+              </a:rPr>
+              <a:t>&lt;дата/время&gt;</a:t>
+            </a:r>
+            <a:endParaRPr b="0" lang="ru-RU" sz="1400" spc="-1" strike="noStrike">
+              <a:solidFill>
+                <a:srgbClr val="000000"/>
+              </a:solidFill>
+              <a:latin typeface="Times New Roman"/>
+            </a:endParaRPr>
+          </a:p>
+        </p:txBody>
+      </p:sp>
     </p:spTree>
   </p:cSld>
   <p:clrMap bg1="lt1" bg2="lt2" tx1="dk1" tx2="dk2" accent1="accent1" accent2="accent2" accent3="accent3" accent4="accent4" accent5="accent5" accent6="accent6" hlink="hlink" folHlink="folHlink"/>
   <p:sldLayoutIdLst>
-    <p:sldLayoutId id="2147483649" r:id="rId2"/>
-    <p:sldLayoutId id="2147483650" r:id="rId3"/>
+    <p:sldLayoutId id="2147483651" r:id="rId2"/>
   </p:sldLayoutIdLst>
 </p:sldMaster>
 </file>
@@ -2986,6 +3557,14 @@
 <file path=ppt/slides/slide1.xml><?xml version="1.0" encoding="utf-8"?>
 <p:sld xmlns:a="http://schemas.openxmlformats.org/drawingml/2006/main" xmlns:p="http://schemas.openxmlformats.org/presentationml/2006/main" xmlns:r="http://schemas.openxmlformats.org/officeDocument/2006/relationships" xmlns:p14="http://schemas.microsoft.com/office/powerpoint/2010/main" xmlns:p15="http://schemas.microsoft.com/office/powerpoint/2012/main" xmlns:mc="http://schemas.openxmlformats.org/markup-compatibility/2006">
   <p:cSld>
+    <p:bg>
+      <p:bgPr>
+        <a:blipFill rotWithShape="0">
+          <a:blip r:embed="rId1"/>
+          <a:tile tx="0" ty="0" sx="100000" sy="100000" algn="ctr"/>
+        </a:blipFill>
+      </p:bgPr>
+    </p:bg>
     <p:spTree>
       <p:nvGrpSpPr>
         <p:cNvPr id="1" name=""/>
@@ -3002,7 +3581,7 @@
       </p:grpSpPr>
       <p:sp>
         <p:nvSpPr>
-          <p:cNvPr id="9" name="PlaceHolder 1"/>
+          <p:cNvPr id="14" name="PlaceHolder 1"/>
           <p:cNvSpPr>
             <a:spLocks noGrp="1"/>
           </p:cNvSpPr>
@@ -3013,7 +3592,7 @@
         <p:spPr>
           <a:xfrm>
             <a:off x="457200" y="273240"/>
-            <a:ext cx="8229240" cy="1144800"/>
+            <a:ext cx="8228880" cy="1144440"/>
           </a:xfrm>
           <a:prstGeom prst="rect">
             <a:avLst/>
@@ -3029,7 +3608,13 @@
           </a:bodyPr>
           <a:p>
             <a:pPr indent="0" algn="ctr">
+              <a:lnSpc>
+                <a:spcPct val="100000"/>
+              </a:lnSpc>
               <a:buNone/>
+              <a:tabLst>
+                <a:tab algn="l" pos="0"/>
+              </a:tabLst>
             </a:pPr>
             <a:r>
               <a:rPr b="0" lang="ru-RU" sz="5320" spc="-1" strike="noStrike">
@@ -3051,7 +3636,7 @@
       </p:sp>
       <p:sp>
         <p:nvSpPr>
-          <p:cNvPr id="10" name="PlaceHolder 2"/>
+          <p:cNvPr id="15" name="PlaceHolder 2"/>
           <p:cNvSpPr>
             <a:spLocks noGrp="1"/>
           </p:cNvSpPr>
@@ -3062,7 +3647,7 @@
         <p:spPr>
           <a:xfrm>
             <a:off x="457200" y="1604520"/>
-            <a:ext cx="8229240" cy="3977280"/>
+            <a:ext cx="8228880" cy="3976920"/>
           </a:xfrm>
           <a:prstGeom prst="rect">
             <a:avLst/>
@@ -3078,7 +3663,13 @@
           </a:bodyPr>
           <a:p>
             <a:pPr indent="0" algn="r">
+              <a:lnSpc>
+                <a:spcPct val="100000"/>
+              </a:lnSpc>
               <a:buNone/>
+              <a:tabLst>
+                <a:tab algn="l" pos="0"/>
+              </a:tabLst>
             </a:pPr>
             <a:r>
               <a:rPr b="0" lang="ru-RU" sz="3870" spc="-1" strike="noStrike">
@@ -3087,7 +3678,7 @@
                 </a:solidFill>
                 <a:latin typeface="Arial"/>
               </a:rPr>
-              <a:t>Павлов ,Буткевич,</a:t>
+              <a:t>Павлов ,Буткевич,Кокин,</a:t>
             </a:r>
             <a:endParaRPr b="0" lang="ru-RU" sz="3870" spc="-1" strike="noStrike">
               <a:solidFill>
@@ -3098,7 +3689,13 @@
           </a:p>
           <a:p>
             <a:pPr indent="0" algn="r">
+              <a:lnSpc>
+                <a:spcPct val="100000"/>
+              </a:lnSpc>
               <a:buNone/>
+              <a:tabLst>
+                <a:tab algn="l" pos="0"/>
+              </a:tabLst>
             </a:pPr>
             <a:r>
               <a:rPr b="0" lang="ru-RU" sz="3870" spc="-1" strike="noStrike">
@@ -3118,7 +3715,13 @@
           </a:p>
           <a:p>
             <a:pPr indent="0" algn="r">
+              <a:lnSpc>
+                <a:spcPct val="100000"/>
+              </a:lnSpc>
               <a:buNone/>
+              <a:tabLst>
+                <a:tab algn="l" pos="0"/>
+              </a:tabLst>
             </a:pPr>
             <a:r>
               <a:rPr b="0" lang="ru-RU" sz="3870" spc="-1" strike="noStrike">
@@ -3151,9 +3754,17 @@
 </p:sld>
 </file>
 
-<file path=ppt/slides/slide2.xml><?xml version="1.0" encoding="utf-8"?>
+<file path=ppt/slides/slide10.xml><?xml version="1.0" encoding="utf-8"?>
 <p:sld xmlns:a="http://schemas.openxmlformats.org/drawingml/2006/main" xmlns:p="http://schemas.openxmlformats.org/presentationml/2006/main" xmlns:r="http://schemas.openxmlformats.org/officeDocument/2006/relationships" xmlns:p14="http://schemas.microsoft.com/office/powerpoint/2010/main" xmlns:p15="http://schemas.microsoft.com/office/powerpoint/2012/main" xmlns:mc="http://schemas.openxmlformats.org/markup-compatibility/2006">
   <p:cSld>
+    <p:bg>
+      <p:bgPr>
+        <a:blipFill rotWithShape="0">
+          <a:blip r:embed="rId1"/>
+          <a:tile tx="0" ty="0" sx="100000" sy="100000" algn="ctr"/>
+        </a:blipFill>
+      </p:bgPr>
+    </p:bg>
     <p:spTree>
       <p:nvGrpSpPr>
         <p:cNvPr id="1" name=""/>
@@ -3170,7 +3781,7 @@
       </p:grpSpPr>
       <p:sp>
         <p:nvSpPr>
-          <p:cNvPr id="11" name="PlaceHolder 1"/>
+          <p:cNvPr id="48" name="PlaceHolder 1"/>
           <p:cNvSpPr>
             <a:spLocks noGrp="1"/>
           </p:cNvSpPr>
@@ -3180,8 +3791,8 @@
         </p:nvSpPr>
         <p:spPr>
           <a:xfrm>
-            <a:off x="457200" y="273240"/>
-            <a:ext cx="8229240" cy="806760"/>
+            <a:off x="411120" y="2090880"/>
+            <a:ext cx="8228880" cy="1509120"/>
           </a:xfrm>
           <a:prstGeom prst="rect">
             <a:avLst/>
@@ -3200,46 +3811,23 @@
               <a:buNone/>
             </a:pPr>
             <a:r>
-              <a:rPr b="1" lang="ru-RU" sz="2400" spc="-1" strike="noStrike">
+              <a:rPr b="0" lang="ru-RU" sz="4400" spc="-1" strike="noStrike">
                 <a:solidFill>
                   <a:srgbClr val="000000"/>
                 </a:solidFill>
-                <a:latin typeface="Times New Roman"/>
+                <a:latin typeface="Arial"/>
               </a:rPr>
-              <a:t>Данные по Горячему ключу</a:t>
+              <a:t>Спасибо за Внимание!</a:t>
             </a:r>
-            <a:endParaRPr b="1" lang="ru-RU" sz="2400" spc="-1" strike="noStrike">
+            <a:endParaRPr b="0" lang="ru-RU" sz="4400" spc="-1" strike="noStrike">
               <a:solidFill>
                 <a:srgbClr val="000000"/>
               </a:solidFill>
-              <a:latin typeface="Times New Roman"/>
+              <a:latin typeface="Arial"/>
             </a:endParaRPr>
           </a:p>
         </p:txBody>
       </p:sp>
-      <p:pic>
-        <p:nvPicPr>
-          <p:cNvPr id="12" name="" descr=""/>
-          <p:cNvPicPr/>
-          <p:nvPr/>
-        </p:nvPicPr>
-        <p:blipFill>
-          <a:blip r:embed="rId1"/>
-          <a:stretch/>
-        </p:blipFill>
-        <p:spPr>
-          <a:xfrm>
-            <a:off x="601560" y="1260000"/>
-            <a:ext cx="8038440" cy="5032800"/>
-          </a:xfrm>
-          <a:prstGeom prst="rect">
-            <a:avLst/>
-          </a:prstGeom>
-          <a:ln w="0">
-            <a:noFill/>
-          </a:ln>
-        </p:spPr>
-      </p:pic>
     </p:spTree>
   </p:cSld>
   <mc:AlternateContent>
@@ -3253,855 +3841,17 @@
 </p:sld>
 </file>
 
-<file path=ppt/slides/slide3.xml><?xml version="1.0" encoding="utf-8"?>
+<file path=ppt/slides/slide2.xml><?xml version="1.0" encoding="utf-8"?>
 <p:sld xmlns:a="http://schemas.openxmlformats.org/drawingml/2006/main" xmlns:p="http://schemas.openxmlformats.org/presentationml/2006/main" xmlns:r="http://schemas.openxmlformats.org/officeDocument/2006/relationships" xmlns:p14="http://schemas.microsoft.com/office/powerpoint/2010/main" xmlns:p15="http://schemas.microsoft.com/office/powerpoint/2012/main" xmlns:mc="http://schemas.openxmlformats.org/markup-compatibility/2006">
   <p:cSld>
-    <p:spTree>
-      <p:nvGrpSpPr>
-        <p:cNvPr id="1" name=""/>
-        <p:cNvGrpSpPr/>
-        <p:nvPr/>
-      </p:nvGrpSpPr>
-      <p:grpSpPr>
-        <a:xfrm>
-          <a:off x="0" y="0"/>
-          <a:ext cx="0" cy="0"/>
-          <a:chOff x="0" y="0"/>
-          <a:chExt cx="0" cy="0"/>
-        </a:xfrm>
-      </p:grpSpPr>
-      <p:sp>
-        <p:nvSpPr>
-          <p:cNvPr id="13" name=""/>
-          <p:cNvSpPr txBox="1"/>
-          <p:nvPr/>
-        </p:nvSpPr>
-        <p:spPr>
-          <a:xfrm>
-            <a:off x="457560" y="273600"/>
-            <a:ext cx="8229240" cy="806760"/>
-          </a:xfrm>
-          <a:prstGeom prst="rect">
-            <a:avLst/>
-          </a:prstGeom>
-          <a:noFill/>
-          <a:ln w="0">
-            <a:noFill/>
-          </a:ln>
-        </p:spPr>
-        <p:txBody>
-          <a:bodyPr lIns="0" rIns="0" tIns="0" bIns="0" anchor="ctr">
-            <a:noAutofit/>
-          </a:bodyPr>
-          <a:p>
-            <a:pPr algn="ctr"/>
-            <a:r>
-              <a:rPr b="1" lang="ru-RU" sz="2400" spc="-1" strike="noStrike">
-                <a:solidFill>
-                  <a:srgbClr val="000000"/>
-                </a:solidFill>
-                <a:latin typeface="Times New Roman"/>
-              </a:rPr>
-              <a:t>Данные по Горячему ключу</a:t>
-            </a:r>
-            <a:endParaRPr b="1" lang="ru-RU" sz="2400" spc="-1" strike="noStrike">
-              <a:solidFill>
-                <a:srgbClr val="000000"/>
-              </a:solidFill>
-              <a:latin typeface="Times New Roman"/>
-            </a:endParaRPr>
-          </a:p>
-        </p:txBody>
-      </p:sp>
-      <p:graphicFrame>
-        <p:nvGraphicFramePr>
-          <p:cNvPr id="14" name=""/>
-          <p:cNvGraphicFramePr/>
-          <p:nvPr/>
-        </p:nvGraphicFramePr>
-        <p:xfrm>
-          <a:off x="1620000" y="2880360"/>
-          <a:ext cx="5759640" cy="3239640"/>
-        </p:xfrm>
-        <a:graphic>
-          <a:graphicData uri="http://schemas.openxmlformats.org/drawingml/2006/chart">
-            <c:chart xmlns:c="http://schemas.openxmlformats.org/drawingml/2006/chart" xmlns:r="http://schemas.openxmlformats.org/officeDocument/2006/relationships" r:id="rId1"/>
-          </a:graphicData>
-        </a:graphic>
-      </p:graphicFrame>
-      <p:graphicFrame>
-        <p:nvGraphicFramePr>
-          <p:cNvPr id="15" name=""/>
-          <p:cNvGraphicFramePr/>
-          <p:nvPr/>
-        </p:nvGraphicFramePr>
-        <p:xfrm>
-          <a:off x="1080000" y="1856520"/>
-          <a:ext cx="7210440" cy="930240"/>
-        </p:xfrm>
-        <a:graphic>
-          <a:graphicData uri="http://schemas.openxmlformats.org/drawingml/2006/table">
-            <a:tbl>
-              <a:tblPr/>
-              <a:tblGrid>
-                <a:gridCol w="1356120"/>
-                <a:gridCol w="703800"/>
-                <a:gridCol w="1029960"/>
-                <a:gridCol w="1029960"/>
-                <a:gridCol w="1029960"/>
-                <a:gridCol w="1029960"/>
-                <a:gridCol w="1030680"/>
-              </a:tblGrid>
-              <a:tr h="346320">
-                <a:tc>
-                  <a:txBody>
-                    <a:bodyPr lIns="36000" rIns="36000" tIns="36000" bIns="36000" anchor="t">
-                      <a:noAutofit/>
-                    </a:bodyPr>
-                    <a:p>
-                      <a:r>
-                        <a:rPr b="0" lang="ru-RU" sz="1800" spc="-1" strike="noStrike">
-                          <a:solidFill>
-                            <a:srgbClr val="000000"/>
-                          </a:solidFill>
-                          <a:latin typeface="Times New Roman"/>
-                        </a:rPr>
-                        <a:t>оценка</a:t>
-                      </a:r>
-                      <a:endParaRPr b="0" lang="ru-RU" sz="1800" spc="-1" strike="noStrike">
-                        <a:solidFill>
-                          <a:srgbClr val="000000"/>
-                        </a:solidFill>
-                        <a:latin typeface="Times New Roman"/>
-                      </a:endParaRPr>
-                    </a:p>
-                  </a:txBody>
-                  <a:tcPr anchor="t" marL="36000" marR="36000">
-                    <a:lnL w="7200">
-                      <a:solidFill>
-                        <a:srgbClr val="000000"/>
-                      </a:solidFill>
-                      <a:prstDash val="solid"/>
-                    </a:lnL>
-                    <a:lnR w="7200">
-                      <a:solidFill>
-                        <a:srgbClr val="000000"/>
-                      </a:solidFill>
-                      <a:prstDash val="solid"/>
-                    </a:lnR>
-                    <a:lnT w="7200">
-                      <a:solidFill>
-                        <a:srgbClr val="000000"/>
-                      </a:solidFill>
-                      <a:prstDash val="solid"/>
-                    </a:lnT>
-                    <a:lnB w="7200">
-                      <a:solidFill>
-                        <a:srgbClr val="000000"/>
-                      </a:solidFill>
-                      <a:prstDash val="solid"/>
-                    </a:lnB>
-                    <a:noFill/>
-                  </a:tcPr>
-                </a:tc>
-                <a:tc>
-                  <a:txBody>
-                    <a:bodyPr lIns="36000" rIns="36000" tIns="36000" bIns="36000" anchor="t">
-                      <a:noAutofit/>
-                    </a:bodyPr>
-                    <a:p>
-                      <a:pPr algn="r"/>
-                      <a:r>
-                        <a:rPr b="0" lang="ru-RU" sz="1800" spc="-1" strike="noStrike">
-                          <a:solidFill>
-                            <a:srgbClr val="000000"/>
-                          </a:solidFill>
-                          <a:latin typeface="Times New Roman"/>
-                        </a:rPr>
-                        <a:t>0</a:t>
-                      </a:r>
-                      <a:endParaRPr b="0" lang="ru-RU" sz="1800" spc="-1" strike="noStrike">
-                        <a:solidFill>
-                          <a:srgbClr val="000000"/>
-                        </a:solidFill>
-                        <a:latin typeface="Times New Roman"/>
-                      </a:endParaRPr>
-                    </a:p>
-                  </a:txBody>
-                  <a:tcPr anchor="t" marL="36000" marR="36000">
-                    <a:lnL w="7200">
-                      <a:solidFill>
-                        <a:srgbClr val="000000"/>
-                      </a:solidFill>
-                      <a:prstDash val="solid"/>
-                    </a:lnL>
-                    <a:lnR w="7200">
-                      <a:solidFill>
-                        <a:srgbClr val="000000"/>
-                      </a:solidFill>
-                      <a:prstDash val="solid"/>
-                    </a:lnR>
-                    <a:lnT w="7200">
-                      <a:solidFill>
-                        <a:srgbClr val="000000"/>
-                      </a:solidFill>
-                      <a:prstDash val="solid"/>
-                    </a:lnT>
-                    <a:lnB w="7200">
-                      <a:solidFill>
-                        <a:srgbClr val="000000"/>
-                      </a:solidFill>
-                      <a:prstDash val="solid"/>
-                    </a:lnB>
-                    <a:noFill/>
-                  </a:tcPr>
-                </a:tc>
-                <a:tc>
-                  <a:txBody>
-                    <a:bodyPr lIns="36000" rIns="36000" tIns="36000" bIns="36000" anchor="t">
-                      <a:noAutofit/>
-                    </a:bodyPr>
-                    <a:p>
-                      <a:pPr algn="r"/>
-                      <a:r>
-                        <a:rPr b="0" lang="ru-RU" sz="1800" spc="-1" strike="noStrike">
-                          <a:solidFill>
-                            <a:srgbClr val="000000"/>
-                          </a:solidFill>
-                          <a:latin typeface="Times New Roman"/>
-                        </a:rPr>
-                        <a:t>1</a:t>
-                      </a:r>
-                      <a:endParaRPr b="0" lang="ru-RU" sz="1800" spc="-1" strike="noStrike">
-                        <a:solidFill>
-                          <a:srgbClr val="000000"/>
-                        </a:solidFill>
-                        <a:latin typeface="Times New Roman"/>
-                      </a:endParaRPr>
-                    </a:p>
-                  </a:txBody>
-                  <a:tcPr anchor="t" marL="36000" marR="36000">
-                    <a:lnL w="7200">
-                      <a:solidFill>
-                        <a:srgbClr val="000000"/>
-                      </a:solidFill>
-                      <a:prstDash val="solid"/>
-                    </a:lnL>
-                    <a:lnR w="7200">
-                      <a:solidFill>
-                        <a:srgbClr val="000000"/>
-                      </a:solidFill>
-                      <a:prstDash val="solid"/>
-                    </a:lnR>
-                    <a:lnT w="7200">
-                      <a:solidFill>
-                        <a:srgbClr val="000000"/>
-                      </a:solidFill>
-                      <a:prstDash val="solid"/>
-                    </a:lnT>
-                    <a:lnB w="7200">
-                      <a:solidFill>
-                        <a:srgbClr val="000000"/>
-                      </a:solidFill>
-                      <a:prstDash val="solid"/>
-                    </a:lnB>
-                    <a:noFill/>
-                  </a:tcPr>
-                </a:tc>
-                <a:tc>
-                  <a:txBody>
-                    <a:bodyPr lIns="36000" rIns="36000" tIns="36000" bIns="36000" anchor="t">
-                      <a:noAutofit/>
-                    </a:bodyPr>
-                    <a:p>
-                      <a:pPr algn="r"/>
-                      <a:r>
-                        <a:rPr b="0" lang="ru-RU" sz="1800" spc="-1" strike="noStrike">
-                          <a:solidFill>
-                            <a:srgbClr val="000000"/>
-                          </a:solidFill>
-                          <a:latin typeface="Times New Roman"/>
-                        </a:rPr>
-                        <a:t>2</a:t>
-                      </a:r>
-                      <a:endParaRPr b="0" lang="ru-RU" sz="1800" spc="-1" strike="noStrike">
-                        <a:solidFill>
-                          <a:srgbClr val="000000"/>
-                        </a:solidFill>
-                        <a:latin typeface="Times New Roman"/>
-                      </a:endParaRPr>
-                    </a:p>
-                  </a:txBody>
-                  <a:tcPr anchor="t" marL="36000" marR="36000">
-                    <a:lnL w="7200">
-                      <a:solidFill>
-                        <a:srgbClr val="000000"/>
-                      </a:solidFill>
-                      <a:prstDash val="solid"/>
-                    </a:lnL>
-                    <a:lnR w="7200">
-                      <a:solidFill>
-                        <a:srgbClr val="000000"/>
-                      </a:solidFill>
-                      <a:prstDash val="solid"/>
-                    </a:lnR>
-                    <a:lnT w="7200">
-                      <a:solidFill>
-                        <a:srgbClr val="000000"/>
-                      </a:solidFill>
-                      <a:prstDash val="solid"/>
-                    </a:lnT>
-                    <a:lnB w="7200">
-                      <a:solidFill>
-                        <a:srgbClr val="000000"/>
-                      </a:solidFill>
-                      <a:prstDash val="solid"/>
-                    </a:lnB>
-                    <a:noFill/>
-                  </a:tcPr>
-                </a:tc>
-                <a:tc>
-                  <a:txBody>
-                    <a:bodyPr lIns="36000" rIns="36000" tIns="36000" bIns="36000" anchor="t">
-                      <a:noAutofit/>
-                    </a:bodyPr>
-                    <a:p>
-                      <a:pPr algn="r"/>
-                      <a:r>
-                        <a:rPr b="0" lang="ru-RU" sz="1800" spc="-1" strike="noStrike">
-                          <a:solidFill>
-                            <a:srgbClr val="000000"/>
-                          </a:solidFill>
-                          <a:latin typeface="Times New Roman"/>
-                        </a:rPr>
-                        <a:t>3</a:t>
-                      </a:r>
-                      <a:endParaRPr b="0" lang="ru-RU" sz="1800" spc="-1" strike="noStrike">
-                        <a:solidFill>
-                          <a:srgbClr val="000000"/>
-                        </a:solidFill>
-                        <a:latin typeface="Times New Roman"/>
-                      </a:endParaRPr>
-                    </a:p>
-                  </a:txBody>
-                  <a:tcPr anchor="t" marL="36000" marR="36000">
-                    <a:lnL w="7200">
-                      <a:solidFill>
-                        <a:srgbClr val="000000"/>
-                      </a:solidFill>
-                      <a:prstDash val="solid"/>
-                    </a:lnL>
-                    <a:lnR w="7200">
-                      <a:solidFill>
-                        <a:srgbClr val="000000"/>
-                      </a:solidFill>
-                      <a:prstDash val="solid"/>
-                    </a:lnR>
-                    <a:lnT w="7200">
-                      <a:solidFill>
-                        <a:srgbClr val="000000"/>
-                      </a:solidFill>
-                      <a:prstDash val="solid"/>
-                    </a:lnT>
-                    <a:lnB w="7200">
-                      <a:solidFill>
-                        <a:srgbClr val="000000"/>
-                      </a:solidFill>
-                      <a:prstDash val="solid"/>
-                    </a:lnB>
-                    <a:noFill/>
-                  </a:tcPr>
-                </a:tc>
-                <a:tc>
-                  <a:txBody>
-                    <a:bodyPr lIns="36000" rIns="36000" tIns="36000" bIns="36000" anchor="t">
-                      <a:noAutofit/>
-                    </a:bodyPr>
-                    <a:p>
-                      <a:pPr algn="r"/>
-                      <a:r>
-                        <a:rPr b="0" lang="ru-RU" sz="1800" spc="-1" strike="noStrike">
-                          <a:solidFill>
-                            <a:srgbClr val="000000"/>
-                          </a:solidFill>
-                          <a:latin typeface="Times New Roman"/>
-                        </a:rPr>
-                        <a:t>4</a:t>
-                      </a:r>
-                      <a:endParaRPr b="0" lang="ru-RU" sz="1800" spc="-1" strike="noStrike">
-                        <a:solidFill>
-                          <a:srgbClr val="000000"/>
-                        </a:solidFill>
-                        <a:latin typeface="Times New Roman"/>
-                      </a:endParaRPr>
-                    </a:p>
-                  </a:txBody>
-                  <a:tcPr anchor="t" marL="36000" marR="36000">
-                    <a:lnL w="7200">
-                      <a:solidFill>
-                        <a:srgbClr val="000000"/>
-                      </a:solidFill>
-                      <a:prstDash val="solid"/>
-                    </a:lnL>
-                    <a:lnR w="7200">
-                      <a:solidFill>
-                        <a:srgbClr val="000000"/>
-                      </a:solidFill>
-                      <a:prstDash val="solid"/>
-                    </a:lnR>
-                    <a:lnT w="7200">
-                      <a:solidFill>
-                        <a:srgbClr val="000000"/>
-                      </a:solidFill>
-                      <a:prstDash val="solid"/>
-                    </a:lnT>
-                    <a:lnB w="7200">
-                      <a:solidFill>
-                        <a:srgbClr val="000000"/>
-                      </a:solidFill>
-                      <a:prstDash val="solid"/>
-                    </a:lnB>
-                    <a:noFill/>
-                  </a:tcPr>
-                </a:tc>
-                <a:tc>
-                  <a:txBody>
-                    <a:bodyPr lIns="36000" rIns="36000" tIns="36000" bIns="36000" anchor="t">
-                      <a:noAutofit/>
-                    </a:bodyPr>
-                    <a:p>
-                      <a:pPr algn="r"/>
-                      <a:r>
-                        <a:rPr b="0" lang="ru-RU" sz="1800" spc="-1" strike="noStrike">
-                          <a:solidFill>
-                            <a:srgbClr val="000000"/>
-                          </a:solidFill>
-                          <a:latin typeface="Times New Roman"/>
-                        </a:rPr>
-                        <a:t>5</a:t>
-                      </a:r>
-                      <a:endParaRPr b="0" lang="ru-RU" sz="1800" spc="-1" strike="noStrike">
-                        <a:solidFill>
-                          <a:srgbClr val="000000"/>
-                        </a:solidFill>
-                        <a:latin typeface="Times New Roman"/>
-                      </a:endParaRPr>
-                    </a:p>
-                  </a:txBody>
-                  <a:tcPr anchor="t" marL="36000" marR="36000">
-                    <a:lnL w="7200">
-                      <a:solidFill>
-                        <a:srgbClr val="000000"/>
-                      </a:solidFill>
-                      <a:prstDash val="solid"/>
-                    </a:lnL>
-                    <a:lnR w="7200">
-                      <a:solidFill>
-                        <a:srgbClr val="000000"/>
-                      </a:solidFill>
-                      <a:prstDash val="solid"/>
-                    </a:lnR>
-                    <a:lnT w="7200">
-                      <a:solidFill>
-                        <a:srgbClr val="000000"/>
-                      </a:solidFill>
-                      <a:prstDash val="solid"/>
-                    </a:lnT>
-                    <a:lnB w="7200">
-                      <a:solidFill>
-                        <a:srgbClr val="000000"/>
-                      </a:solidFill>
-                      <a:prstDash val="solid"/>
-                    </a:lnB>
-                    <a:noFill/>
-                  </a:tcPr>
-                </a:tc>
-              </a:tr>
-              <a:tr h="0">
-                <a:tc>
-                  <a:txBody>
-                    <a:bodyPr lIns="36000" rIns="36000" tIns="36000" bIns="36000" anchor="t">
-                      <a:noAutofit/>
-                    </a:bodyPr>
-                    <a:p>
-                      <a:r>
-                        <a:rPr b="0" lang="ru-RU" sz="1800" spc="-1" strike="noStrike">
-                          <a:solidFill>
-                            <a:srgbClr val="000000"/>
-                          </a:solidFill>
-                          <a:latin typeface="Times New Roman"/>
-                        </a:rPr>
-                        <a:t>количество</a:t>
-                      </a:r>
-                      <a:endParaRPr b="0" lang="ru-RU" sz="1800" spc="-1" strike="noStrike">
-                        <a:solidFill>
-                          <a:srgbClr val="000000"/>
-                        </a:solidFill>
-                        <a:latin typeface="Times New Roman"/>
-                      </a:endParaRPr>
-                    </a:p>
-                  </a:txBody>
-                  <a:tcPr anchor="t" marL="36000" marR="36000">
-                    <a:lnL w="7200">
-                      <a:solidFill>
-                        <a:srgbClr val="000000"/>
-                      </a:solidFill>
-                      <a:prstDash val="solid"/>
-                    </a:lnL>
-                    <a:lnR w="7200">
-                      <a:solidFill>
-                        <a:srgbClr val="000000"/>
-                      </a:solidFill>
-                      <a:prstDash val="solid"/>
-                    </a:lnR>
-                    <a:lnT w="7200">
-                      <a:solidFill>
-                        <a:srgbClr val="000000"/>
-                      </a:solidFill>
-                      <a:prstDash val="solid"/>
-                    </a:lnT>
-                    <a:lnB w="7200">
-                      <a:solidFill>
-                        <a:srgbClr val="000000"/>
-                      </a:solidFill>
-                      <a:prstDash val="solid"/>
-                    </a:lnB>
-                    <a:noFill/>
-                  </a:tcPr>
-                </a:tc>
-                <a:tc>
-                  <a:txBody>
-                    <a:bodyPr lIns="36000" rIns="36000" tIns="36000" bIns="36000" anchor="t">
-                      <a:noAutofit/>
-                    </a:bodyPr>
-                    <a:p>
-                      <a:pPr algn="r"/>
-                      <a:r>
-                        <a:rPr b="0" lang="ru-RU" sz="1800" spc="-1" strike="noStrike">
-                          <a:solidFill>
-                            <a:srgbClr val="000000"/>
-                          </a:solidFill>
-                          <a:latin typeface="Times New Roman"/>
-                        </a:rPr>
-                        <a:t>1</a:t>
-                      </a:r>
-                      <a:endParaRPr b="0" lang="ru-RU" sz="1800" spc="-1" strike="noStrike">
-                        <a:solidFill>
-                          <a:srgbClr val="000000"/>
-                        </a:solidFill>
-                        <a:latin typeface="Times New Roman"/>
-                      </a:endParaRPr>
-                    </a:p>
-                  </a:txBody>
-                  <a:tcPr anchor="t" marL="36000" marR="36000">
-                    <a:lnL w="7200">
-                      <a:solidFill>
-                        <a:srgbClr val="000000"/>
-                      </a:solidFill>
-                      <a:prstDash val="solid"/>
-                    </a:lnL>
-                    <a:lnR w="7200">
-                      <a:solidFill>
-                        <a:srgbClr val="000000"/>
-                      </a:solidFill>
-                      <a:prstDash val="solid"/>
-                    </a:lnR>
-                    <a:lnT w="7200">
-                      <a:solidFill>
-                        <a:srgbClr val="000000"/>
-                      </a:solidFill>
-                      <a:prstDash val="solid"/>
-                    </a:lnT>
-                    <a:lnB w="7200">
-                      <a:solidFill>
-                        <a:srgbClr val="000000"/>
-                      </a:solidFill>
-                      <a:prstDash val="solid"/>
-                    </a:lnB>
-                    <a:noFill/>
-                  </a:tcPr>
-                </a:tc>
-                <a:tc>
-                  <a:txBody>
-                    <a:bodyPr lIns="36000" rIns="36000" tIns="36000" bIns="36000" anchor="t">
-                      <a:noAutofit/>
-                    </a:bodyPr>
-                    <a:p>
-                      <a:pPr algn="r"/>
-                      <a:r>
-                        <a:rPr b="0" lang="ru-RU" sz="1800" spc="-1" strike="noStrike">
-                          <a:solidFill>
-                            <a:srgbClr val="000000"/>
-                          </a:solidFill>
-                          <a:latin typeface="Times New Roman"/>
-                        </a:rPr>
-                        <a:t>1</a:t>
-                      </a:r>
-                      <a:endParaRPr b="0" lang="ru-RU" sz="1800" spc="-1" strike="noStrike">
-                        <a:solidFill>
-                          <a:srgbClr val="000000"/>
-                        </a:solidFill>
-                        <a:latin typeface="Times New Roman"/>
-                      </a:endParaRPr>
-                    </a:p>
-                  </a:txBody>
-                  <a:tcPr anchor="t" marL="36000" marR="36000">
-                    <a:lnL w="7200">
-                      <a:solidFill>
-                        <a:srgbClr val="000000"/>
-                      </a:solidFill>
-                      <a:prstDash val="solid"/>
-                    </a:lnL>
-                    <a:lnR w="7200">
-                      <a:solidFill>
-                        <a:srgbClr val="000000"/>
-                      </a:solidFill>
-                      <a:prstDash val="solid"/>
-                    </a:lnR>
-                    <a:lnT w="7200">
-                      <a:solidFill>
-                        <a:srgbClr val="000000"/>
-                      </a:solidFill>
-                      <a:prstDash val="solid"/>
-                    </a:lnT>
-                    <a:lnB w="7200">
-                      <a:solidFill>
-                        <a:srgbClr val="000000"/>
-                      </a:solidFill>
-                      <a:prstDash val="solid"/>
-                    </a:lnB>
-                    <a:noFill/>
-                  </a:tcPr>
-                </a:tc>
-                <a:tc>
-                  <a:txBody>
-                    <a:bodyPr lIns="36000" rIns="36000" tIns="36000" bIns="36000" anchor="t">
-                      <a:noAutofit/>
-                    </a:bodyPr>
-                    <a:p>
-                      <a:pPr algn="r"/>
-                      <a:r>
-                        <a:rPr b="0" lang="ru-RU" sz="1800" spc="-1" strike="noStrike">
-                          <a:solidFill>
-                            <a:srgbClr val="000000"/>
-                          </a:solidFill>
-                          <a:latin typeface="Times New Roman"/>
-                        </a:rPr>
-                        <a:t>1</a:t>
-                      </a:r>
-                      <a:endParaRPr b="0" lang="ru-RU" sz="1800" spc="-1" strike="noStrike">
-                        <a:solidFill>
-                          <a:srgbClr val="000000"/>
-                        </a:solidFill>
-                        <a:latin typeface="Times New Roman"/>
-                      </a:endParaRPr>
-                    </a:p>
-                  </a:txBody>
-                  <a:tcPr anchor="t" marL="36000" marR="36000">
-                    <a:lnL w="7200">
-                      <a:solidFill>
-                        <a:srgbClr val="000000"/>
-                      </a:solidFill>
-                      <a:prstDash val="solid"/>
-                    </a:lnL>
-                    <a:lnR w="7200">
-                      <a:solidFill>
-                        <a:srgbClr val="000000"/>
-                      </a:solidFill>
-                      <a:prstDash val="solid"/>
-                    </a:lnR>
-                    <a:lnT w="7200">
-                      <a:solidFill>
-                        <a:srgbClr val="000000"/>
-                      </a:solidFill>
-                      <a:prstDash val="solid"/>
-                    </a:lnT>
-                    <a:lnB w="7200">
-                      <a:solidFill>
-                        <a:srgbClr val="000000"/>
-                      </a:solidFill>
-                      <a:prstDash val="solid"/>
-                    </a:lnB>
-                    <a:noFill/>
-                  </a:tcPr>
-                </a:tc>
-                <a:tc>
-                  <a:txBody>
-                    <a:bodyPr lIns="36000" rIns="36000" tIns="36000" bIns="36000" anchor="t">
-                      <a:noAutofit/>
-                    </a:bodyPr>
-                    <a:p>
-                      <a:pPr algn="r"/>
-                      <a:r>
-                        <a:rPr b="0" lang="ru-RU" sz="1800" spc="-1" strike="noStrike">
-                          <a:solidFill>
-                            <a:srgbClr val="000000"/>
-                          </a:solidFill>
-                          <a:latin typeface="Times New Roman"/>
-                        </a:rPr>
-                        <a:t>3</a:t>
-                      </a:r>
-                      <a:endParaRPr b="0" lang="ru-RU" sz="1800" spc="-1" strike="noStrike">
-                        <a:solidFill>
-                          <a:srgbClr val="000000"/>
-                        </a:solidFill>
-                        <a:latin typeface="Times New Roman"/>
-                      </a:endParaRPr>
-                    </a:p>
-                  </a:txBody>
-                  <a:tcPr anchor="t" marL="36000" marR="36000">
-                    <a:lnL w="7200">
-                      <a:solidFill>
-                        <a:srgbClr val="000000"/>
-                      </a:solidFill>
-                      <a:prstDash val="solid"/>
-                    </a:lnL>
-                    <a:lnR w="7200">
-                      <a:solidFill>
-                        <a:srgbClr val="000000"/>
-                      </a:solidFill>
-                      <a:prstDash val="solid"/>
-                    </a:lnR>
-                    <a:lnT w="7200">
-                      <a:solidFill>
-                        <a:srgbClr val="000000"/>
-                      </a:solidFill>
-                      <a:prstDash val="solid"/>
-                    </a:lnT>
-                    <a:lnB w="7200">
-                      <a:solidFill>
-                        <a:srgbClr val="000000"/>
-                      </a:solidFill>
-                      <a:prstDash val="solid"/>
-                    </a:lnB>
-                    <a:noFill/>
-                  </a:tcPr>
-                </a:tc>
-                <a:tc>
-                  <a:txBody>
-                    <a:bodyPr lIns="36000" rIns="36000" tIns="36000" bIns="36000" anchor="t">
-                      <a:noAutofit/>
-                    </a:bodyPr>
-                    <a:p>
-                      <a:pPr algn="r"/>
-                      <a:r>
-                        <a:rPr b="0" lang="ru-RU" sz="1800" spc="-1" strike="noStrike">
-                          <a:solidFill>
-                            <a:srgbClr val="000000"/>
-                          </a:solidFill>
-                          <a:latin typeface="Times New Roman"/>
-                        </a:rPr>
-                        <a:t>11</a:t>
-                      </a:r>
-                      <a:endParaRPr b="0" lang="ru-RU" sz="1800" spc="-1" strike="noStrike">
-                        <a:solidFill>
-                          <a:srgbClr val="000000"/>
-                        </a:solidFill>
-                        <a:latin typeface="Times New Roman"/>
-                      </a:endParaRPr>
-                    </a:p>
-                  </a:txBody>
-                  <a:tcPr anchor="t" marL="36000" marR="36000">
-                    <a:lnL w="7200">
-                      <a:solidFill>
-                        <a:srgbClr val="000000"/>
-                      </a:solidFill>
-                      <a:prstDash val="solid"/>
-                    </a:lnL>
-                    <a:lnR w="7200">
-                      <a:solidFill>
-                        <a:srgbClr val="000000"/>
-                      </a:solidFill>
-                      <a:prstDash val="solid"/>
-                    </a:lnR>
-                    <a:lnT w="7200">
-                      <a:solidFill>
-                        <a:srgbClr val="000000"/>
-                      </a:solidFill>
-                      <a:prstDash val="solid"/>
-                    </a:lnT>
-                    <a:lnB w="7200">
-                      <a:solidFill>
-                        <a:srgbClr val="000000"/>
-                      </a:solidFill>
-                      <a:prstDash val="solid"/>
-                    </a:lnB>
-                    <a:noFill/>
-                  </a:tcPr>
-                </a:tc>
-                <a:tc>
-                  <a:txBody>
-                    <a:bodyPr lIns="36000" rIns="36000" tIns="36000" bIns="36000" anchor="t">
-                      <a:noAutofit/>
-                    </a:bodyPr>
-                    <a:p>
-                      <a:pPr algn="r"/>
-                      <a:r>
-                        <a:rPr b="0" lang="ru-RU" sz="1800" spc="-1" strike="noStrike">
-                          <a:solidFill>
-                            <a:srgbClr val="000000"/>
-                          </a:solidFill>
-                          <a:latin typeface="Times New Roman"/>
-                        </a:rPr>
-                        <a:t>24</a:t>
-                      </a:r>
-                      <a:endParaRPr b="0" lang="ru-RU" sz="1800" spc="-1" strike="noStrike">
-                        <a:solidFill>
-                          <a:srgbClr val="000000"/>
-                        </a:solidFill>
-                        <a:latin typeface="Times New Roman"/>
-                      </a:endParaRPr>
-                    </a:p>
-                  </a:txBody>
-                  <a:tcPr anchor="t" marL="36000" marR="36000">
-                    <a:lnL w="7200">
-                      <a:solidFill>
-                        <a:srgbClr val="000000"/>
-                      </a:solidFill>
-                      <a:prstDash val="solid"/>
-                    </a:lnL>
-                    <a:lnR w="7200">
-                      <a:solidFill>
-                        <a:srgbClr val="000000"/>
-                      </a:solidFill>
-                      <a:prstDash val="solid"/>
-                    </a:lnR>
-                    <a:lnT w="7200">
-                      <a:solidFill>
-                        <a:srgbClr val="000000"/>
-                      </a:solidFill>
-                      <a:prstDash val="solid"/>
-                    </a:lnT>
-                    <a:lnB w="7200">
-                      <a:solidFill>
-                        <a:srgbClr val="000000"/>
-                      </a:solidFill>
-                      <a:prstDash val="solid"/>
-                    </a:lnB>
-                    <a:noFill/>
-                  </a:tcPr>
-                </a:tc>
-              </a:tr>
-            </a:tbl>
-          </a:graphicData>
-        </a:graphic>
-      </p:graphicFrame>
-    </p:spTree>
-  </p:cSld>
-  <mc:AlternateContent>
-    <mc:Choice Requires="p14">
-      <p:transition spd="slow" p14:dur="2000"/>
-    </mc:Choice>
-    <mc:Fallback>
-      <p:transition spd="slow"/>
-    </mc:Fallback>
-  </mc:AlternateContent>
-</p:sld>
-</file>
-
-<file path=ppt/slides/slide4.xml><?xml version="1.0" encoding="utf-8"?>
-<p:sld xmlns:a="http://schemas.openxmlformats.org/drawingml/2006/main" xmlns:p="http://schemas.openxmlformats.org/presentationml/2006/main" xmlns:r="http://schemas.openxmlformats.org/officeDocument/2006/relationships" xmlns:p14="http://schemas.microsoft.com/office/powerpoint/2010/main" xmlns:p15="http://schemas.microsoft.com/office/powerpoint/2012/main" xmlns:mc="http://schemas.openxmlformats.org/markup-compatibility/2006">
-  <p:cSld>
+    <p:bg>
+      <p:bgPr>
+        <a:blipFill rotWithShape="0">
+          <a:blip r:embed="rId1"/>
+          <a:tile tx="0" ty="0" sx="100000" sy="100000" algn="ctr"/>
+        </a:blipFill>
+      </p:bgPr>
+    </p:bg>
     <p:spTree>
       <p:nvGrpSpPr>
         <p:cNvPr id="1" name=""/>
@@ -4129,7 +3879,7 @@
         <p:spPr>
           <a:xfrm>
             <a:off x="457200" y="273240"/>
-            <a:ext cx="8229240" cy="626760"/>
+            <a:ext cx="8228880" cy="806400"/>
           </a:xfrm>
           <a:prstGeom prst="rect">
             <a:avLst/>
@@ -4145,42 +3895,55 @@
           </a:bodyPr>
           <a:p>
             <a:pPr indent="0" algn="ctr">
+              <a:lnSpc>
+                <a:spcPct val="100000"/>
+              </a:lnSpc>
               <a:buNone/>
+              <a:tabLst>
+                <a:tab algn="l" pos="0"/>
+              </a:tabLst>
             </a:pPr>
             <a:r>
-              <a:rPr b="1" lang="ru-RU" sz="2000" spc="-1" strike="noStrike">
+              <a:rPr b="1" lang="ru-RU" sz="2400" spc="-1" strike="noStrike">
                 <a:solidFill>
                   <a:srgbClr val="000000"/>
                 </a:solidFill>
                 <a:latin typeface="Times New Roman"/>
               </a:rPr>
-              <a:t>Сравнение Краснодара и Горячего Ключа</a:t>
+              <a:t>Данные по Горячему ключу</a:t>
             </a:r>
-            <a:endParaRPr b="1" lang="ru-RU" sz="2000" spc="-1" strike="noStrike">
+            <a:endParaRPr b="0" lang="ru-RU" sz="2400" spc="-1" strike="noStrike">
               <a:solidFill>
                 <a:srgbClr val="000000"/>
               </a:solidFill>
-              <a:latin typeface="Times New Roman"/>
+              <a:latin typeface="Arial"/>
             </a:endParaRPr>
           </a:p>
         </p:txBody>
       </p:sp>
-      <p:graphicFrame>
-        <p:nvGraphicFramePr>
-          <p:cNvPr id="17" name=""/>
-          <p:cNvGraphicFramePr/>
+      <p:pic>
+        <p:nvPicPr>
+          <p:cNvPr id="17" name="" descr=""/>
+          <p:cNvPicPr/>
           <p:nvPr/>
-        </p:nvGraphicFramePr>
-        <p:xfrm>
-          <a:off x="4320000" y="2281320"/>
-          <a:ext cx="4680000" cy="2758680"/>
-        </p:xfrm>
-        <a:graphic>
-          <a:graphicData uri="http://schemas.openxmlformats.org/drawingml/2006/chart">
-            <c:chart xmlns:c="http://schemas.openxmlformats.org/drawingml/2006/chart" xmlns:r="http://schemas.openxmlformats.org/officeDocument/2006/relationships" r:id="rId1"/>
-          </a:graphicData>
-        </a:graphic>
-      </p:graphicFrame>
+        </p:nvPicPr>
+        <p:blipFill>
+          <a:blip r:embed="rId2"/>
+          <a:stretch/>
+        </p:blipFill>
+        <p:spPr>
+          <a:xfrm>
+            <a:off x="601560" y="1260000"/>
+            <a:ext cx="8038080" cy="5032440"/>
+          </a:xfrm>
+          <a:prstGeom prst="rect">
+            <a:avLst/>
+          </a:prstGeom>
+          <a:ln w="0">
+            <a:noFill/>
+          </a:ln>
+        </p:spPr>
+      </p:pic>
       <p:sp>
         <p:nvSpPr>
           <p:cNvPr id="18" name=""/>
@@ -4189,8 +3952,8 @@
         </p:nvSpPr>
         <p:spPr>
           <a:xfrm>
-            <a:off x="5220000" y="1620000"/>
-            <a:ext cx="3240000" cy="540000"/>
+            <a:off x="0" y="6412680"/>
+            <a:ext cx="3425400" cy="427320"/>
           </a:xfrm>
           <a:prstGeom prst="rect">
             <a:avLst/>
@@ -4205,76 +3968,16 @@
             <a:noAutofit/>
           </a:bodyPr>
           <a:p>
-            <a:pPr algn="ctr"/>
-            <a:r>
-              <a:rPr b="0" lang="ru-RU" sz="1800" spc="-1" strike="noStrike">
-                <a:solidFill>
-                  <a:srgbClr val="000000"/>
-                </a:solidFill>
-                <a:latin typeface="Arial"/>
-              </a:rPr>
-              <a:t>Краснодар</a:t>
-            </a:r>
-            <a:endParaRPr b="0" lang="ru-RU" sz="1800" spc="-1" strike="noStrike">
-              <a:solidFill>
-                <a:srgbClr val="000000"/>
-              </a:solidFill>
-              <a:latin typeface="Arial"/>
-            </a:endParaRPr>
-          </a:p>
-        </p:txBody>
-      </p:sp>
-      <p:graphicFrame>
-        <p:nvGraphicFramePr>
-          <p:cNvPr id="19" name=""/>
-          <p:cNvGraphicFramePr/>
-          <p:nvPr/>
-        </p:nvGraphicFramePr>
-        <p:xfrm>
-          <a:off x="180360" y="2281320"/>
-          <a:ext cx="4679640" cy="3239640"/>
-        </p:xfrm>
-        <a:graphic>
-          <a:graphicData uri="http://schemas.openxmlformats.org/drawingml/2006/chart">
-            <c:chart xmlns:c="http://schemas.openxmlformats.org/drawingml/2006/chart" xmlns:r="http://schemas.openxmlformats.org/officeDocument/2006/relationships" r:id="rId2"/>
-          </a:graphicData>
-        </a:graphic>
-      </p:graphicFrame>
-      <p:sp>
-        <p:nvSpPr>
-          <p:cNvPr id="20" name=""/>
-          <p:cNvSpPr txBox="1"/>
-          <p:nvPr/>
-        </p:nvSpPr>
-        <p:spPr>
-          <a:xfrm>
-            <a:off x="720000" y="1440000"/>
-            <a:ext cx="3420000" cy="540000"/>
-          </a:xfrm>
-          <a:prstGeom prst="rect">
-            <a:avLst/>
-          </a:prstGeom>
-          <a:noFill/>
-          <a:ln w="0">
-            <a:noFill/>
-          </a:ln>
-        </p:spPr>
-        <p:txBody>
-          <a:bodyPr lIns="90000" rIns="90000" tIns="45000" bIns="45000" anchor="t">
-            <a:noAutofit/>
-          </a:bodyPr>
-          <a:p>
-            <a:pPr algn="ctr"/>
-            <a:r>
-              <a:rPr b="0" lang="ru-RU" sz="1800" spc="-1" strike="noStrike">
+            <a:fld id="{9423DEA8-EF6D-432B-B887-33E505CC757A}" type="slidenum">
+              <a:rPr b="0" lang="ru-RU" sz="2400" spc="-1" strike="noStrike">
                 <a:solidFill>
                   <a:srgbClr val="000000"/>
                 </a:solidFill>
                 <a:latin typeface="Times New Roman"/>
               </a:rPr>
-              <a:t>Горячий Ключ</a:t>
-            </a:r>
-            <a:endParaRPr b="0" lang="ru-RU" sz="1800" spc="-1" strike="noStrike">
+              <a:t>&lt;номер&gt;</a:t>
+            </a:fld>
+            <a:endParaRPr b="0" lang="ru-RU" sz="2400" spc="-1" strike="noStrike">
               <a:solidFill>
                 <a:srgbClr val="000000"/>
               </a:solidFill>
@@ -4296,9 +3999,17 @@
 </p:sld>
 </file>
 
-<file path=ppt/slides/slide5.xml><?xml version="1.0" encoding="utf-8"?>
+<file path=ppt/slides/slide3.xml><?xml version="1.0" encoding="utf-8"?>
 <p:sld xmlns:a="http://schemas.openxmlformats.org/drawingml/2006/main" xmlns:p="http://schemas.openxmlformats.org/presentationml/2006/main" xmlns:r="http://schemas.openxmlformats.org/officeDocument/2006/relationships" xmlns:p14="http://schemas.microsoft.com/office/powerpoint/2010/main" xmlns:p15="http://schemas.microsoft.com/office/powerpoint/2012/main" xmlns:mc="http://schemas.openxmlformats.org/markup-compatibility/2006">
   <p:cSld>
+    <p:bg>
+      <p:bgPr>
+        <a:blipFill rotWithShape="0">
+          <a:blip r:embed="rId1"/>
+          <a:tile tx="0" ty="0" sx="100000" sy="100000" algn="ctr"/>
+        </a:blipFill>
+      </p:bgPr>
+    </p:bg>
     <p:spTree>
       <p:nvGrpSpPr>
         <p:cNvPr id="1" name=""/>
@@ -4315,18 +4026,898 @@
       </p:grpSpPr>
       <p:sp>
         <p:nvSpPr>
-          <p:cNvPr id="21" name="PlaceHolder 1"/>
-          <p:cNvSpPr>
-            <a:spLocks noGrp="1"/>
-          </p:cNvSpPr>
-          <p:nvPr>
-            <p:ph type="title"/>
-          </p:nvPr>
+          <p:cNvPr id="19" name=""/>
+          <p:cNvSpPr/>
+          <p:nvPr/>
         </p:nvSpPr>
         <p:spPr>
           <a:xfrm>
-            <a:off x="457200" y="273240"/>
-            <a:ext cx="8229240" cy="1144800"/>
+            <a:off x="457560" y="273600"/>
+            <a:ext cx="8228880" cy="806400"/>
+          </a:xfrm>
+          <a:prstGeom prst="rect">
+            <a:avLst/>
+          </a:prstGeom>
+          <a:noFill/>
+          <a:ln w="0">
+            <a:noFill/>
+          </a:ln>
+        </p:spPr>
+        <p:style>
+          <a:lnRef idx="0"/>
+          <a:fillRef idx="0"/>
+          <a:effectRef idx="0"/>
+          <a:fontRef idx="minor"/>
+        </p:style>
+        <p:txBody>
+          <a:bodyPr lIns="0" rIns="0" tIns="0" bIns="0" anchor="ctr">
+            <a:noAutofit/>
+          </a:bodyPr>
+          <a:p>
+            <a:pPr algn="ctr">
+              <a:lnSpc>
+                <a:spcPct val="100000"/>
+              </a:lnSpc>
+            </a:pPr>
+            <a:r>
+              <a:rPr b="1" lang="ru-RU" sz="2400" spc="-1" strike="noStrike">
+                <a:solidFill>
+                  <a:srgbClr val="000000"/>
+                </a:solidFill>
+                <a:latin typeface="Times New Roman"/>
+              </a:rPr>
+              <a:t>Данные по Горячему ключу</a:t>
+            </a:r>
+            <a:endParaRPr b="0" lang="ru-RU" sz="2400" spc="-1" strike="noStrike">
+              <a:solidFill>
+                <a:srgbClr val="000000"/>
+              </a:solidFill>
+              <a:latin typeface="Arial"/>
+            </a:endParaRPr>
+          </a:p>
+        </p:txBody>
+      </p:sp>
+      <p:graphicFrame>
+        <p:nvGraphicFramePr>
+          <p:cNvPr id="20" name=""/>
+          <p:cNvGraphicFramePr/>
+          <p:nvPr/>
+        </p:nvGraphicFramePr>
+        <p:xfrm>
+          <a:off x="1620000" y="2880360"/>
+          <a:ext cx="5759280" cy="3239280"/>
+        </p:xfrm>
+        <a:graphic>
+          <a:graphicData uri="http://schemas.openxmlformats.org/drawingml/2006/chart">
+            <c:chart xmlns:c="http://schemas.openxmlformats.org/drawingml/2006/chart" xmlns:r="http://schemas.openxmlformats.org/officeDocument/2006/relationships" r:id="rId2"/>
+          </a:graphicData>
+        </a:graphic>
+      </p:graphicFrame>
+      <p:graphicFrame>
+        <p:nvGraphicFramePr>
+          <p:cNvPr id="21" name=""/>
+          <p:cNvGraphicFramePr/>
+          <p:nvPr/>
+        </p:nvGraphicFramePr>
+        <p:xfrm>
+          <a:off x="1080000" y="1856520"/>
+          <a:ext cx="7210080" cy="691200"/>
+        </p:xfrm>
+        <a:graphic>
+          <a:graphicData uri="http://schemas.openxmlformats.org/drawingml/2006/table">
+            <a:tbl>
+              <a:tblPr/>
+              <a:tblGrid>
+                <a:gridCol w="1356120"/>
+                <a:gridCol w="703800"/>
+                <a:gridCol w="1029960"/>
+                <a:gridCol w="1029960"/>
+                <a:gridCol w="1029960"/>
+                <a:gridCol w="1029960"/>
+                <a:gridCol w="1030680"/>
+              </a:tblGrid>
+              <a:tr h="346320">
+                <a:tc>
+                  <a:txBody>
+                    <a:bodyPr lIns="36000" rIns="36000" anchor="t">
+                      <a:noAutofit/>
+                    </a:bodyPr>
+                    <a:p>
+                      <a:pPr>
+                        <a:lnSpc>
+                          <a:spcPct val="100000"/>
+                        </a:lnSpc>
+                      </a:pPr>
+                      <a:r>
+                        <a:rPr b="0" lang="ru-RU" sz="1800" spc="-1" strike="noStrike">
+                          <a:solidFill>
+                            <a:srgbClr val="000000"/>
+                          </a:solidFill>
+                          <a:latin typeface="Times New Roman"/>
+                        </a:rPr>
+                        <a:t>оценка</a:t>
+                      </a:r>
+                      <a:endParaRPr b="0" lang="ru-RU" sz="1800" spc="-1" strike="noStrike">
+                        <a:solidFill>
+                          <a:srgbClr val="000000"/>
+                        </a:solidFill>
+                        <a:latin typeface="Arial"/>
+                      </a:endParaRPr>
+                    </a:p>
+                  </a:txBody>
+                  <a:tcPr anchor="t" marL="36000" marR="36000">
+                    <a:lnL w="7200">
+                      <a:solidFill>
+                        <a:srgbClr val="000000"/>
+                      </a:solidFill>
+                      <a:prstDash val="solid"/>
+                    </a:lnL>
+                    <a:lnR w="7200">
+                      <a:solidFill>
+                        <a:srgbClr val="000000"/>
+                      </a:solidFill>
+                      <a:prstDash val="solid"/>
+                    </a:lnR>
+                    <a:lnT w="7200">
+                      <a:solidFill>
+                        <a:srgbClr val="000000"/>
+                      </a:solidFill>
+                      <a:prstDash val="solid"/>
+                    </a:lnT>
+                    <a:lnB w="7200">
+                      <a:solidFill>
+                        <a:srgbClr val="000000"/>
+                      </a:solidFill>
+                      <a:prstDash val="solid"/>
+                    </a:lnB>
+                    <a:noFill/>
+                  </a:tcPr>
+                </a:tc>
+                <a:tc>
+                  <a:txBody>
+                    <a:bodyPr lIns="36000" rIns="36000" anchor="t">
+                      <a:noAutofit/>
+                    </a:bodyPr>
+                    <a:p>
+                      <a:pPr algn="r">
+                        <a:lnSpc>
+                          <a:spcPct val="100000"/>
+                        </a:lnSpc>
+                      </a:pPr>
+                      <a:r>
+                        <a:rPr b="0" lang="ru-RU" sz="1800" spc="-1" strike="noStrike">
+                          <a:solidFill>
+                            <a:srgbClr val="000000"/>
+                          </a:solidFill>
+                          <a:latin typeface="Times New Roman"/>
+                        </a:rPr>
+                        <a:t>0</a:t>
+                      </a:r>
+                      <a:endParaRPr b="0" lang="ru-RU" sz="1800" spc="-1" strike="noStrike">
+                        <a:solidFill>
+                          <a:srgbClr val="000000"/>
+                        </a:solidFill>
+                        <a:latin typeface="Arial"/>
+                      </a:endParaRPr>
+                    </a:p>
+                  </a:txBody>
+                  <a:tcPr anchor="t" marL="36000" marR="36000">
+                    <a:lnL w="7200">
+                      <a:solidFill>
+                        <a:srgbClr val="000000"/>
+                      </a:solidFill>
+                      <a:prstDash val="solid"/>
+                    </a:lnL>
+                    <a:lnR w="7200">
+                      <a:solidFill>
+                        <a:srgbClr val="000000"/>
+                      </a:solidFill>
+                      <a:prstDash val="solid"/>
+                    </a:lnR>
+                    <a:lnT w="7200">
+                      <a:solidFill>
+                        <a:srgbClr val="000000"/>
+                      </a:solidFill>
+                      <a:prstDash val="solid"/>
+                    </a:lnT>
+                    <a:lnB w="7200">
+                      <a:solidFill>
+                        <a:srgbClr val="000000"/>
+                      </a:solidFill>
+                      <a:prstDash val="solid"/>
+                    </a:lnB>
+                    <a:noFill/>
+                  </a:tcPr>
+                </a:tc>
+                <a:tc>
+                  <a:txBody>
+                    <a:bodyPr lIns="36000" rIns="36000" anchor="t">
+                      <a:noAutofit/>
+                    </a:bodyPr>
+                    <a:p>
+                      <a:pPr algn="r">
+                        <a:lnSpc>
+                          <a:spcPct val="100000"/>
+                        </a:lnSpc>
+                      </a:pPr>
+                      <a:r>
+                        <a:rPr b="0" lang="ru-RU" sz="1800" spc="-1" strike="noStrike">
+                          <a:solidFill>
+                            <a:srgbClr val="000000"/>
+                          </a:solidFill>
+                          <a:latin typeface="Times New Roman"/>
+                        </a:rPr>
+                        <a:t>1</a:t>
+                      </a:r>
+                      <a:endParaRPr b="0" lang="ru-RU" sz="1800" spc="-1" strike="noStrike">
+                        <a:solidFill>
+                          <a:srgbClr val="000000"/>
+                        </a:solidFill>
+                        <a:latin typeface="Arial"/>
+                      </a:endParaRPr>
+                    </a:p>
+                  </a:txBody>
+                  <a:tcPr anchor="t" marL="36000" marR="36000">
+                    <a:lnL w="7200">
+                      <a:solidFill>
+                        <a:srgbClr val="000000"/>
+                      </a:solidFill>
+                      <a:prstDash val="solid"/>
+                    </a:lnL>
+                    <a:lnR w="7200">
+                      <a:solidFill>
+                        <a:srgbClr val="000000"/>
+                      </a:solidFill>
+                      <a:prstDash val="solid"/>
+                    </a:lnR>
+                    <a:lnT w="7200">
+                      <a:solidFill>
+                        <a:srgbClr val="000000"/>
+                      </a:solidFill>
+                      <a:prstDash val="solid"/>
+                    </a:lnT>
+                    <a:lnB w="7200">
+                      <a:solidFill>
+                        <a:srgbClr val="000000"/>
+                      </a:solidFill>
+                      <a:prstDash val="solid"/>
+                    </a:lnB>
+                    <a:noFill/>
+                  </a:tcPr>
+                </a:tc>
+                <a:tc>
+                  <a:txBody>
+                    <a:bodyPr lIns="36000" rIns="36000" anchor="t">
+                      <a:noAutofit/>
+                    </a:bodyPr>
+                    <a:p>
+                      <a:pPr algn="r">
+                        <a:lnSpc>
+                          <a:spcPct val="100000"/>
+                        </a:lnSpc>
+                      </a:pPr>
+                      <a:r>
+                        <a:rPr b="0" lang="ru-RU" sz="1800" spc="-1" strike="noStrike">
+                          <a:solidFill>
+                            <a:srgbClr val="000000"/>
+                          </a:solidFill>
+                          <a:latin typeface="Times New Roman"/>
+                        </a:rPr>
+                        <a:t>2</a:t>
+                      </a:r>
+                      <a:endParaRPr b="0" lang="ru-RU" sz="1800" spc="-1" strike="noStrike">
+                        <a:solidFill>
+                          <a:srgbClr val="000000"/>
+                        </a:solidFill>
+                        <a:latin typeface="Arial"/>
+                      </a:endParaRPr>
+                    </a:p>
+                  </a:txBody>
+                  <a:tcPr anchor="t" marL="36000" marR="36000">
+                    <a:lnL w="7200">
+                      <a:solidFill>
+                        <a:srgbClr val="000000"/>
+                      </a:solidFill>
+                      <a:prstDash val="solid"/>
+                    </a:lnL>
+                    <a:lnR w="7200">
+                      <a:solidFill>
+                        <a:srgbClr val="000000"/>
+                      </a:solidFill>
+                      <a:prstDash val="solid"/>
+                    </a:lnR>
+                    <a:lnT w="7200">
+                      <a:solidFill>
+                        <a:srgbClr val="000000"/>
+                      </a:solidFill>
+                      <a:prstDash val="solid"/>
+                    </a:lnT>
+                    <a:lnB w="7200">
+                      <a:solidFill>
+                        <a:srgbClr val="000000"/>
+                      </a:solidFill>
+                      <a:prstDash val="solid"/>
+                    </a:lnB>
+                    <a:noFill/>
+                  </a:tcPr>
+                </a:tc>
+                <a:tc>
+                  <a:txBody>
+                    <a:bodyPr lIns="36000" rIns="36000" anchor="t">
+                      <a:noAutofit/>
+                    </a:bodyPr>
+                    <a:p>
+                      <a:pPr algn="r">
+                        <a:lnSpc>
+                          <a:spcPct val="100000"/>
+                        </a:lnSpc>
+                      </a:pPr>
+                      <a:r>
+                        <a:rPr b="0" lang="ru-RU" sz="1800" spc="-1" strike="noStrike">
+                          <a:solidFill>
+                            <a:srgbClr val="000000"/>
+                          </a:solidFill>
+                          <a:latin typeface="Times New Roman"/>
+                        </a:rPr>
+                        <a:t>3</a:t>
+                      </a:r>
+                      <a:endParaRPr b="0" lang="ru-RU" sz="1800" spc="-1" strike="noStrike">
+                        <a:solidFill>
+                          <a:srgbClr val="000000"/>
+                        </a:solidFill>
+                        <a:latin typeface="Arial"/>
+                      </a:endParaRPr>
+                    </a:p>
+                  </a:txBody>
+                  <a:tcPr anchor="t" marL="36000" marR="36000">
+                    <a:lnL w="7200">
+                      <a:solidFill>
+                        <a:srgbClr val="000000"/>
+                      </a:solidFill>
+                      <a:prstDash val="solid"/>
+                    </a:lnL>
+                    <a:lnR w="7200">
+                      <a:solidFill>
+                        <a:srgbClr val="000000"/>
+                      </a:solidFill>
+                      <a:prstDash val="solid"/>
+                    </a:lnR>
+                    <a:lnT w="7200">
+                      <a:solidFill>
+                        <a:srgbClr val="000000"/>
+                      </a:solidFill>
+                      <a:prstDash val="solid"/>
+                    </a:lnT>
+                    <a:lnB w="7200">
+                      <a:solidFill>
+                        <a:srgbClr val="000000"/>
+                      </a:solidFill>
+                      <a:prstDash val="solid"/>
+                    </a:lnB>
+                    <a:noFill/>
+                  </a:tcPr>
+                </a:tc>
+                <a:tc>
+                  <a:txBody>
+                    <a:bodyPr lIns="36000" rIns="36000" anchor="t">
+                      <a:noAutofit/>
+                    </a:bodyPr>
+                    <a:p>
+                      <a:pPr algn="r">
+                        <a:lnSpc>
+                          <a:spcPct val="100000"/>
+                        </a:lnSpc>
+                      </a:pPr>
+                      <a:r>
+                        <a:rPr b="0" lang="ru-RU" sz="1800" spc="-1" strike="noStrike">
+                          <a:solidFill>
+                            <a:srgbClr val="000000"/>
+                          </a:solidFill>
+                          <a:latin typeface="Times New Roman"/>
+                        </a:rPr>
+                        <a:t>4</a:t>
+                      </a:r>
+                      <a:endParaRPr b="0" lang="ru-RU" sz="1800" spc="-1" strike="noStrike">
+                        <a:solidFill>
+                          <a:srgbClr val="000000"/>
+                        </a:solidFill>
+                        <a:latin typeface="Arial"/>
+                      </a:endParaRPr>
+                    </a:p>
+                  </a:txBody>
+                  <a:tcPr anchor="t" marL="36000" marR="36000">
+                    <a:lnL w="7200">
+                      <a:solidFill>
+                        <a:srgbClr val="000000"/>
+                      </a:solidFill>
+                      <a:prstDash val="solid"/>
+                    </a:lnL>
+                    <a:lnR w="7200">
+                      <a:solidFill>
+                        <a:srgbClr val="000000"/>
+                      </a:solidFill>
+                      <a:prstDash val="solid"/>
+                    </a:lnR>
+                    <a:lnT w="7200">
+                      <a:solidFill>
+                        <a:srgbClr val="000000"/>
+                      </a:solidFill>
+                      <a:prstDash val="solid"/>
+                    </a:lnT>
+                    <a:lnB w="7200">
+                      <a:solidFill>
+                        <a:srgbClr val="000000"/>
+                      </a:solidFill>
+                      <a:prstDash val="solid"/>
+                    </a:lnB>
+                    <a:noFill/>
+                  </a:tcPr>
+                </a:tc>
+                <a:tc>
+                  <a:txBody>
+                    <a:bodyPr lIns="36000" rIns="36000" anchor="t">
+                      <a:noAutofit/>
+                    </a:bodyPr>
+                    <a:p>
+                      <a:pPr algn="r">
+                        <a:lnSpc>
+                          <a:spcPct val="100000"/>
+                        </a:lnSpc>
+                      </a:pPr>
+                      <a:r>
+                        <a:rPr b="0" lang="ru-RU" sz="1800" spc="-1" strike="noStrike">
+                          <a:solidFill>
+                            <a:srgbClr val="000000"/>
+                          </a:solidFill>
+                          <a:latin typeface="Times New Roman"/>
+                        </a:rPr>
+                        <a:t>5</a:t>
+                      </a:r>
+                      <a:endParaRPr b="0" lang="ru-RU" sz="1800" spc="-1" strike="noStrike">
+                        <a:solidFill>
+                          <a:srgbClr val="000000"/>
+                        </a:solidFill>
+                        <a:latin typeface="Arial"/>
+                      </a:endParaRPr>
+                    </a:p>
+                  </a:txBody>
+                  <a:tcPr anchor="t" marL="36000" marR="36000">
+                    <a:lnL w="7200">
+                      <a:solidFill>
+                        <a:srgbClr val="000000"/>
+                      </a:solidFill>
+                      <a:prstDash val="solid"/>
+                    </a:lnL>
+                    <a:lnR w="7200">
+                      <a:solidFill>
+                        <a:srgbClr val="000000"/>
+                      </a:solidFill>
+                      <a:prstDash val="solid"/>
+                    </a:lnR>
+                    <a:lnT w="7200">
+                      <a:solidFill>
+                        <a:srgbClr val="000000"/>
+                      </a:solidFill>
+                      <a:prstDash val="solid"/>
+                    </a:lnT>
+                    <a:lnB w="7200">
+                      <a:solidFill>
+                        <a:srgbClr val="000000"/>
+                      </a:solidFill>
+                      <a:prstDash val="solid"/>
+                    </a:lnB>
+                    <a:noFill/>
+                  </a:tcPr>
+                </a:tc>
+              </a:tr>
+              <a:tr h="0">
+                <a:tc>
+                  <a:txBody>
+                    <a:bodyPr lIns="36000" rIns="36000" anchor="t">
+                      <a:noAutofit/>
+                    </a:bodyPr>
+                    <a:p>
+                      <a:pPr>
+                        <a:lnSpc>
+                          <a:spcPct val="100000"/>
+                        </a:lnSpc>
+                      </a:pPr>
+                      <a:r>
+                        <a:rPr b="0" lang="ru-RU" sz="1800" spc="-1" strike="noStrike">
+                          <a:solidFill>
+                            <a:srgbClr val="000000"/>
+                          </a:solidFill>
+                          <a:latin typeface="Times New Roman"/>
+                        </a:rPr>
+                        <a:t>количество</a:t>
+                      </a:r>
+                      <a:endParaRPr b="0" lang="ru-RU" sz="1800" spc="-1" strike="noStrike">
+                        <a:solidFill>
+                          <a:srgbClr val="000000"/>
+                        </a:solidFill>
+                        <a:latin typeface="Arial"/>
+                      </a:endParaRPr>
+                    </a:p>
+                  </a:txBody>
+                  <a:tcPr anchor="t" marL="36000" marR="36000">
+                    <a:lnL w="7200">
+                      <a:solidFill>
+                        <a:srgbClr val="000000"/>
+                      </a:solidFill>
+                      <a:prstDash val="solid"/>
+                    </a:lnL>
+                    <a:lnR w="7200">
+                      <a:solidFill>
+                        <a:srgbClr val="000000"/>
+                      </a:solidFill>
+                      <a:prstDash val="solid"/>
+                    </a:lnR>
+                    <a:lnT w="7200">
+                      <a:solidFill>
+                        <a:srgbClr val="000000"/>
+                      </a:solidFill>
+                      <a:prstDash val="solid"/>
+                    </a:lnT>
+                    <a:lnB w="7200">
+                      <a:solidFill>
+                        <a:srgbClr val="000000"/>
+                      </a:solidFill>
+                      <a:prstDash val="solid"/>
+                    </a:lnB>
+                    <a:noFill/>
+                  </a:tcPr>
+                </a:tc>
+                <a:tc>
+                  <a:txBody>
+                    <a:bodyPr lIns="36000" rIns="36000" anchor="t">
+                      <a:noAutofit/>
+                    </a:bodyPr>
+                    <a:p>
+                      <a:pPr algn="r">
+                        <a:lnSpc>
+                          <a:spcPct val="100000"/>
+                        </a:lnSpc>
+                      </a:pPr>
+                      <a:r>
+                        <a:rPr b="0" lang="ru-RU" sz="1800" spc="-1" strike="noStrike">
+                          <a:solidFill>
+                            <a:srgbClr val="000000"/>
+                          </a:solidFill>
+                          <a:latin typeface="Times New Roman"/>
+                        </a:rPr>
+                        <a:t>1</a:t>
+                      </a:r>
+                      <a:endParaRPr b="0" lang="ru-RU" sz="1800" spc="-1" strike="noStrike">
+                        <a:solidFill>
+                          <a:srgbClr val="000000"/>
+                        </a:solidFill>
+                        <a:latin typeface="Arial"/>
+                      </a:endParaRPr>
+                    </a:p>
+                  </a:txBody>
+                  <a:tcPr anchor="t" marL="36000" marR="36000">
+                    <a:lnL w="7200">
+                      <a:solidFill>
+                        <a:srgbClr val="000000"/>
+                      </a:solidFill>
+                      <a:prstDash val="solid"/>
+                    </a:lnL>
+                    <a:lnR w="7200">
+                      <a:solidFill>
+                        <a:srgbClr val="000000"/>
+                      </a:solidFill>
+                      <a:prstDash val="solid"/>
+                    </a:lnR>
+                    <a:lnT w="7200">
+                      <a:solidFill>
+                        <a:srgbClr val="000000"/>
+                      </a:solidFill>
+                      <a:prstDash val="solid"/>
+                    </a:lnT>
+                    <a:lnB w="7200">
+                      <a:solidFill>
+                        <a:srgbClr val="000000"/>
+                      </a:solidFill>
+                      <a:prstDash val="solid"/>
+                    </a:lnB>
+                    <a:noFill/>
+                  </a:tcPr>
+                </a:tc>
+                <a:tc>
+                  <a:txBody>
+                    <a:bodyPr lIns="36000" rIns="36000" anchor="t">
+                      <a:noAutofit/>
+                    </a:bodyPr>
+                    <a:p>
+                      <a:pPr algn="r">
+                        <a:lnSpc>
+                          <a:spcPct val="100000"/>
+                        </a:lnSpc>
+                      </a:pPr>
+                      <a:r>
+                        <a:rPr b="0" lang="ru-RU" sz="1800" spc="-1" strike="noStrike">
+                          <a:solidFill>
+                            <a:srgbClr val="000000"/>
+                          </a:solidFill>
+                          <a:latin typeface="Times New Roman"/>
+                        </a:rPr>
+                        <a:t>1</a:t>
+                      </a:r>
+                      <a:endParaRPr b="0" lang="ru-RU" sz="1800" spc="-1" strike="noStrike">
+                        <a:solidFill>
+                          <a:srgbClr val="000000"/>
+                        </a:solidFill>
+                        <a:latin typeface="Arial"/>
+                      </a:endParaRPr>
+                    </a:p>
+                  </a:txBody>
+                  <a:tcPr anchor="t" marL="36000" marR="36000">
+                    <a:lnL w="7200">
+                      <a:solidFill>
+                        <a:srgbClr val="000000"/>
+                      </a:solidFill>
+                      <a:prstDash val="solid"/>
+                    </a:lnL>
+                    <a:lnR w="7200">
+                      <a:solidFill>
+                        <a:srgbClr val="000000"/>
+                      </a:solidFill>
+                      <a:prstDash val="solid"/>
+                    </a:lnR>
+                    <a:lnT w="7200">
+                      <a:solidFill>
+                        <a:srgbClr val="000000"/>
+                      </a:solidFill>
+                      <a:prstDash val="solid"/>
+                    </a:lnT>
+                    <a:lnB w="7200">
+                      <a:solidFill>
+                        <a:srgbClr val="000000"/>
+                      </a:solidFill>
+                      <a:prstDash val="solid"/>
+                    </a:lnB>
+                    <a:noFill/>
+                  </a:tcPr>
+                </a:tc>
+                <a:tc>
+                  <a:txBody>
+                    <a:bodyPr lIns="36000" rIns="36000" anchor="t">
+                      <a:noAutofit/>
+                    </a:bodyPr>
+                    <a:p>
+                      <a:pPr algn="r">
+                        <a:lnSpc>
+                          <a:spcPct val="100000"/>
+                        </a:lnSpc>
+                      </a:pPr>
+                      <a:r>
+                        <a:rPr b="0" lang="ru-RU" sz="1800" spc="-1" strike="noStrike">
+                          <a:solidFill>
+                            <a:srgbClr val="000000"/>
+                          </a:solidFill>
+                          <a:latin typeface="Times New Roman"/>
+                        </a:rPr>
+                        <a:t>1</a:t>
+                      </a:r>
+                      <a:endParaRPr b="0" lang="ru-RU" sz="1800" spc="-1" strike="noStrike">
+                        <a:solidFill>
+                          <a:srgbClr val="000000"/>
+                        </a:solidFill>
+                        <a:latin typeface="Arial"/>
+                      </a:endParaRPr>
+                    </a:p>
+                  </a:txBody>
+                  <a:tcPr anchor="t" marL="36000" marR="36000">
+                    <a:lnL w="7200">
+                      <a:solidFill>
+                        <a:srgbClr val="000000"/>
+                      </a:solidFill>
+                      <a:prstDash val="solid"/>
+                    </a:lnL>
+                    <a:lnR w="7200">
+                      <a:solidFill>
+                        <a:srgbClr val="000000"/>
+                      </a:solidFill>
+                      <a:prstDash val="solid"/>
+                    </a:lnR>
+                    <a:lnT w="7200">
+                      <a:solidFill>
+                        <a:srgbClr val="000000"/>
+                      </a:solidFill>
+                      <a:prstDash val="solid"/>
+                    </a:lnT>
+                    <a:lnB w="7200">
+                      <a:solidFill>
+                        <a:srgbClr val="000000"/>
+                      </a:solidFill>
+                      <a:prstDash val="solid"/>
+                    </a:lnB>
+                    <a:noFill/>
+                  </a:tcPr>
+                </a:tc>
+                <a:tc>
+                  <a:txBody>
+                    <a:bodyPr lIns="36000" rIns="36000" anchor="t">
+                      <a:noAutofit/>
+                    </a:bodyPr>
+                    <a:p>
+                      <a:pPr algn="r">
+                        <a:lnSpc>
+                          <a:spcPct val="100000"/>
+                        </a:lnSpc>
+                      </a:pPr>
+                      <a:r>
+                        <a:rPr b="0" lang="ru-RU" sz="1800" spc="-1" strike="noStrike">
+                          <a:solidFill>
+                            <a:srgbClr val="000000"/>
+                          </a:solidFill>
+                          <a:latin typeface="Times New Roman"/>
+                        </a:rPr>
+                        <a:t>3</a:t>
+                      </a:r>
+                      <a:endParaRPr b="0" lang="ru-RU" sz="1800" spc="-1" strike="noStrike">
+                        <a:solidFill>
+                          <a:srgbClr val="000000"/>
+                        </a:solidFill>
+                        <a:latin typeface="Arial"/>
+                      </a:endParaRPr>
+                    </a:p>
+                  </a:txBody>
+                  <a:tcPr anchor="t" marL="36000" marR="36000">
+                    <a:lnL w="7200">
+                      <a:solidFill>
+                        <a:srgbClr val="000000"/>
+                      </a:solidFill>
+                      <a:prstDash val="solid"/>
+                    </a:lnL>
+                    <a:lnR w="7200">
+                      <a:solidFill>
+                        <a:srgbClr val="000000"/>
+                      </a:solidFill>
+                      <a:prstDash val="solid"/>
+                    </a:lnR>
+                    <a:lnT w="7200">
+                      <a:solidFill>
+                        <a:srgbClr val="000000"/>
+                      </a:solidFill>
+                      <a:prstDash val="solid"/>
+                    </a:lnT>
+                    <a:lnB w="7200">
+                      <a:solidFill>
+                        <a:srgbClr val="000000"/>
+                      </a:solidFill>
+                      <a:prstDash val="solid"/>
+                    </a:lnB>
+                    <a:noFill/>
+                  </a:tcPr>
+                </a:tc>
+                <a:tc>
+                  <a:txBody>
+                    <a:bodyPr lIns="36000" rIns="36000" anchor="t">
+                      <a:noAutofit/>
+                    </a:bodyPr>
+                    <a:p>
+                      <a:pPr algn="r">
+                        <a:lnSpc>
+                          <a:spcPct val="100000"/>
+                        </a:lnSpc>
+                      </a:pPr>
+                      <a:r>
+                        <a:rPr b="0" lang="ru-RU" sz="1800" spc="-1" strike="noStrike">
+                          <a:solidFill>
+                            <a:srgbClr val="000000"/>
+                          </a:solidFill>
+                          <a:latin typeface="Times New Roman"/>
+                        </a:rPr>
+                        <a:t>11</a:t>
+                      </a:r>
+                      <a:endParaRPr b="0" lang="ru-RU" sz="1800" spc="-1" strike="noStrike">
+                        <a:solidFill>
+                          <a:srgbClr val="000000"/>
+                        </a:solidFill>
+                        <a:latin typeface="Arial"/>
+                      </a:endParaRPr>
+                    </a:p>
+                  </a:txBody>
+                  <a:tcPr anchor="t" marL="36000" marR="36000">
+                    <a:lnL w="7200">
+                      <a:solidFill>
+                        <a:srgbClr val="000000"/>
+                      </a:solidFill>
+                      <a:prstDash val="solid"/>
+                    </a:lnL>
+                    <a:lnR w="7200">
+                      <a:solidFill>
+                        <a:srgbClr val="000000"/>
+                      </a:solidFill>
+                      <a:prstDash val="solid"/>
+                    </a:lnR>
+                    <a:lnT w="7200">
+                      <a:solidFill>
+                        <a:srgbClr val="000000"/>
+                      </a:solidFill>
+                      <a:prstDash val="solid"/>
+                    </a:lnT>
+                    <a:lnB w="7200">
+                      <a:solidFill>
+                        <a:srgbClr val="000000"/>
+                      </a:solidFill>
+                      <a:prstDash val="solid"/>
+                    </a:lnB>
+                    <a:noFill/>
+                  </a:tcPr>
+                </a:tc>
+                <a:tc>
+                  <a:txBody>
+                    <a:bodyPr lIns="36000" rIns="36000" anchor="t">
+                      <a:noAutofit/>
+                    </a:bodyPr>
+                    <a:p>
+                      <a:pPr algn="r">
+                        <a:lnSpc>
+                          <a:spcPct val="100000"/>
+                        </a:lnSpc>
+                      </a:pPr>
+                      <a:r>
+                        <a:rPr b="0" lang="ru-RU" sz="1800" spc="-1" strike="noStrike">
+                          <a:solidFill>
+                            <a:srgbClr val="000000"/>
+                          </a:solidFill>
+                          <a:latin typeface="Times New Roman"/>
+                        </a:rPr>
+                        <a:t>24</a:t>
+                      </a:r>
+                      <a:endParaRPr b="0" lang="ru-RU" sz="1800" spc="-1" strike="noStrike">
+                        <a:solidFill>
+                          <a:srgbClr val="000000"/>
+                        </a:solidFill>
+                        <a:latin typeface="Arial"/>
+                      </a:endParaRPr>
+                    </a:p>
+                  </a:txBody>
+                  <a:tcPr anchor="t" marL="36000" marR="36000">
+                    <a:lnL w="7200">
+                      <a:solidFill>
+                        <a:srgbClr val="000000"/>
+                      </a:solidFill>
+                      <a:prstDash val="solid"/>
+                    </a:lnL>
+                    <a:lnR w="7200">
+                      <a:solidFill>
+                        <a:srgbClr val="000000"/>
+                      </a:solidFill>
+                      <a:prstDash val="solid"/>
+                    </a:lnR>
+                    <a:lnT w="7200">
+                      <a:solidFill>
+                        <a:srgbClr val="000000"/>
+                      </a:solidFill>
+                      <a:prstDash val="solid"/>
+                    </a:lnT>
+                    <a:lnB w="7200">
+                      <a:solidFill>
+                        <a:srgbClr val="000000"/>
+                      </a:solidFill>
+                      <a:prstDash val="solid"/>
+                    </a:lnB>
+                    <a:noFill/>
+                  </a:tcPr>
+                </a:tc>
+              </a:tr>
+            </a:tbl>
+          </a:graphicData>
+        </a:graphic>
+      </p:graphicFrame>
+      <p:sp>
+        <p:nvSpPr>
+          <p:cNvPr id="22" name=""/>
+          <p:cNvSpPr txBox="1"/>
+          <p:nvPr/>
+        </p:nvSpPr>
+        <p:spPr>
+          <a:xfrm>
+            <a:off x="180000" y="6300000"/>
+            <a:ext cx="3425400" cy="427320"/>
           </a:xfrm>
           <a:prstGeom prst="rect">
             <a:avLst/>
@@ -4337,23 +4928,20 @@
           </a:ln>
         </p:spPr>
         <p:txBody>
-          <a:bodyPr lIns="0" rIns="0" tIns="0" bIns="0" anchor="ctr">
+          <a:bodyPr lIns="90000" rIns="90000" tIns="45000" bIns="45000" anchor="t">
             <a:noAutofit/>
           </a:bodyPr>
           <a:p>
-            <a:pPr indent="0" algn="ctr">
-              <a:buNone/>
-            </a:pPr>
-            <a:r>
-              <a:rPr b="1" lang="ru-RU" sz="2000" spc="-1" strike="noStrike">
+            <a:fld id="{126217DD-B474-46B9-8800-7CA7740B9A36}" type="slidenum">
+              <a:rPr b="0" lang="ru-RU" sz="2400" spc="-1" strike="noStrike">
                 <a:solidFill>
                   <a:srgbClr val="000000"/>
                 </a:solidFill>
                 <a:latin typeface="Times New Roman"/>
               </a:rPr>
-              <a:t>Уменьшение кол-ва значений выходной переменной</a:t>
-            </a:r>
-            <a:endParaRPr b="1" lang="ru-RU" sz="2000" spc="-1" strike="noStrike">
+              <a:t>&lt;номер&gt;</a:t>
+            </a:fld>
+            <a:endParaRPr b="0" lang="ru-RU" sz="2400" spc="-1" strike="noStrike">
               <a:solidFill>
                 <a:srgbClr val="000000"/>
               </a:solidFill>
@@ -4362,468 +4950,6 @@
           </a:p>
         </p:txBody>
       </p:sp>
-      <p:graphicFrame>
-        <p:nvGraphicFramePr>
-          <p:cNvPr id="22" name=""/>
-          <p:cNvGraphicFramePr/>
-          <p:nvPr/>
-        </p:nvGraphicFramePr>
-        <p:xfrm>
-          <a:off x="457200" y="1604520"/>
-          <a:ext cx="8228880" cy="1384920"/>
-        </p:xfrm>
-        <a:graphic>
-          <a:graphicData uri="http://schemas.openxmlformats.org/drawingml/2006/table">
-            <a:tbl>
-              <a:tblPr/>
-              <a:tblGrid>
-                <a:gridCol w="4114440"/>
-                <a:gridCol w="4114800"/>
-              </a:tblGrid>
-              <a:tr h="346320">
-                <a:tc>
-                  <a:txBody>
-                    <a:bodyPr lIns="36000" rIns="36000" tIns="36000" bIns="36000" anchor="t">
-                      <a:noAutofit/>
-                    </a:bodyPr>
-                    <a:p>
-                      <a:pPr indent="0" algn="ctr">
-                        <a:buNone/>
-                      </a:pPr>
-                      <a:r>
-                        <a:rPr b="0" lang="ru-RU" sz="1800" spc="-1" strike="noStrike">
-                          <a:solidFill>
-                            <a:srgbClr val="000000"/>
-                          </a:solidFill>
-                          <a:latin typeface="Times New Roman"/>
-                        </a:rPr>
-                        <a:t>Значение переменной</a:t>
-                      </a:r>
-                      <a:endParaRPr b="0" lang="ru-RU" sz="1800" spc="-1" strike="noStrike">
-                        <a:solidFill>
-                          <a:srgbClr val="000000"/>
-                        </a:solidFill>
-                        <a:latin typeface="Times New Roman"/>
-                      </a:endParaRPr>
-                    </a:p>
-                  </a:txBody>
-                  <a:tcPr anchor="t" marL="36000" marR="36000">
-                    <a:lnL w="7200">
-                      <a:solidFill>
-                        <a:srgbClr val="000000"/>
-                      </a:solidFill>
-                      <a:prstDash val="solid"/>
-                    </a:lnL>
-                    <a:lnR w="7200">
-                      <a:solidFill>
-                        <a:srgbClr val="000000"/>
-                      </a:solidFill>
-                      <a:prstDash val="solid"/>
-                    </a:lnR>
-                    <a:lnT w="7200">
-                      <a:solidFill>
-                        <a:srgbClr val="000000"/>
-                      </a:solidFill>
-                      <a:prstDash val="solid"/>
-                    </a:lnT>
-                    <a:lnB w="7200">
-                      <a:solidFill>
-                        <a:srgbClr val="000000"/>
-                      </a:solidFill>
-                      <a:prstDash val="solid"/>
-                    </a:lnB>
-                    <a:noFill/>
-                  </a:tcPr>
-                </a:tc>
-                <a:tc>
-                  <a:txBody>
-                    <a:bodyPr lIns="36000" rIns="36000" tIns="36000" bIns="36000" anchor="t">
-                      <a:noAutofit/>
-                    </a:bodyPr>
-                    <a:p>
-                      <a:pPr indent="0" algn="ctr">
-                        <a:buNone/>
-                      </a:pPr>
-                      <a:r>
-                        <a:rPr b="0" lang="ru-RU" sz="1800" spc="-1" strike="noStrike">
-                          <a:solidFill>
-                            <a:srgbClr val="000000"/>
-                          </a:solidFill>
-                          <a:latin typeface="Times New Roman"/>
-                        </a:rPr>
-                        <a:t>Диапазон рейтинга</a:t>
-                      </a:r>
-                      <a:endParaRPr b="0" lang="ru-RU" sz="1800" spc="-1" strike="noStrike">
-                        <a:solidFill>
-                          <a:srgbClr val="000000"/>
-                        </a:solidFill>
-                        <a:latin typeface="Times New Roman"/>
-                      </a:endParaRPr>
-                    </a:p>
-                  </a:txBody>
-                  <a:tcPr anchor="t" marL="36000" marR="36000">
-                    <a:lnL w="7200">
-                      <a:solidFill>
-                        <a:srgbClr val="000000"/>
-                      </a:solidFill>
-                      <a:prstDash val="solid"/>
-                    </a:lnL>
-                    <a:lnR w="7200">
-                      <a:solidFill>
-                        <a:srgbClr val="000000"/>
-                      </a:solidFill>
-                      <a:prstDash val="solid"/>
-                    </a:lnR>
-                    <a:lnT w="7200">
-                      <a:solidFill>
-                        <a:srgbClr val="000000"/>
-                      </a:solidFill>
-                      <a:prstDash val="solid"/>
-                    </a:lnT>
-                    <a:lnB w="7200">
-                      <a:solidFill>
-                        <a:srgbClr val="000000"/>
-                      </a:solidFill>
-                      <a:prstDash val="solid"/>
-                    </a:lnB>
-                    <a:noFill/>
-                  </a:tcPr>
-                </a:tc>
-              </a:tr>
-              <a:tr h="346320">
-                <a:tc>
-                  <a:txBody>
-                    <a:bodyPr lIns="36000" rIns="36000" tIns="36000" bIns="36000" anchor="t">
-                      <a:noAutofit/>
-                    </a:bodyPr>
-                    <a:p>
-                      <a:pPr indent="0" algn="ctr">
-                        <a:buNone/>
-                      </a:pPr>
-                      <a:r>
-                        <a:rPr b="0" lang="ru-RU" sz="1800" spc="-1" strike="noStrike">
-                          <a:solidFill>
-                            <a:srgbClr val="000000"/>
-                          </a:solidFill>
-                          <a:latin typeface="Times New Roman"/>
-                        </a:rPr>
-                        <a:t>0 (низкая)</a:t>
-                      </a:r>
-                      <a:endParaRPr b="0" lang="ru-RU" sz="1800" spc="-1" strike="noStrike">
-                        <a:solidFill>
-                          <a:srgbClr val="000000"/>
-                        </a:solidFill>
-                        <a:latin typeface="Times New Roman"/>
-                      </a:endParaRPr>
-                    </a:p>
-                  </a:txBody>
-                  <a:tcPr anchor="t" marL="36000" marR="36000">
-                    <a:lnL w="7200">
-                      <a:solidFill>
-                        <a:srgbClr val="000000"/>
-                      </a:solidFill>
-                      <a:prstDash val="solid"/>
-                    </a:lnL>
-                    <a:lnR w="7200">
-                      <a:solidFill>
-                        <a:srgbClr val="000000"/>
-                      </a:solidFill>
-                      <a:prstDash val="solid"/>
-                    </a:lnR>
-                    <a:lnT w="7200">
-                      <a:solidFill>
-                        <a:srgbClr val="000000"/>
-                      </a:solidFill>
-                      <a:prstDash val="solid"/>
-                    </a:lnT>
-                    <a:lnB w="7200">
-                      <a:solidFill>
-                        <a:srgbClr val="000000"/>
-                      </a:solidFill>
-                      <a:prstDash val="solid"/>
-                    </a:lnB>
-                    <a:noFill/>
-                  </a:tcPr>
-                </a:tc>
-                <a:tc>
-                  <a:txBody>
-                    <a:bodyPr lIns="36000" rIns="36000" tIns="36000" bIns="36000" anchor="t">
-                      <a:noAutofit/>
-                    </a:bodyPr>
-                    <a:p>
-                      <a:pPr indent="0" algn="ctr">
-                        <a:buNone/>
-                      </a:pPr>
-                      <a:r>
-                        <a:rPr b="0" lang="ru-RU" sz="1800" spc="-1" strike="noStrike">
-                          <a:solidFill>
-                            <a:srgbClr val="000000"/>
-                          </a:solidFill>
-                          <a:latin typeface="Times New Roman"/>
-                        </a:rPr>
-                        <a:t>[0;2)</a:t>
-                      </a:r>
-                      <a:endParaRPr b="0" lang="ru-RU" sz="1800" spc="-1" strike="noStrike">
-                        <a:solidFill>
-                          <a:srgbClr val="000000"/>
-                        </a:solidFill>
-                        <a:latin typeface="Times New Roman"/>
-                      </a:endParaRPr>
-                    </a:p>
-                  </a:txBody>
-                  <a:tcPr anchor="t" marL="36000" marR="36000">
-                    <a:lnL w="7200">
-                      <a:solidFill>
-                        <a:srgbClr val="000000"/>
-                      </a:solidFill>
-                      <a:prstDash val="solid"/>
-                    </a:lnL>
-                    <a:lnR w="7200">
-                      <a:solidFill>
-                        <a:srgbClr val="000000"/>
-                      </a:solidFill>
-                      <a:prstDash val="solid"/>
-                    </a:lnR>
-                    <a:lnT w="7200">
-                      <a:solidFill>
-                        <a:srgbClr val="000000"/>
-                      </a:solidFill>
-                      <a:prstDash val="solid"/>
-                    </a:lnT>
-                    <a:lnB w="7200">
-                      <a:solidFill>
-                        <a:srgbClr val="000000"/>
-                      </a:solidFill>
-                      <a:prstDash val="solid"/>
-                    </a:lnB>
-                    <a:noFill/>
-                  </a:tcPr>
-                </a:tc>
-              </a:tr>
-              <a:tr h="346320">
-                <a:tc>
-                  <a:txBody>
-                    <a:bodyPr lIns="36000" rIns="36000" tIns="36000" bIns="36000" anchor="t">
-                      <a:noAutofit/>
-                    </a:bodyPr>
-                    <a:p>
-                      <a:pPr indent="0" algn="ctr">
-                        <a:buNone/>
-                      </a:pPr>
-                      <a:r>
-                        <a:rPr b="0" lang="ru-RU" sz="1800" spc="-1" strike="noStrike">
-                          <a:solidFill>
-                            <a:srgbClr val="000000"/>
-                          </a:solidFill>
-                          <a:latin typeface="Times New Roman"/>
-                        </a:rPr>
-                        <a:t>1 (средняя)</a:t>
-                      </a:r>
-                      <a:endParaRPr b="0" lang="ru-RU" sz="1800" spc="-1" strike="noStrike">
-                        <a:solidFill>
-                          <a:srgbClr val="000000"/>
-                        </a:solidFill>
-                        <a:latin typeface="Times New Roman"/>
-                      </a:endParaRPr>
-                    </a:p>
-                  </a:txBody>
-                  <a:tcPr anchor="t" marL="36000" marR="36000">
-                    <a:lnL w="7200">
-                      <a:solidFill>
-                        <a:srgbClr val="000000"/>
-                      </a:solidFill>
-                      <a:prstDash val="solid"/>
-                    </a:lnL>
-                    <a:lnR w="7200">
-                      <a:solidFill>
-                        <a:srgbClr val="000000"/>
-                      </a:solidFill>
-                      <a:prstDash val="solid"/>
-                    </a:lnR>
-                    <a:lnT w="7200">
-                      <a:solidFill>
-                        <a:srgbClr val="000000"/>
-                      </a:solidFill>
-                      <a:prstDash val="solid"/>
-                    </a:lnT>
-                    <a:lnB w="7200">
-                      <a:solidFill>
-                        <a:srgbClr val="000000"/>
-                      </a:solidFill>
-                      <a:prstDash val="solid"/>
-                    </a:lnB>
-                    <a:noFill/>
-                  </a:tcPr>
-                </a:tc>
-                <a:tc>
-                  <a:txBody>
-                    <a:bodyPr lIns="36000" rIns="36000" tIns="36000" bIns="36000" anchor="t">
-                      <a:noAutofit/>
-                    </a:bodyPr>
-                    <a:p>
-                      <a:pPr indent="0" algn="ctr">
-                        <a:buNone/>
-                      </a:pPr>
-                      <a:r>
-                        <a:rPr b="0" lang="ru-RU" sz="1800" spc="-1" strike="noStrike">
-                          <a:solidFill>
-                            <a:srgbClr val="000000"/>
-                          </a:solidFill>
-                          <a:latin typeface="Times New Roman"/>
-                        </a:rPr>
-                        <a:t>[2;4)</a:t>
-                      </a:r>
-                      <a:endParaRPr b="0" lang="ru-RU" sz="1800" spc="-1" strike="noStrike">
-                        <a:solidFill>
-                          <a:srgbClr val="000000"/>
-                        </a:solidFill>
-                        <a:latin typeface="Times New Roman"/>
-                      </a:endParaRPr>
-                    </a:p>
-                  </a:txBody>
-                  <a:tcPr anchor="t" marL="36000" marR="36000">
-                    <a:lnL w="7200">
-                      <a:solidFill>
-                        <a:srgbClr val="000000"/>
-                      </a:solidFill>
-                      <a:prstDash val="solid"/>
-                    </a:lnL>
-                    <a:lnR w="7200">
-                      <a:solidFill>
-                        <a:srgbClr val="000000"/>
-                      </a:solidFill>
-                      <a:prstDash val="solid"/>
-                    </a:lnR>
-                    <a:lnT w="7200">
-                      <a:solidFill>
-                        <a:srgbClr val="000000"/>
-                      </a:solidFill>
-                      <a:prstDash val="solid"/>
-                    </a:lnT>
-                    <a:lnB w="7200">
-                      <a:solidFill>
-                        <a:srgbClr val="000000"/>
-                      </a:solidFill>
-                      <a:prstDash val="solid"/>
-                    </a:lnB>
-                    <a:noFill/>
-                  </a:tcPr>
-                </a:tc>
-              </a:tr>
-              <a:tr h="346320">
-                <a:tc>
-                  <a:txBody>
-                    <a:bodyPr lIns="36000" rIns="36000" tIns="36000" bIns="36000" anchor="t">
-                      <a:noAutofit/>
-                    </a:bodyPr>
-                    <a:p>
-                      <a:pPr indent="0" algn="ctr">
-                        <a:buNone/>
-                      </a:pPr>
-                      <a:r>
-                        <a:rPr b="0" lang="ru-RU" sz="1800" spc="-1" strike="noStrike">
-                          <a:solidFill>
-                            <a:srgbClr val="000000"/>
-                          </a:solidFill>
-                          <a:latin typeface="Times New Roman"/>
-                        </a:rPr>
-                        <a:t>2 (высокая)</a:t>
-                      </a:r>
-                      <a:endParaRPr b="0" lang="ru-RU" sz="1800" spc="-1" strike="noStrike">
-                        <a:solidFill>
-                          <a:srgbClr val="000000"/>
-                        </a:solidFill>
-                        <a:latin typeface="Times New Roman"/>
-                      </a:endParaRPr>
-                    </a:p>
-                  </a:txBody>
-                  <a:tcPr anchor="t" marL="36000" marR="36000">
-                    <a:lnL w="7200">
-                      <a:solidFill>
-                        <a:srgbClr val="000000"/>
-                      </a:solidFill>
-                      <a:prstDash val="solid"/>
-                    </a:lnL>
-                    <a:lnR w="7200">
-                      <a:solidFill>
-                        <a:srgbClr val="000000"/>
-                      </a:solidFill>
-                      <a:prstDash val="solid"/>
-                    </a:lnR>
-                    <a:lnT w="7200">
-                      <a:solidFill>
-                        <a:srgbClr val="000000"/>
-                      </a:solidFill>
-                      <a:prstDash val="solid"/>
-                    </a:lnT>
-                    <a:lnB w="7200">
-                      <a:solidFill>
-                        <a:srgbClr val="000000"/>
-                      </a:solidFill>
-                      <a:prstDash val="solid"/>
-                    </a:lnB>
-                    <a:noFill/>
-                  </a:tcPr>
-                </a:tc>
-                <a:tc>
-                  <a:txBody>
-                    <a:bodyPr lIns="36000" rIns="36000" tIns="36000" bIns="36000" anchor="t">
-                      <a:noAutofit/>
-                    </a:bodyPr>
-                    <a:p>
-                      <a:pPr indent="0" algn="ctr">
-                        <a:buNone/>
-                      </a:pPr>
-                      <a:r>
-                        <a:rPr b="0" lang="ru-RU" sz="1800" spc="-1" strike="noStrike">
-                          <a:solidFill>
-                            <a:srgbClr val="000000"/>
-                          </a:solidFill>
-                          <a:latin typeface="Times New Roman"/>
-                        </a:rPr>
-                        <a:t>[4;5]</a:t>
-                      </a:r>
-                      <a:endParaRPr b="0" lang="ru-RU" sz="1800" spc="-1" strike="noStrike">
-                        <a:solidFill>
-                          <a:srgbClr val="000000"/>
-                        </a:solidFill>
-                        <a:latin typeface="Times New Roman"/>
-                      </a:endParaRPr>
-                    </a:p>
-                  </a:txBody>
-                  <a:tcPr anchor="t" marL="36000" marR="36000">
-                    <a:lnL w="7200">
-                      <a:solidFill>
-                        <a:srgbClr val="000000"/>
-                      </a:solidFill>
-                      <a:prstDash val="solid"/>
-                    </a:lnL>
-                    <a:lnR w="7200">
-                      <a:solidFill>
-                        <a:srgbClr val="000000"/>
-                      </a:solidFill>
-                      <a:prstDash val="solid"/>
-                    </a:lnR>
-                    <a:lnT w="7200">
-                      <a:solidFill>
-                        <a:srgbClr val="000000"/>
-                      </a:solidFill>
-                      <a:prstDash val="solid"/>
-                    </a:lnT>
-                    <a:lnB w="7200">
-                      <a:solidFill>
-                        <a:srgbClr val="000000"/>
-                      </a:solidFill>
-                      <a:prstDash val="solid"/>
-                    </a:lnB>
-                    <a:noFill/>
-                  </a:tcPr>
-                </a:tc>
-              </a:tr>
-            </a:tbl>
-          </a:graphicData>
-        </a:graphic>
-      </p:graphicFrame>
     </p:spTree>
   </p:cSld>
   <mc:AlternateContent>
@@ -4837,9 +4963,17 @@
 </p:sld>
 </file>
 
-<file path=ppt/slides/slide6.xml><?xml version="1.0" encoding="utf-8"?>
+<file path=ppt/slides/slide4.xml><?xml version="1.0" encoding="utf-8"?>
 <p:sld xmlns:a="http://schemas.openxmlformats.org/drawingml/2006/main" xmlns:p="http://schemas.openxmlformats.org/presentationml/2006/main" xmlns:r="http://schemas.openxmlformats.org/officeDocument/2006/relationships" xmlns:p14="http://schemas.microsoft.com/office/powerpoint/2010/main" xmlns:p15="http://schemas.microsoft.com/office/powerpoint/2012/main" xmlns:mc="http://schemas.openxmlformats.org/markup-compatibility/2006">
   <p:cSld>
+    <p:bg>
+      <p:bgPr>
+        <a:blipFill rotWithShape="0">
+          <a:blip r:embed="rId1"/>
+          <a:tile tx="0" ty="0" sx="100000" sy="100000" algn="ctr"/>
+        </a:blipFill>
+      </p:bgPr>
+    </p:bg>
     <p:spTree>
       <p:nvGrpSpPr>
         <p:cNvPr id="1" name=""/>
@@ -4867,7 +5001,7 @@
         <p:spPr>
           <a:xfrm>
             <a:off x="457200" y="273240"/>
-            <a:ext cx="8229240" cy="446760"/>
+            <a:ext cx="8228880" cy="626400"/>
           </a:xfrm>
           <a:prstGeom prst="rect">
             <a:avLst/>
@@ -4883,7 +5017,939 @@
           </a:bodyPr>
           <a:p>
             <a:pPr indent="0" algn="ctr">
+              <a:lnSpc>
+                <a:spcPct val="100000"/>
+              </a:lnSpc>
               <a:buNone/>
+              <a:tabLst>
+                <a:tab algn="l" pos="0"/>
+              </a:tabLst>
+            </a:pPr>
+            <a:r>
+              <a:rPr b="1" lang="ru-RU" sz="2000" spc="-1" strike="noStrike">
+                <a:solidFill>
+                  <a:srgbClr val="000000"/>
+                </a:solidFill>
+                <a:latin typeface="Times New Roman"/>
+              </a:rPr>
+              <a:t>Сравнение Краснодара и Горячего Ключа</a:t>
+            </a:r>
+            <a:endParaRPr b="0" lang="ru-RU" sz="2000" spc="-1" strike="noStrike">
+              <a:solidFill>
+                <a:srgbClr val="000000"/>
+              </a:solidFill>
+              <a:latin typeface="Arial"/>
+            </a:endParaRPr>
+          </a:p>
+        </p:txBody>
+      </p:sp>
+      <p:graphicFrame>
+        <p:nvGraphicFramePr>
+          <p:cNvPr id="24" name=""/>
+          <p:cNvGraphicFramePr/>
+          <p:nvPr/>
+        </p:nvGraphicFramePr>
+        <p:xfrm>
+          <a:off x="4320000" y="2281320"/>
+          <a:ext cx="4679640" cy="2758320"/>
+        </p:xfrm>
+        <a:graphic>
+          <a:graphicData uri="http://schemas.openxmlformats.org/drawingml/2006/chart">
+            <c:chart xmlns:c="http://schemas.openxmlformats.org/drawingml/2006/chart" xmlns:r="http://schemas.openxmlformats.org/officeDocument/2006/relationships" r:id="rId2"/>
+          </a:graphicData>
+        </a:graphic>
+      </p:graphicFrame>
+      <p:sp>
+        <p:nvSpPr>
+          <p:cNvPr id="25" name=""/>
+          <p:cNvSpPr/>
+          <p:nvPr/>
+        </p:nvSpPr>
+        <p:spPr>
+          <a:xfrm>
+            <a:off x="5220000" y="1620000"/>
+            <a:ext cx="3239640" cy="539640"/>
+          </a:xfrm>
+          <a:prstGeom prst="rect">
+            <a:avLst/>
+          </a:prstGeom>
+          <a:noFill/>
+          <a:ln w="0">
+            <a:noFill/>
+          </a:ln>
+        </p:spPr>
+        <p:style>
+          <a:lnRef idx="0"/>
+          <a:fillRef idx="0"/>
+          <a:effectRef idx="0"/>
+          <a:fontRef idx="minor"/>
+        </p:style>
+        <p:txBody>
+          <a:bodyPr lIns="90000" rIns="90000" tIns="45000" bIns="45000" anchor="t">
+            <a:noAutofit/>
+          </a:bodyPr>
+          <a:p>
+            <a:pPr algn="ctr">
+              <a:lnSpc>
+                <a:spcPct val="100000"/>
+              </a:lnSpc>
+            </a:pPr>
+            <a:r>
+              <a:rPr b="0" lang="ru-RU" sz="1800" spc="-1" strike="noStrike">
+                <a:solidFill>
+                  <a:srgbClr val="000000"/>
+                </a:solidFill>
+                <a:latin typeface="Arial"/>
+              </a:rPr>
+              <a:t>Краснодар</a:t>
+            </a:r>
+            <a:endParaRPr b="0" lang="ru-RU" sz="1800" spc="-1" strike="noStrike">
+              <a:solidFill>
+                <a:srgbClr val="000000"/>
+              </a:solidFill>
+              <a:latin typeface="Arial"/>
+            </a:endParaRPr>
+          </a:p>
+        </p:txBody>
+      </p:sp>
+      <p:graphicFrame>
+        <p:nvGraphicFramePr>
+          <p:cNvPr id="26" name=""/>
+          <p:cNvGraphicFramePr/>
+          <p:nvPr/>
+        </p:nvGraphicFramePr>
+        <p:xfrm>
+          <a:off x="180360" y="2281320"/>
+          <a:ext cx="4679280" cy="3239280"/>
+        </p:xfrm>
+        <a:graphic>
+          <a:graphicData uri="http://schemas.openxmlformats.org/drawingml/2006/chart">
+            <c:chart xmlns:c="http://schemas.openxmlformats.org/drawingml/2006/chart" xmlns:r="http://schemas.openxmlformats.org/officeDocument/2006/relationships" r:id="rId3"/>
+          </a:graphicData>
+        </a:graphic>
+      </p:graphicFrame>
+      <p:sp>
+        <p:nvSpPr>
+          <p:cNvPr id="27" name=""/>
+          <p:cNvSpPr/>
+          <p:nvPr/>
+        </p:nvSpPr>
+        <p:spPr>
+          <a:xfrm>
+            <a:off x="720000" y="1440000"/>
+            <a:ext cx="3419640" cy="539640"/>
+          </a:xfrm>
+          <a:prstGeom prst="rect">
+            <a:avLst/>
+          </a:prstGeom>
+          <a:noFill/>
+          <a:ln w="0">
+            <a:noFill/>
+          </a:ln>
+        </p:spPr>
+        <p:style>
+          <a:lnRef idx="0"/>
+          <a:fillRef idx="0"/>
+          <a:effectRef idx="0"/>
+          <a:fontRef idx="minor"/>
+        </p:style>
+        <p:txBody>
+          <a:bodyPr lIns="90000" rIns="90000" tIns="45000" bIns="45000" anchor="t">
+            <a:noAutofit/>
+          </a:bodyPr>
+          <a:p>
+            <a:pPr algn="ctr">
+              <a:lnSpc>
+                <a:spcPct val="100000"/>
+              </a:lnSpc>
+            </a:pPr>
+            <a:r>
+              <a:rPr b="0" lang="ru-RU" sz="1800" spc="-1" strike="noStrike">
+                <a:solidFill>
+                  <a:srgbClr val="000000"/>
+                </a:solidFill>
+                <a:latin typeface="Times New Roman"/>
+              </a:rPr>
+              <a:t>Горячий Ключ</a:t>
+            </a:r>
+            <a:endParaRPr b="0" lang="ru-RU" sz="1800" spc="-1" strike="noStrike">
+              <a:solidFill>
+                <a:srgbClr val="000000"/>
+              </a:solidFill>
+              <a:latin typeface="Arial"/>
+            </a:endParaRPr>
+          </a:p>
+        </p:txBody>
+      </p:sp>
+      <p:sp>
+        <p:nvSpPr>
+          <p:cNvPr id="28" name=""/>
+          <p:cNvSpPr txBox="1"/>
+          <p:nvPr/>
+        </p:nvSpPr>
+        <p:spPr>
+          <a:xfrm>
+            <a:off x="360000" y="6232680"/>
+            <a:ext cx="3425400" cy="427320"/>
+          </a:xfrm>
+          <a:prstGeom prst="rect">
+            <a:avLst/>
+          </a:prstGeom>
+          <a:noFill/>
+          <a:ln w="0">
+            <a:noFill/>
+          </a:ln>
+        </p:spPr>
+        <p:txBody>
+          <a:bodyPr lIns="90000" rIns="90000" tIns="45000" bIns="45000" anchor="t">
+            <a:noAutofit/>
+          </a:bodyPr>
+          <a:p>
+            <a:fld id="{922D0BC0-BCE2-4F67-9393-7E3130189197}" type="slidenum">
+              <a:rPr b="0" lang="ru-RU" sz="2400" spc="-1" strike="noStrike">
+                <a:solidFill>
+                  <a:srgbClr val="000000"/>
+                </a:solidFill>
+                <a:latin typeface="Times New Roman"/>
+              </a:rPr>
+              <a:t>&lt;номер&gt;</a:t>
+            </a:fld>
+            <a:endParaRPr b="0" lang="ru-RU" sz="2400" spc="-1" strike="noStrike">
+              <a:solidFill>
+                <a:srgbClr val="000000"/>
+              </a:solidFill>
+              <a:latin typeface="Times New Roman"/>
+            </a:endParaRPr>
+          </a:p>
+        </p:txBody>
+      </p:sp>
+    </p:spTree>
+  </p:cSld>
+  <mc:AlternateContent>
+    <mc:Choice Requires="p14">
+      <p:transition spd="slow" p14:dur="2000"/>
+    </mc:Choice>
+    <mc:Fallback>
+      <p:transition spd="slow"/>
+    </mc:Fallback>
+  </mc:AlternateContent>
+</p:sld>
+</file>
+
+<file path=ppt/slides/slide5.xml><?xml version="1.0" encoding="utf-8"?>
+<p:sld xmlns:a="http://schemas.openxmlformats.org/drawingml/2006/main" xmlns:p="http://schemas.openxmlformats.org/presentationml/2006/main" xmlns:r="http://schemas.openxmlformats.org/officeDocument/2006/relationships" xmlns:p14="http://schemas.microsoft.com/office/powerpoint/2010/main" xmlns:p15="http://schemas.microsoft.com/office/powerpoint/2012/main" xmlns:mc="http://schemas.openxmlformats.org/markup-compatibility/2006">
+  <p:cSld>
+    <p:bg>
+      <p:bgPr>
+        <a:blipFill rotWithShape="0">
+          <a:blip r:embed="rId1"/>
+          <a:tile tx="0" ty="0" sx="100000" sy="100000" algn="ctr"/>
+        </a:blipFill>
+      </p:bgPr>
+    </p:bg>
+    <p:spTree>
+      <p:nvGrpSpPr>
+        <p:cNvPr id="1" name=""/>
+        <p:cNvGrpSpPr/>
+        <p:nvPr/>
+      </p:nvGrpSpPr>
+      <p:grpSpPr>
+        <a:xfrm>
+          <a:off x="0" y="0"/>
+          <a:ext cx="0" cy="0"/>
+          <a:chOff x="0" y="0"/>
+          <a:chExt cx="0" cy="0"/>
+        </a:xfrm>
+      </p:grpSpPr>
+      <p:sp>
+        <p:nvSpPr>
+          <p:cNvPr id="29" name="PlaceHolder 1"/>
+          <p:cNvSpPr>
+            <a:spLocks noGrp="1"/>
+          </p:cNvSpPr>
+          <p:nvPr>
+            <p:ph type="title"/>
+          </p:nvPr>
+        </p:nvSpPr>
+        <p:spPr>
+          <a:xfrm>
+            <a:off x="457200" y="273240"/>
+            <a:ext cx="8228880" cy="1144440"/>
+          </a:xfrm>
+          <a:prstGeom prst="rect">
+            <a:avLst/>
+          </a:prstGeom>
+          <a:noFill/>
+          <a:ln w="0">
+            <a:noFill/>
+          </a:ln>
+        </p:spPr>
+        <p:txBody>
+          <a:bodyPr lIns="0" rIns="0" tIns="0" bIns="0" anchor="ctr">
+            <a:noAutofit/>
+          </a:bodyPr>
+          <a:p>
+            <a:pPr indent="0" algn="ctr">
+              <a:lnSpc>
+                <a:spcPct val="100000"/>
+              </a:lnSpc>
+              <a:buNone/>
+              <a:tabLst>
+                <a:tab algn="l" pos="0"/>
+              </a:tabLst>
+            </a:pPr>
+            <a:r>
+              <a:rPr b="1" lang="ru-RU" sz="2000" spc="-1" strike="noStrike">
+                <a:solidFill>
+                  <a:srgbClr val="000000"/>
+                </a:solidFill>
+                <a:latin typeface="Times New Roman"/>
+              </a:rPr>
+              <a:t>Уменьшение кол-ва значений выходной переменной</a:t>
+            </a:r>
+            <a:endParaRPr b="0" lang="ru-RU" sz="2000" spc="-1" strike="noStrike">
+              <a:solidFill>
+                <a:srgbClr val="000000"/>
+              </a:solidFill>
+              <a:latin typeface="Arial"/>
+            </a:endParaRPr>
+          </a:p>
+        </p:txBody>
+      </p:sp>
+      <p:graphicFrame>
+        <p:nvGraphicFramePr>
+          <p:cNvPr id="30" name=""/>
+          <p:cNvGraphicFramePr/>
+          <p:nvPr/>
+        </p:nvGraphicFramePr>
+        <p:xfrm>
+          <a:off x="457200" y="1604520"/>
+          <a:ext cx="8228880" cy="1385280"/>
+        </p:xfrm>
+        <a:graphic>
+          <a:graphicData uri="http://schemas.openxmlformats.org/drawingml/2006/table">
+            <a:tbl>
+              <a:tblPr/>
+              <a:tblGrid>
+                <a:gridCol w="4114440"/>
+                <a:gridCol w="4114800"/>
+              </a:tblGrid>
+              <a:tr h="346320">
+                <a:tc>
+                  <a:txBody>
+                    <a:bodyPr lIns="36000" rIns="36000" tIns="36000" bIns="36000" anchor="t">
+                      <a:noAutofit/>
+                    </a:bodyPr>
+                    <a:p>
+                      <a:pPr algn="ctr">
+                        <a:lnSpc>
+                          <a:spcPct val="100000"/>
+                        </a:lnSpc>
+                        <a:tabLst>
+                          <a:tab algn="l" pos="0"/>
+                        </a:tabLst>
+                      </a:pPr>
+                      <a:r>
+                        <a:rPr b="0" lang="ru-RU" sz="1800" spc="-1" strike="noStrike">
+                          <a:solidFill>
+                            <a:srgbClr val="000000"/>
+                          </a:solidFill>
+                          <a:latin typeface="Times New Roman"/>
+                        </a:rPr>
+                        <a:t>Значение переменной</a:t>
+                      </a:r>
+                      <a:endParaRPr b="0" lang="ru-RU" sz="1800" spc="-1" strike="noStrike">
+                        <a:solidFill>
+                          <a:srgbClr val="ffffff"/>
+                        </a:solidFill>
+                        <a:latin typeface="Arial"/>
+                      </a:endParaRPr>
+                    </a:p>
+                  </a:txBody>
+                  <a:tcPr anchor="t" marL="36000" marR="36000">
+                    <a:lnL w="7200">
+                      <a:solidFill>
+                        <a:srgbClr val="666666"/>
+                      </a:solidFill>
+                      <a:prstDash val="solid"/>
+                    </a:lnL>
+                    <a:lnR w="7200">
+                      <a:solidFill>
+                        <a:srgbClr val="666666"/>
+                      </a:solidFill>
+                      <a:prstDash val="solid"/>
+                    </a:lnR>
+                    <a:lnT w="7200">
+                      <a:solidFill>
+                        <a:srgbClr val="666666"/>
+                      </a:solidFill>
+                      <a:prstDash val="solid"/>
+                    </a:lnT>
+                    <a:lnB w="7200">
+                      <a:solidFill>
+                        <a:srgbClr val="666666"/>
+                      </a:solidFill>
+                      <a:prstDash val="solid"/>
+                    </a:lnB>
+                    <a:solidFill>
+                      <a:srgbClr val="5983b0"/>
+                    </a:solidFill>
+                  </a:tcPr>
+                </a:tc>
+                <a:tc>
+                  <a:txBody>
+                    <a:bodyPr lIns="36000" rIns="36000" tIns="36000" bIns="36000" anchor="t">
+                      <a:noAutofit/>
+                    </a:bodyPr>
+                    <a:p>
+                      <a:pPr algn="ctr">
+                        <a:lnSpc>
+                          <a:spcPct val="100000"/>
+                        </a:lnSpc>
+                        <a:tabLst>
+                          <a:tab algn="l" pos="0"/>
+                        </a:tabLst>
+                      </a:pPr>
+                      <a:r>
+                        <a:rPr b="0" lang="ru-RU" sz="1800" spc="-1" strike="noStrike">
+                          <a:solidFill>
+                            <a:srgbClr val="000000"/>
+                          </a:solidFill>
+                          <a:latin typeface="Times New Roman"/>
+                        </a:rPr>
+                        <a:t>Диапазон рейтинга</a:t>
+                      </a:r>
+                      <a:endParaRPr b="0" lang="ru-RU" sz="1800" spc="-1" strike="noStrike">
+                        <a:solidFill>
+                          <a:srgbClr val="ffffff"/>
+                        </a:solidFill>
+                        <a:latin typeface="Arial"/>
+                      </a:endParaRPr>
+                    </a:p>
+                  </a:txBody>
+                  <a:tcPr anchor="t" marL="36000" marR="36000">
+                    <a:lnL w="7200">
+                      <a:solidFill>
+                        <a:srgbClr val="666666"/>
+                      </a:solidFill>
+                      <a:prstDash val="solid"/>
+                    </a:lnL>
+                    <a:lnR w="7200">
+                      <a:solidFill>
+                        <a:srgbClr val="666666"/>
+                      </a:solidFill>
+                      <a:prstDash val="solid"/>
+                    </a:lnR>
+                    <a:lnT w="7200">
+                      <a:solidFill>
+                        <a:srgbClr val="666666"/>
+                      </a:solidFill>
+                      <a:prstDash val="solid"/>
+                    </a:lnT>
+                    <a:lnB w="7200">
+                      <a:solidFill>
+                        <a:srgbClr val="666666"/>
+                      </a:solidFill>
+                      <a:prstDash val="solid"/>
+                    </a:lnB>
+                    <a:solidFill>
+                      <a:srgbClr val="5983b0"/>
+                    </a:solidFill>
+                  </a:tcPr>
+                </a:tc>
+              </a:tr>
+              <a:tr h="346320">
+                <a:tc>
+                  <a:txBody>
+                    <a:bodyPr lIns="36000" rIns="36000" tIns="36000" bIns="36000" anchor="t">
+                      <a:noAutofit/>
+                    </a:bodyPr>
+                    <a:p>
+                      <a:pPr algn="ctr">
+                        <a:lnSpc>
+                          <a:spcPct val="100000"/>
+                        </a:lnSpc>
+                        <a:tabLst>
+                          <a:tab algn="l" pos="0"/>
+                        </a:tabLst>
+                      </a:pPr>
+                      <a:r>
+                        <a:rPr b="0" lang="ru-RU" sz="1800" spc="-1" strike="noStrike">
+                          <a:solidFill>
+                            <a:srgbClr val="000000"/>
+                          </a:solidFill>
+                          <a:latin typeface="Times New Roman"/>
+                        </a:rPr>
+                        <a:t>0 (низкая)</a:t>
+                      </a:r>
+                      <a:endParaRPr b="0" lang="ru-RU" sz="1800" spc="-1" strike="noStrike">
+                        <a:solidFill>
+                          <a:srgbClr val="000000"/>
+                        </a:solidFill>
+                        <a:latin typeface="Arial"/>
+                      </a:endParaRPr>
+                    </a:p>
+                  </a:txBody>
+                  <a:tcPr anchor="t" marL="36000" marR="36000">
+                    <a:lnL w="7200">
+                      <a:solidFill>
+                        <a:srgbClr val="666666"/>
+                      </a:solidFill>
+                      <a:prstDash val="solid"/>
+                    </a:lnL>
+                    <a:lnR w="7200">
+                      <a:solidFill>
+                        <a:srgbClr val="666666"/>
+                      </a:solidFill>
+                      <a:prstDash val="solid"/>
+                    </a:lnR>
+                    <a:lnT w="7200">
+                      <a:solidFill>
+                        <a:srgbClr val="666666"/>
+                      </a:solidFill>
+                      <a:prstDash val="solid"/>
+                    </a:lnT>
+                    <a:lnB w="7200">
+                      <a:solidFill>
+                        <a:srgbClr val="666666"/>
+                      </a:solidFill>
+                      <a:prstDash val="solid"/>
+                    </a:lnB>
+                    <a:solidFill>
+                      <a:srgbClr val="cccccc"/>
+                    </a:solidFill>
+                  </a:tcPr>
+                </a:tc>
+                <a:tc>
+                  <a:txBody>
+                    <a:bodyPr lIns="36000" rIns="36000" tIns="36000" bIns="36000" anchor="t">
+                      <a:noAutofit/>
+                    </a:bodyPr>
+                    <a:p>
+                      <a:pPr algn="ctr">
+                        <a:lnSpc>
+                          <a:spcPct val="100000"/>
+                        </a:lnSpc>
+                        <a:tabLst>
+                          <a:tab algn="l" pos="0"/>
+                        </a:tabLst>
+                      </a:pPr>
+                      <a:r>
+                        <a:rPr b="0" lang="ru-RU" sz="1800" spc="-1" strike="noStrike">
+                          <a:solidFill>
+                            <a:srgbClr val="000000"/>
+                          </a:solidFill>
+                          <a:latin typeface="Times New Roman"/>
+                        </a:rPr>
+                        <a:t>[0;2)</a:t>
+                      </a:r>
+                      <a:endParaRPr b="0" lang="ru-RU" sz="1800" spc="-1" strike="noStrike">
+                        <a:solidFill>
+                          <a:srgbClr val="000000"/>
+                        </a:solidFill>
+                        <a:latin typeface="Arial"/>
+                      </a:endParaRPr>
+                    </a:p>
+                  </a:txBody>
+                  <a:tcPr anchor="t" marL="36000" marR="36000">
+                    <a:lnL w="7200">
+                      <a:solidFill>
+                        <a:srgbClr val="666666"/>
+                      </a:solidFill>
+                      <a:prstDash val="solid"/>
+                    </a:lnL>
+                    <a:lnR w="7200">
+                      <a:solidFill>
+                        <a:srgbClr val="666666"/>
+                      </a:solidFill>
+                      <a:prstDash val="solid"/>
+                    </a:lnR>
+                    <a:lnT w="7200">
+                      <a:solidFill>
+                        <a:srgbClr val="666666"/>
+                      </a:solidFill>
+                      <a:prstDash val="solid"/>
+                    </a:lnT>
+                    <a:lnB w="7200">
+                      <a:solidFill>
+                        <a:srgbClr val="666666"/>
+                      </a:solidFill>
+                      <a:prstDash val="solid"/>
+                    </a:lnB>
+                    <a:solidFill>
+                      <a:srgbClr val="cccccc"/>
+                    </a:solidFill>
+                  </a:tcPr>
+                </a:tc>
+              </a:tr>
+              <a:tr h="346320">
+                <a:tc>
+                  <a:txBody>
+                    <a:bodyPr lIns="36000" rIns="36000" tIns="36000" bIns="36000" anchor="t">
+                      <a:noAutofit/>
+                    </a:bodyPr>
+                    <a:p>
+                      <a:pPr algn="ctr">
+                        <a:lnSpc>
+                          <a:spcPct val="100000"/>
+                        </a:lnSpc>
+                        <a:tabLst>
+                          <a:tab algn="l" pos="0"/>
+                        </a:tabLst>
+                      </a:pPr>
+                      <a:r>
+                        <a:rPr b="0" lang="ru-RU" sz="1800" spc="-1" strike="noStrike">
+                          <a:solidFill>
+                            <a:srgbClr val="000000"/>
+                          </a:solidFill>
+                          <a:latin typeface="Times New Roman"/>
+                        </a:rPr>
+                        <a:t>1 (средняя)</a:t>
+                      </a:r>
+                      <a:endParaRPr b="0" lang="ru-RU" sz="1800" spc="-1" strike="noStrike">
+                        <a:solidFill>
+                          <a:srgbClr val="000000"/>
+                        </a:solidFill>
+                        <a:latin typeface="Arial"/>
+                      </a:endParaRPr>
+                    </a:p>
+                  </a:txBody>
+                  <a:tcPr anchor="t" marL="36000" marR="36000">
+                    <a:lnL w="7200">
+                      <a:solidFill>
+                        <a:srgbClr val="666666"/>
+                      </a:solidFill>
+                      <a:prstDash val="solid"/>
+                    </a:lnL>
+                    <a:lnR w="7200">
+                      <a:solidFill>
+                        <a:srgbClr val="666666"/>
+                      </a:solidFill>
+                      <a:prstDash val="solid"/>
+                    </a:lnR>
+                    <a:lnT w="7200">
+                      <a:solidFill>
+                        <a:srgbClr val="666666"/>
+                      </a:solidFill>
+                      <a:prstDash val="solid"/>
+                    </a:lnT>
+                    <a:lnB w="7200">
+                      <a:solidFill>
+                        <a:srgbClr val="666666"/>
+                      </a:solidFill>
+                      <a:prstDash val="solid"/>
+                    </a:lnB>
+                    <a:solidFill>
+                      <a:srgbClr val="ffffff"/>
+                    </a:solidFill>
+                  </a:tcPr>
+                </a:tc>
+                <a:tc>
+                  <a:txBody>
+                    <a:bodyPr lIns="36000" rIns="36000" tIns="36000" bIns="36000" anchor="t">
+                      <a:noAutofit/>
+                    </a:bodyPr>
+                    <a:p>
+                      <a:pPr algn="ctr">
+                        <a:lnSpc>
+                          <a:spcPct val="100000"/>
+                        </a:lnSpc>
+                        <a:tabLst>
+                          <a:tab algn="l" pos="0"/>
+                        </a:tabLst>
+                      </a:pPr>
+                      <a:r>
+                        <a:rPr b="0" lang="ru-RU" sz="1800" spc="-1" strike="noStrike">
+                          <a:solidFill>
+                            <a:srgbClr val="000000"/>
+                          </a:solidFill>
+                          <a:latin typeface="Times New Roman"/>
+                        </a:rPr>
+                        <a:t>[2;4)</a:t>
+                      </a:r>
+                      <a:endParaRPr b="0" lang="ru-RU" sz="1800" spc="-1" strike="noStrike">
+                        <a:solidFill>
+                          <a:srgbClr val="000000"/>
+                        </a:solidFill>
+                        <a:latin typeface="Arial"/>
+                      </a:endParaRPr>
+                    </a:p>
+                  </a:txBody>
+                  <a:tcPr anchor="t" marL="36000" marR="36000">
+                    <a:lnL w="7200">
+                      <a:solidFill>
+                        <a:srgbClr val="666666"/>
+                      </a:solidFill>
+                      <a:prstDash val="solid"/>
+                    </a:lnL>
+                    <a:lnR w="7200">
+                      <a:solidFill>
+                        <a:srgbClr val="666666"/>
+                      </a:solidFill>
+                      <a:prstDash val="solid"/>
+                    </a:lnR>
+                    <a:lnT w="7200">
+                      <a:solidFill>
+                        <a:srgbClr val="666666"/>
+                      </a:solidFill>
+                      <a:prstDash val="solid"/>
+                    </a:lnT>
+                    <a:lnB w="7200">
+                      <a:solidFill>
+                        <a:srgbClr val="666666"/>
+                      </a:solidFill>
+                      <a:prstDash val="solid"/>
+                    </a:lnB>
+                    <a:solidFill>
+                      <a:srgbClr val="ffffff"/>
+                    </a:solidFill>
+                  </a:tcPr>
+                </a:tc>
+              </a:tr>
+              <a:tr h="346320">
+                <a:tc>
+                  <a:txBody>
+                    <a:bodyPr lIns="36000" rIns="36000" tIns="36000" bIns="36000" anchor="t">
+                      <a:noAutofit/>
+                    </a:bodyPr>
+                    <a:p>
+                      <a:pPr algn="ctr">
+                        <a:lnSpc>
+                          <a:spcPct val="100000"/>
+                        </a:lnSpc>
+                        <a:tabLst>
+                          <a:tab algn="l" pos="0"/>
+                        </a:tabLst>
+                      </a:pPr>
+                      <a:r>
+                        <a:rPr b="0" lang="ru-RU" sz="1800" spc="-1" strike="noStrike">
+                          <a:solidFill>
+                            <a:srgbClr val="000000"/>
+                          </a:solidFill>
+                          <a:latin typeface="Times New Roman"/>
+                        </a:rPr>
+                        <a:t>2 (высокая)</a:t>
+                      </a:r>
+                      <a:endParaRPr b="0" lang="ru-RU" sz="1800" spc="-1" strike="noStrike">
+                        <a:solidFill>
+                          <a:srgbClr val="000000"/>
+                        </a:solidFill>
+                        <a:latin typeface="Arial"/>
+                      </a:endParaRPr>
+                    </a:p>
+                  </a:txBody>
+                  <a:tcPr anchor="t" marL="36000" marR="36000">
+                    <a:lnL w="7200">
+                      <a:solidFill>
+                        <a:srgbClr val="666666"/>
+                      </a:solidFill>
+                      <a:prstDash val="solid"/>
+                    </a:lnL>
+                    <a:lnR w="7200">
+                      <a:solidFill>
+                        <a:srgbClr val="666666"/>
+                      </a:solidFill>
+                      <a:prstDash val="solid"/>
+                    </a:lnR>
+                    <a:lnT w="7200">
+                      <a:solidFill>
+                        <a:srgbClr val="666666"/>
+                      </a:solidFill>
+                      <a:prstDash val="solid"/>
+                    </a:lnT>
+                    <a:lnB w="7200">
+                      <a:solidFill>
+                        <a:srgbClr val="666666"/>
+                      </a:solidFill>
+                      <a:prstDash val="solid"/>
+                    </a:lnB>
+                    <a:solidFill>
+                      <a:srgbClr val="cccccc"/>
+                    </a:solidFill>
+                  </a:tcPr>
+                </a:tc>
+                <a:tc>
+                  <a:txBody>
+                    <a:bodyPr lIns="36000" rIns="36000" tIns="36000" bIns="36000" anchor="t">
+                      <a:noAutofit/>
+                    </a:bodyPr>
+                    <a:p>
+                      <a:pPr algn="ctr">
+                        <a:lnSpc>
+                          <a:spcPct val="100000"/>
+                        </a:lnSpc>
+                        <a:tabLst>
+                          <a:tab algn="l" pos="0"/>
+                        </a:tabLst>
+                      </a:pPr>
+                      <a:r>
+                        <a:rPr b="0" lang="ru-RU" sz="1800" spc="-1" strike="noStrike">
+                          <a:solidFill>
+                            <a:srgbClr val="000000"/>
+                          </a:solidFill>
+                          <a:latin typeface="Times New Roman"/>
+                        </a:rPr>
+                        <a:t>[4;5]</a:t>
+                      </a:r>
+                      <a:endParaRPr b="0" lang="ru-RU" sz="1800" spc="-1" strike="noStrike">
+                        <a:solidFill>
+                          <a:srgbClr val="000000"/>
+                        </a:solidFill>
+                        <a:latin typeface="Arial"/>
+                      </a:endParaRPr>
+                    </a:p>
+                  </a:txBody>
+                  <a:tcPr anchor="t" marL="36000" marR="36000">
+                    <a:lnL w="7200">
+                      <a:solidFill>
+                        <a:srgbClr val="666666"/>
+                      </a:solidFill>
+                      <a:prstDash val="solid"/>
+                    </a:lnL>
+                    <a:lnR w="7200">
+                      <a:solidFill>
+                        <a:srgbClr val="666666"/>
+                      </a:solidFill>
+                      <a:prstDash val="solid"/>
+                    </a:lnR>
+                    <a:lnT w="7200">
+                      <a:solidFill>
+                        <a:srgbClr val="666666"/>
+                      </a:solidFill>
+                      <a:prstDash val="solid"/>
+                    </a:lnT>
+                    <a:lnB w="7200">
+                      <a:solidFill>
+                        <a:srgbClr val="666666"/>
+                      </a:solidFill>
+                      <a:prstDash val="solid"/>
+                    </a:lnB>
+                    <a:solidFill>
+                      <a:srgbClr val="cccccc"/>
+                    </a:solidFill>
+                  </a:tcPr>
+                </a:tc>
+              </a:tr>
+            </a:tbl>
+          </a:graphicData>
+        </a:graphic>
+      </p:graphicFrame>
+      <p:sp>
+        <p:nvSpPr>
+          <p:cNvPr id="31" name=""/>
+          <p:cNvSpPr txBox="1"/>
+          <p:nvPr/>
+        </p:nvSpPr>
+        <p:spPr>
+          <a:xfrm>
+            <a:off x="180000" y="6120000"/>
+            <a:ext cx="3425400" cy="427320"/>
+          </a:xfrm>
+          <a:prstGeom prst="rect">
+            <a:avLst/>
+          </a:prstGeom>
+          <a:noFill/>
+          <a:ln w="0">
+            <a:noFill/>
+          </a:ln>
+        </p:spPr>
+        <p:txBody>
+          <a:bodyPr lIns="90000" rIns="90000" tIns="45000" bIns="45000" anchor="t">
+            <a:noAutofit/>
+          </a:bodyPr>
+          <a:p>
+            <a:fld id="{C5F23D42-4E68-487A-B9A3-9556E945FC77}" type="slidenum">
+              <a:rPr b="0" lang="ru-RU" sz="2400" spc="-1" strike="noStrike">
+                <a:solidFill>
+                  <a:srgbClr val="000000"/>
+                </a:solidFill>
+                <a:latin typeface="Times New Roman"/>
+              </a:rPr>
+              <a:t>&lt;номер&gt;</a:t>
+            </a:fld>
+            <a:endParaRPr b="0" lang="ru-RU" sz="2400" spc="-1" strike="noStrike">
+              <a:solidFill>
+                <a:srgbClr val="000000"/>
+              </a:solidFill>
+              <a:latin typeface="Times New Roman"/>
+            </a:endParaRPr>
+          </a:p>
+        </p:txBody>
+      </p:sp>
+    </p:spTree>
+  </p:cSld>
+  <mc:AlternateContent>
+    <mc:Choice Requires="p14">
+      <p:transition spd="slow" p14:dur="2000"/>
+    </mc:Choice>
+    <mc:Fallback>
+      <p:transition spd="slow"/>
+    </mc:Fallback>
+  </mc:AlternateContent>
+</p:sld>
+</file>
+
+<file path=ppt/slides/slide6.xml><?xml version="1.0" encoding="utf-8"?>
+<p:sld xmlns:a="http://schemas.openxmlformats.org/drawingml/2006/main" xmlns:p="http://schemas.openxmlformats.org/presentationml/2006/main" xmlns:r="http://schemas.openxmlformats.org/officeDocument/2006/relationships" xmlns:p14="http://schemas.microsoft.com/office/powerpoint/2010/main" xmlns:p15="http://schemas.microsoft.com/office/powerpoint/2012/main" xmlns:mc="http://schemas.openxmlformats.org/markup-compatibility/2006">
+  <p:cSld>
+    <p:bg>
+      <p:bgPr>
+        <a:blipFill rotWithShape="0">
+          <a:blip r:embed="rId1"/>
+          <a:tile tx="0" ty="0" sx="100000" sy="100000" algn="ctr"/>
+        </a:blipFill>
+      </p:bgPr>
+    </p:bg>
+    <p:spTree>
+      <p:nvGrpSpPr>
+        <p:cNvPr id="1" name=""/>
+        <p:cNvGrpSpPr/>
+        <p:nvPr/>
+      </p:nvGrpSpPr>
+      <p:grpSpPr>
+        <a:xfrm>
+          <a:off x="0" y="0"/>
+          <a:ext cx="0" cy="0"/>
+          <a:chOff x="0" y="0"/>
+          <a:chExt cx="0" cy="0"/>
+        </a:xfrm>
+      </p:grpSpPr>
+      <p:sp>
+        <p:nvSpPr>
+          <p:cNvPr id="32" name="PlaceHolder 1"/>
+          <p:cNvSpPr>
+            <a:spLocks noGrp="1"/>
+          </p:cNvSpPr>
+          <p:nvPr>
+            <p:ph type="title"/>
+          </p:nvPr>
+        </p:nvSpPr>
+        <p:spPr>
+          <a:xfrm>
+            <a:off x="457200" y="273240"/>
+            <a:ext cx="8228880" cy="446400"/>
+          </a:xfrm>
+          <a:prstGeom prst="rect">
+            <a:avLst/>
+          </a:prstGeom>
+          <a:noFill/>
+          <a:ln w="0">
+            <a:noFill/>
+          </a:ln>
+        </p:spPr>
+        <p:txBody>
+          <a:bodyPr lIns="0" rIns="0" tIns="0" bIns="0" anchor="ctr">
+            <a:noAutofit/>
+          </a:bodyPr>
+          <a:p>
+            <a:pPr indent="0" algn="ctr">
+              <a:lnSpc>
+                <a:spcPct val="100000"/>
+              </a:lnSpc>
+              <a:buNone/>
+              <a:tabLst>
+                <a:tab algn="l" pos="0"/>
+              </a:tabLst>
             </a:pPr>
             <a:r>
               <a:rPr b="1" lang="ru-RU" sz="1800" spc="-1" strike="noStrike">
@@ -4894,29 +5960,29 @@
               </a:rPr>
               <a:t>Кластерный анализ правил</a:t>
             </a:r>
-            <a:endParaRPr b="1" lang="ru-RU" sz="1800" spc="-1" strike="noStrike">
+            <a:endParaRPr b="0" lang="ru-RU" sz="1800" spc="-1" strike="noStrike">
               <a:solidFill>
                 <a:srgbClr val="000000"/>
               </a:solidFill>
-              <a:latin typeface="Times New Roman"/>
+              <a:latin typeface="Arial"/>
             </a:endParaRPr>
           </a:p>
         </p:txBody>
       </p:sp>
       <p:pic>
         <p:nvPicPr>
-          <p:cNvPr id="24" name="" descr=""/>
+          <p:cNvPr id="33" name="" descr=""/>
           <p:cNvPicPr/>
           <p:nvPr/>
         </p:nvPicPr>
         <p:blipFill>
-          <a:blip r:embed="rId1"/>
+          <a:blip r:embed="rId2"/>
           <a:stretch/>
         </p:blipFill>
         <p:spPr>
           <a:xfrm>
             <a:off x="485280" y="813240"/>
-            <a:ext cx="8154720" cy="5666760"/>
+            <a:ext cx="8154360" cy="5666400"/>
           </a:xfrm>
           <a:prstGeom prst="rect">
             <a:avLst/>
@@ -4926,6 +5992,48 @@
           </a:ln>
         </p:spPr>
       </p:pic>
+      <p:sp>
+        <p:nvSpPr>
+          <p:cNvPr id="34" name=""/>
+          <p:cNvSpPr txBox="1"/>
+          <p:nvPr/>
+        </p:nvSpPr>
+        <p:spPr>
+          <a:xfrm>
+            <a:off x="180000" y="6430680"/>
+            <a:ext cx="3425400" cy="427320"/>
+          </a:xfrm>
+          <a:prstGeom prst="rect">
+            <a:avLst/>
+          </a:prstGeom>
+          <a:noFill/>
+          <a:ln w="0">
+            <a:noFill/>
+          </a:ln>
+        </p:spPr>
+        <p:txBody>
+          <a:bodyPr lIns="90000" rIns="90000" tIns="45000" bIns="45000" anchor="t">
+            <a:noAutofit/>
+          </a:bodyPr>
+          <a:p>
+            <a:fld id="{3A9C31EE-FE2F-4BBD-B32B-A5AFBF22E1EF}" type="slidenum">
+              <a:rPr b="0" lang="ru-RU" sz="2400" spc="-1" strike="noStrike">
+                <a:solidFill>
+                  <a:srgbClr val="000000"/>
+                </a:solidFill>
+                <a:latin typeface="Times New Roman"/>
+              </a:rPr>
+              <a:t>&lt;номер&gt;</a:t>
+            </a:fld>
+            <a:endParaRPr b="0" lang="ru-RU" sz="2400" spc="-1" strike="noStrike">
+              <a:solidFill>
+                <a:srgbClr val="000000"/>
+              </a:solidFill>
+              <a:latin typeface="Times New Roman"/>
+            </a:endParaRPr>
+          </a:p>
+        </p:txBody>
+      </p:sp>
     </p:spTree>
   </p:cSld>
   <mc:AlternateContent>
@@ -4942,6 +6050,14 @@
 <file path=ppt/slides/slide7.xml><?xml version="1.0" encoding="utf-8"?>
 <p:sld xmlns:a="http://schemas.openxmlformats.org/drawingml/2006/main" xmlns:p="http://schemas.openxmlformats.org/presentationml/2006/main" xmlns:r="http://schemas.openxmlformats.org/officeDocument/2006/relationships" xmlns:p14="http://schemas.microsoft.com/office/powerpoint/2010/main" xmlns:p15="http://schemas.microsoft.com/office/powerpoint/2012/main" xmlns:mc="http://schemas.openxmlformats.org/markup-compatibility/2006">
   <p:cSld>
+    <p:bg>
+      <p:bgPr>
+        <a:blipFill rotWithShape="0">
+          <a:blip r:embed="rId1"/>
+          <a:tile tx="0" ty="0" sx="100000" sy="100000" algn="ctr"/>
+        </a:blipFill>
+      </p:bgPr>
+    </p:bg>
     <p:spTree>
       <p:nvGrpSpPr>
         <p:cNvPr id="1" name=""/>
@@ -4958,7 +6074,7 @@
       </p:grpSpPr>
       <p:sp>
         <p:nvSpPr>
-          <p:cNvPr id="25" name="PlaceHolder 1"/>
+          <p:cNvPr id="35" name="PlaceHolder 1"/>
           <p:cNvSpPr>
             <a:spLocks noGrp="1"/>
           </p:cNvSpPr>
@@ -4969,7 +6085,7 @@
         <p:spPr>
           <a:xfrm>
             <a:off x="457200" y="273240"/>
-            <a:ext cx="8229240" cy="446760"/>
+            <a:ext cx="8228880" cy="446400"/>
           </a:xfrm>
           <a:prstGeom prst="rect">
             <a:avLst/>
@@ -4985,7 +6101,13 @@
           </a:bodyPr>
           <a:p>
             <a:pPr indent="0" algn="ctr">
+              <a:lnSpc>
+                <a:spcPct val="100000"/>
+              </a:lnSpc>
               <a:buNone/>
+              <a:tabLst>
+                <a:tab algn="l" pos="0"/>
+              </a:tabLst>
             </a:pPr>
             <a:r>
               <a:rPr b="0" lang="ru-RU" sz="1500" spc="-1" strike="noStrike">
@@ -5000,20 +6122,20 @@
               <a:solidFill>
                 <a:srgbClr val="000000"/>
               </a:solidFill>
-              <a:latin typeface="Times New Roman"/>
+              <a:latin typeface="Arial"/>
             </a:endParaRPr>
           </a:p>
         </p:txBody>
       </p:sp>
       <p:graphicFrame>
         <p:nvGraphicFramePr>
-          <p:cNvPr id="26" name=""/>
+          <p:cNvPr id="36" name=""/>
           <p:cNvGraphicFramePr/>
           <p:nvPr/>
         </p:nvGraphicFramePr>
         <p:xfrm>
           <a:off x="957600" y="680040"/>
-          <a:ext cx="7742880" cy="4805640"/>
+          <a:ext cx="7742880" cy="5761800"/>
         </p:xfrm>
         <a:graphic>
           <a:graphicData uri="http://schemas.openxmlformats.org/drawingml/2006/table">
@@ -5036,7 +6158,11 @@
                       <a:noAutofit/>
                     </a:bodyPr>
                     <a:p>
-                      <a:pPr algn="ctr"/>
+                      <a:pPr algn="ctr">
+                        <a:lnSpc>
+                          <a:spcPct val="100000"/>
+                        </a:lnSpc>
+                      </a:pPr>
                       <a:r>
                         <a:rPr b="1" lang="ru-RU" sz="1800" spc="-1" strike="noStrike">
                           <a:solidFill>
@@ -5046,9 +6172,9 @@
                         </a:rPr>
                         <a:t>Группа</a:t>
                       </a:r>
-                      <a:endParaRPr b="1" lang="ru-RU" sz="1800" spc="-1" strike="noStrike">
+                      <a:endParaRPr b="0" lang="ru-RU" sz="1800" spc="-1" strike="noStrike">
                         <a:solidFill>
-                          <a:srgbClr val="000000"/>
+                          <a:srgbClr val="ffffff"/>
                         </a:solidFill>
                         <a:latin typeface="Arial"/>
                       </a:endParaRPr>
@@ -5057,29 +6183,31 @@
                   <a:tcPr anchor="t" marL="36000" marR="36000">
                     <a:lnL w="7200">
                       <a:solidFill>
-                        <a:srgbClr val="000000"/>
+                        <a:srgbClr val="666666"/>
                       </a:solidFill>
                       <a:prstDash val="solid"/>
                     </a:lnL>
                     <a:lnR w="7200">
                       <a:solidFill>
-                        <a:srgbClr val="000000"/>
+                        <a:srgbClr val="666666"/>
                       </a:solidFill>
                       <a:prstDash val="solid"/>
                     </a:lnR>
                     <a:lnT w="7200">
                       <a:solidFill>
-                        <a:srgbClr val="000000"/>
+                        <a:srgbClr val="666666"/>
                       </a:solidFill>
                       <a:prstDash val="solid"/>
                     </a:lnT>
                     <a:lnB w="7200">
                       <a:solidFill>
-                        <a:srgbClr val="000000"/>
+                        <a:srgbClr val="666666"/>
                       </a:solidFill>
                       <a:prstDash val="solid"/>
                     </a:lnB>
-                    <a:noFill/>
+                    <a:solidFill>
+                      <a:srgbClr val="5983b0"/>
+                    </a:solidFill>
                   </a:tcPr>
                 </a:tc>
                 <a:tc>
@@ -5088,7 +6216,11 @@
                       <a:noAutofit/>
                     </a:bodyPr>
                     <a:p>
-                      <a:pPr algn="ctr"/>
+                      <a:pPr algn="ctr">
+                        <a:lnSpc>
+                          <a:spcPct val="100000"/>
+                        </a:lnSpc>
+                      </a:pPr>
                       <a:r>
                         <a:rPr b="1" lang="ru-RU" sz="1800" spc="-1" strike="noStrike">
                           <a:solidFill>
@@ -5098,9 +6230,9 @@
                         </a:rPr>
                         <a:t>Строка</a:t>
                       </a:r>
-                      <a:endParaRPr b="1" lang="ru-RU" sz="1800" spc="-1" strike="noStrike">
+                      <a:endParaRPr b="0" lang="ru-RU" sz="1800" spc="-1" strike="noStrike">
                         <a:solidFill>
-                          <a:srgbClr val="000000"/>
+                          <a:srgbClr val="ffffff"/>
                         </a:solidFill>
                         <a:latin typeface="Arial"/>
                       </a:endParaRPr>
@@ -5109,29 +6241,31 @@
                   <a:tcPr anchor="t" marL="36000" marR="36000">
                     <a:lnL w="7200">
                       <a:solidFill>
-                        <a:srgbClr val="000000"/>
+                        <a:srgbClr val="666666"/>
                       </a:solidFill>
                       <a:prstDash val="solid"/>
                     </a:lnL>
                     <a:lnR w="7200">
                       <a:solidFill>
-                        <a:srgbClr val="000000"/>
+                        <a:srgbClr val="666666"/>
                       </a:solidFill>
                       <a:prstDash val="solid"/>
                     </a:lnR>
                     <a:lnT w="7200">
                       <a:solidFill>
-                        <a:srgbClr val="000000"/>
+                        <a:srgbClr val="666666"/>
                       </a:solidFill>
                       <a:prstDash val="solid"/>
                     </a:lnT>
                     <a:lnB w="7200">
                       <a:solidFill>
-                        <a:srgbClr val="000000"/>
+                        <a:srgbClr val="666666"/>
                       </a:solidFill>
                       <a:prstDash val="solid"/>
                     </a:lnB>
-                    <a:noFill/>
+                    <a:solidFill>
+                      <a:srgbClr val="5983b0"/>
+                    </a:solidFill>
                   </a:tcPr>
                 </a:tc>
                 <a:tc>
@@ -5140,7 +6274,11 @@
                       <a:noAutofit/>
                     </a:bodyPr>
                     <a:p>
-                      <a:pPr algn="ctr"/>
+                      <a:pPr algn="ctr">
+                        <a:lnSpc>
+                          <a:spcPct val="100000"/>
+                        </a:lnSpc>
+                      </a:pPr>
                       <a:r>
                         <a:rPr b="1" lang="ru-RU" sz="1800" spc="-1" strike="noStrike">
                           <a:solidFill>
@@ -5150,9 +6288,9 @@
                         </a:rPr>
                         <a:t>Запись</a:t>
                       </a:r>
-                      <a:endParaRPr b="1" lang="ru-RU" sz="1800" spc="-1" strike="noStrike">
+                      <a:endParaRPr b="0" lang="ru-RU" sz="1800" spc="-1" strike="noStrike">
                         <a:solidFill>
-                          <a:srgbClr val="000000"/>
+                          <a:srgbClr val="ffffff"/>
                         </a:solidFill>
                         <a:latin typeface="Arial"/>
                       </a:endParaRPr>
@@ -5161,29 +6299,31 @@
                   <a:tcPr anchor="t" marL="36000" marR="36000">
                     <a:lnL w="7200">
                       <a:solidFill>
-                        <a:srgbClr val="000000"/>
+                        <a:srgbClr val="666666"/>
                       </a:solidFill>
                       <a:prstDash val="solid"/>
                     </a:lnL>
                     <a:lnR w="7200">
                       <a:solidFill>
-                        <a:srgbClr val="000000"/>
+                        <a:srgbClr val="666666"/>
                       </a:solidFill>
                       <a:prstDash val="solid"/>
                     </a:lnR>
                     <a:lnT w="7200">
                       <a:solidFill>
-                        <a:srgbClr val="000000"/>
+                        <a:srgbClr val="666666"/>
                       </a:solidFill>
                       <a:prstDash val="solid"/>
                     </a:lnT>
                     <a:lnB w="7200">
                       <a:solidFill>
-                        <a:srgbClr val="000000"/>
+                        <a:srgbClr val="666666"/>
                       </a:solidFill>
                       <a:prstDash val="solid"/>
                     </a:lnB>
-                    <a:noFill/>
+                    <a:solidFill>
+                      <a:srgbClr val="5983b0"/>
+                    </a:solidFill>
                   </a:tcPr>
                 </a:tc>
                 <a:tc>
@@ -5192,7 +6332,11 @@
                       <a:noAutofit/>
                     </a:bodyPr>
                     <a:p>
-                      <a:pPr algn="ctr"/>
+                      <a:pPr algn="ctr">
+                        <a:lnSpc>
+                          <a:spcPct val="100000"/>
+                        </a:lnSpc>
+                      </a:pPr>
                       <a:r>
                         <a:rPr b="1" lang="ru-RU" sz="1800" spc="-1" strike="noStrike">
                           <a:solidFill>
@@ -5202,9 +6346,9 @@
                         </a:rPr>
                         <a:t>Юрлицо</a:t>
                       </a:r>
-                      <a:endParaRPr b="1" lang="ru-RU" sz="1800" spc="-1" strike="noStrike">
+                      <a:endParaRPr b="0" lang="ru-RU" sz="1800" spc="-1" strike="noStrike">
                         <a:solidFill>
-                          <a:srgbClr val="000000"/>
+                          <a:srgbClr val="ffffff"/>
                         </a:solidFill>
                         <a:latin typeface="Arial"/>
                       </a:endParaRPr>
@@ -5213,29 +6357,31 @@
                   <a:tcPr anchor="t" marL="36000" marR="36000">
                     <a:lnL w="7200">
                       <a:solidFill>
-                        <a:srgbClr val="000000"/>
+                        <a:srgbClr val="666666"/>
                       </a:solidFill>
                       <a:prstDash val="solid"/>
                     </a:lnL>
                     <a:lnR w="7200">
                       <a:solidFill>
-                        <a:srgbClr val="000000"/>
+                        <a:srgbClr val="666666"/>
                       </a:solidFill>
                       <a:prstDash val="solid"/>
                     </a:lnR>
                     <a:lnT w="7200">
                       <a:solidFill>
-                        <a:srgbClr val="000000"/>
+                        <a:srgbClr val="666666"/>
                       </a:solidFill>
                       <a:prstDash val="solid"/>
                     </a:lnT>
                     <a:lnB w="7200">
                       <a:solidFill>
-                        <a:srgbClr val="000000"/>
+                        <a:srgbClr val="666666"/>
                       </a:solidFill>
                       <a:prstDash val="solid"/>
                     </a:lnB>
-                    <a:noFill/>
+                    <a:solidFill>
+                      <a:srgbClr val="5983b0"/>
+                    </a:solidFill>
                   </a:tcPr>
                 </a:tc>
                 <a:tc>
@@ -5244,7 +6390,11 @@
                       <a:noAutofit/>
                     </a:bodyPr>
                     <a:p>
-                      <a:pPr algn="ctr"/>
+                      <a:pPr algn="ctr">
+                        <a:lnSpc>
+                          <a:spcPct val="100000"/>
+                        </a:lnSpc>
+                      </a:pPr>
                       <a:r>
                         <a:rPr b="1" lang="ru-RU" sz="1800" spc="-1" strike="noStrike">
                           <a:solidFill>
@@ -5254,9 +6404,9 @@
                         </a:rPr>
                         <a:t>ИНН</a:t>
                       </a:r>
-                      <a:endParaRPr b="1" lang="ru-RU" sz="1800" spc="-1" strike="noStrike">
+                      <a:endParaRPr b="0" lang="ru-RU" sz="1800" spc="-1" strike="noStrike">
                         <a:solidFill>
-                          <a:srgbClr val="000000"/>
+                          <a:srgbClr val="ffffff"/>
                         </a:solidFill>
                         <a:latin typeface="Arial"/>
                       </a:endParaRPr>
@@ -5265,29 +6415,31 @@
                   <a:tcPr anchor="t" marL="36000" marR="36000">
                     <a:lnL w="7200">
                       <a:solidFill>
-                        <a:srgbClr val="000000"/>
+                        <a:srgbClr val="666666"/>
                       </a:solidFill>
                       <a:prstDash val="solid"/>
                     </a:lnL>
                     <a:lnR w="7200">
                       <a:solidFill>
-                        <a:srgbClr val="000000"/>
+                        <a:srgbClr val="666666"/>
                       </a:solidFill>
                       <a:prstDash val="solid"/>
                     </a:lnR>
                     <a:lnT w="7200">
                       <a:solidFill>
-                        <a:srgbClr val="000000"/>
+                        <a:srgbClr val="666666"/>
                       </a:solidFill>
                       <a:prstDash val="solid"/>
                     </a:lnT>
                     <a:lnB w="7200">
                       <a:solidFill>
-                        <a:srgbClr val="000000"/>
+                        <a:srgbClr val="666666"/>
                       </a:solidFill>
                       <a:prstDash val="solid"/>
                     </a:lnB>
-                    <a:noFill/>
+                    <a:solidFill>
+                      <a:srgbClr val="5983b0"/>
+                    </a:solidFill>
                   </a:tcPr>
                 </a:tc>
                 <a:tc>
@@ -5296,7 +6448,11 @@
                       <a:noAutofit/>
                     </a:bodyPr>
                     <a:p>
-                      <a:pPr algn="ctr"/>
+                      <a:pPr algn="ctr">
+                        <a:lnSpc>
+                          <a:spcPct val="100000"/>
+                        </a:lnSpc>
+                      </a:pPr>
                       <a:r>
                         <a:rPr b="1" lang="ru-RU" sz="1800" spc="-1" strike="noStrike">
                           <a:solidFill>
@@ -5306,9 +6462,9 @@
                         </a:rPr>
                         <a:t>Эффективность, %</a:t>
                       </a:r>
-                      <a:endParaRPr b="1" lang="ru-RU" sz="1800" spc="-1" strike="noStrike">
+                      <a:endParaRPr b="0" lang="ru-RU" sz="1800" spc="-1" strike="noStrike">
                         <a:solidFill>
-                          <a:srgbClr val="000000"/>
+                          <a:srgbClr val="ffffff"/>
                         </a:solidFill>
                         <a:latin typeface="Arial"/>
                       </a:endParaRPr>
@@ -5317,29 +6473,31 @@
                   <a:tcPr anchor="t" marL="36000" marR="36000">
                     <a:lnL w="7200">
                       <a:solidFill>
-                        <a:srgbClr val="000000"/>
+                        <a:srgbClr val="666666"/>
                       </a:solidFill>
                       <a:prstDash val="solid"/>
                     </a:lnL>
                     <a:lnR w="7200">
                       <a:solidFill>
-                        <a:srgbClr val="000000"/>
+                        <a:srgbClr val="666666"/>
                       </a:solidFill>
                       <a:prstDash val="solid"/>
                     </a:lnR>
                     <a:lnT w="7200">
                       <a:solidFill>
-                        <a:srgbClr val="000000"/>
+                        <a:srgbClr val="666666"/>
                       </a:solidFill>
                       <a:prstDash val="solid"/>
                     </a:lnT>
                     <a:lnB w="7200">
                       <a:solidFill>
-                        <a:srgbClr val="000000"/>
+                        <a:srgbClr val="666666"/>
                       </a:solidFill>
                       <a:prstDash val="solid"/>
                     </a:lnB>
-                    <a:noFill/>
+                    <a:solidFill>
+                      <a:srgbClr val="5983b0"/>
+                    </a:solidFill>
                   </a:tcPr>
                 </a:tc>
                 <a:tc>
@@ -5348,7 +6506,11 @@
                       <a:noAutofit/>
                     </a:bodyPr>
                     <a:p>
-                      <a:pPr algn="ctr"/>
+                      <a:pPr algn="ctr">
+                        <a:lnSpc>
+                          <a:spcPct val="100000"/>
+                        </a:lnSpc>
+                      </a:pPr>
                       <a:r>
                         <a:rPr b="1" lang="ru-RU" sz="1800" spc="-1" strike="noStrike">
                           <a:solidFill>
@@ -5358,9 +6520,9 @@
                         </a:rPr>
                         <a:t>Сумма чистой прибыли</a:t>
                       </a:r>
-                      <a:endParaRPr b="1" lang="ru-RU" sz="1800" spc="-1" strike="noStrike">
+                      <a:endParaRPr b="0" lang="ru-RU" sz="1800" spc="-1" strike="noStrike">
                         <a:solidFill>
-                          <a:srgbClr val="000000"/>
+                          <a:srgbClr val="ffffff"/>
                         </a:solidFill>
                         <a:latin typeface="Arial"/>
                       </a:endParaRPr>
@@ -5369,29 +6531,31 @@
                   <a:tcPr anchor="t" marL="36000" marR="36000">
                     <a:lnL w="7200">
                       <a:solidFill>
-                        <a:srgbClr val="000000"/>
+                        <a:srgbClr val="666666"/>
                       </a:solidFill>
                       <a:prstDash val="solid"/>
                     </a:lnL>
                     <a:lnR w="7200">
                       <a:solidFill>
-                        <a:srgbClr val="000000"/>
+                        <a:srgbClr val="666666"/>
                       </a:solidFill>
                       <a:prstDash val="solid"/>
                     </a:lnR>
                     <a:lnT w="7200">
                       <a:solidFill>
-                        <a:srgbClr val="000000"/>
+                        <a:srgbClr val="666666"/>
                       </a:solidFill>
                       <a:prstDash val="solid"/>
                     </a:lnT>
                     <a:lnB w="7200">
                       <a:solidFill>
-                        <a:srgbClr val="000000"/>
+                        <a:srgbClr val="666666"/>
                       </a:solidFill>
                       <a:prstDash val="solid"/>
                     </a:lnB>
-                    <a:noFill/>
+                    <a:solidFill>
+                      <a:srgbClr val="5983b0"/>
+                    </a:solidFill>
                   </a:tcPr>
                 </a:tc>
                 <a:tc>
@@ -5400,7 +6564,11 @@
                       <a:noAutofit/>
                     </a:bodyPr>
                     <a:p>
-                      <a:pPr algn="ctr"/>
+                      <a:pPr algn="ctr">
+                        <a:lnSpc>
+                          <a:spcPct val="100000"/>
+                        </a:lnSpc>
+                      </a:pPr>
                       <a:r>
                         <a:rPr b="1" lang="ru-RU" sz="1800" spc="-1" strike="noStrike">
                           <a:solidFill>
@@ -5410,9 +6578,9 @@
                         </a:rPr>
                         <a:t>Сумма чистого убытка</a:t>
                       </a:r>
-                      <a:endParaRPr b="1" lang="ru-RU" sz="1800" spc="-1" strike="noStrike">
+                      <a:endParaRPr b="0" lang="ru-RU" sz="1800" spc="-1" strike="noStrike">
                         <a:solidFill>
-                          <a:srgbClr val="000000"/>
+                          <a:srgbClr val="ffffff"/>
                         </a:solidFill>
                         <a:latin typeface="Arial"/>
                       </a:endParaRPr>
@@ -5421,29 +6589,31 @@
                   <a:tcPr anchor="t" marL="36000" marR="36000">
                     <a:lnL w="7200">
                       <a:solidFill>
-                        <a:srgbClr val="000000"/>
+                        <a:srgbClr val="666666"/>
                       </a:solidFill>
                       <a:prstDash val="solid"/>
                     </a:lnL>
                     <a:lnR w="7200">
                       <a:solidFill>
-                        <a:srgbClr val="000000"/>
+                        <a:srgbClr val="666666"/>
                       </a:solidFill>
                       <a:prstDash val="solid"/>
                     </a:lnR>
                     <a:lnT w="7200">
                       <a:solidFill>
-                        <a:srgbClr val="000000"/>
+                        <a:srgbClr val="666666"/>
                       </a:solidFill>
                       <a:prstDash val="solid"/>
                     </a:lnT>
                     <a:lnB w="7200">
                       <a:solidFill>
-                        <a:srgbClr val="000000"/>
+                        <a:srgbClr val="666666"/>
                       </a:solidFill>
                       <a:prstDash val="solid"/>
                     </a:lnB>
-                    <a:noFill/>
+                    <a:solidFill>
+                      <a:srgbClr val="5983b0"/>
+                    </a:solidFill>
                   </a:tcPr>
                 </a:tc>
               </a:tr>
@@ -5454,6 +6624,11 @@
                       <a:noAutofit/>
                     </a:bodyPr>
                     <a:p>
+                      <a:pPr>
+                        <a:lnSpc>
+                          <a:spcPct val="100000"/>
+                        </a:lnSpc>
+                      </a:pPr>
                       <a:r>
                         <a:rPr b="0" lang="ru-RU" sz="1800" spc="-1" strike="noStrike">
                           <a:solidFill>
@@ -5474,29 +6649,31 @@
                   <a:tcPr anchor="t" marL="36000" marR="36000">
                     <a:lnL w="7200">
                       <a:solidFill>
-                        <a:srgbClr val="000000"/>
+                        <a:srgbClr val="666666"/>
                       </a:solidFill>
                       <a:prstDash val="solid"/>
                     </a:lnL>
                     <a:lnR w="7200">
                       <a:solidFill>
-                        <a:srgbClr val="000000"/>
+                        <a:srgbClr val="666666"/>
                       </a:solidFill>
                       <a:prstDash val="solid"/>
                     </a:lnR>
                     <a:lnT w="7200">
                       <a:solidFill>
-                        <a:srgbClr val="000000"/>
+                        <a:srgbClr val="666666"/>
                       </a:solidFill>
                       <a:prstDash val="solid"/>
                     </a:lnT>
                     <a:lnB w="7200">
                       <a:solidFill>
-                        <a:srgbClr val="000000"/>
+                        <a:srgbClr val="666666"/>
                       </a:solidFill>
                       <a:prstDash val="solid"/>
                     </a:lnB>
-                    <a:noFill/>
+                    <a:solidFill>
+                      <a:srgbClr val="cccccc"/>
+                    </a:solidFill>
                   </a:tcPr>
                 </a:tc>
                 <a:tc>
@@ -5505,7 +6682,11 @@
                       <a:noAutofit/>
                     </a:bodyPr>
                     <a:p>
-                      <a:pPr algn="r"/>
+                      <a:pPr algn="r">
+                        <a:lnSpc>
+                          <a:spcPct val="100000"/>
+                        </a:lnSpc>
+                      </a:pPr>
                       <a:r>
                         <a:rPr b="0" lang="ru-RU" sz="1800" spc="-1" strike="noStrike">
                           <a:solidFill>
@@ -5526,29 +6707,31 @@
                   <a:tcPr anchor="t" marL="36000" marR="36000">
                     <a:lnL w="7200">
                       <a:solidFill>
-                        <a:srgbClr val="000000"/>
+                        <a:srgbClr val="666666"/>
                       </a:solidFill>
                       <a:prstDash val="solid"/>
                     </a:lnL>
                     <a:lnR w="7200">
                       <a:solidFill>
-                        <a:srgbClr val="000000"/>
+                        <a:srgbClr val="666666"/>
                       </a:solidFill>
                       <a:prstDash val="solid"/>
                     </a:lnR>
                     <a:lnT w="7200">
                       <a:solidFill>
-                        <a:srgbClr val="000000"/>
+                        <a:srgbClr val="666666"/>
                       </a:solidFill>
                       <a:prstDash val="solid"/>
                     </a:lnT>
                     <a:lnB w="7200">
                       <a:solidFill>
-                        <a:srgbClr val="000000"/>
+                        <a:srgbClr val="666666"/>
                       </a:solidFill>
                       <a:prstDash val="solid"/>
                     </a:lnB>
-                    <a:noFill/>
+                    <a:solidFill>
+                      <a:srgbClr val="cccccc"/>
+                    </a:solidFill>
                   </a:tcPr>
                 </a:tc>
                 <a:tc>
@@ -5557,6 +6740,11 @@
                       <a:noAutofit/>
                     </a:bodyPr>
                     <a:p>
+                      <a:pPr>
+                        <a:lnSpc>
+                          <a:spcPct val="100000"/>
+                        </a:lnSpc>
+                      </a:pPr>
                       <a:r>
                         <a:rPr b="0" lang="ru-RU" sz="1800" spc="-1" strike="noStrike">
                           <a:solidFill>
@@ -5577,29 +6765,31 @@
                   <a:tcPr anchor="t" marL="36000" marR="36000">
                     <a:lnL w="7200">
                       <a:solidFill>
-                        <a:srgbClr val="000000"/>
+                        <a:srgbClr val="666666"/>
                       </a:solidFill>
                       <a:prstDash val="solid"/>
                     </a:lnL>
                     <a:lnR w="7200">
                       <a:solidFill>
-                        <a:srgbClr val="000000"/>
+                        <a:srgbClr val="666666"/>
                       </a:solidFill>
                       <a:prstDash val="solid"/>
                     </a:lnR>
                     <a:lnT w="7200">
                       <a:solidFill>
-                        <a:srgbClr val="000000"/>
+                        <a:srgbClr val="666666"/>
                       </a:solidFill>
                       <a:prstDash val="solid"/>
                     </a:lnT>
                     <a:lnB w="7200">
                       <a:solidFill>
-                        <a:srgbClr val="000000"/>
+                        <a:srgbClr val="666666"/>
                       </a:solidFill>
                       <a:prstDash val="solid"/>
                     </a:lnB>
-                    <a:noFill/>
+                    <a:solidFill>
+                      <a:srgbClr val="cccccc"/>
+                    </a:solidFill>
                   </a:tcPr>
                 </a:tc>
                 <a:tc>
@@ -5608,6 +6798,11 @@
                       <a:noAutofit/>
                     </a:bodyPr>
                     <a:p>
+                      <a:pPr>
+                        <a:lnSpc>
+                          <a:spcPct val="100000"/>
+                        </a:lnSpc>
+                      </a:pPr>
                       <a:r>
                         <a:rPr b="0" lang="ru-RU" sz="1800" spc="-1" strike="noStrike">
                           <a:solidFill>
@@ -5628,29 +6823,31 @@
                   <a:tcPr anchor="t" marL="36000" marR="36000">
                     <a:lnL w="7200">
                       <a:solidFill>
-                        <a:srgbClr val="000000"/>
+                        <a:srgbClr val="666666"/>
                       </a:solidFill>
                       <a:prstDash val="solid"/>
                     </a:lnL>
                     <a:lnR w="7200">
                       <a:solidFill>
-                        <a:srgbClr val="000000"/>
+                        <a:srgbClr val="666666"/>
                       </a:solidFill>
                       <a:prstDash val="solid"/>
                     </a:lnR>
                     <a:lnT w="7200">
                       <a:solidFill>
-                        <a:srgbClr val="000000"/>
+                        <a:srgbClr val="666666"/>
                       </a:solidFill>
                       <a:prstDash val="solid"/>
                     </a:lnT>
                     <a:lnB w="7200">
                       <a:solidFill>
-                        <a:srgbClr val="000000"/>
+                        <a:srgbClr val="666666"/>
                       </a:solidFill>
                       <a:prstDash val="solid"/>
                     </a:lnB>
-                    <a:noFill/>
+                    <a:solidFill>
+                      <a:srgbClr val="cccccc"/>
+                    </a:solidFill>
                   </a:tcPr>
                 </a:tc>
                 <a:tc>
@@ -5659,6 +6856,11 @@
                       <a:noAutofit/>
                     </a:bodyPr>
                     <a:p>
+                      <a:pPr>
+                        <a:lnSpc>
+                          <a:spcPct val="100000"/>
+                        </a:lnSpc>
+                      </a:pPr>
                       <a:r>
                         <a:rPr b="0" lang="ru-RU" sz="1800" spc="-1" strike="noStrike">
                           <a:solidFill>
@@ -5679,29 +6881,31 @@
                   <a:tcPr anchor="t" marL="36000" marR="36000">
                     <a:lnL w="7200">
                       <a:solidFill>
-                        <a:srgbClr val="000000"/>
+                        <a:srgbClr val="666666"/>
                       </a:solidFill>
                       <a:prstDash val="solid"/>
                     </a:lnL>
                     <a:lnR w="7200">
                       <a:solidFill>
-                        <a:srgbClr val="000000"/>
+                        <a:srgbClr val="666666"/>
                       </a:solidFill>
                       <a:prstDash val="solid"/>
                     </a:lnR>
                     <a:lnT w="7200">
                       <a:solidFill>
-                        <a:srgbClr val="000000"/>
+                        <a:srgbClr val="666666"/>
                       </a:solidFill>
                       <a:prstDash val="solid"/>
                     </a:lnT>
                     <a:lnB w="7200">
                       <a:solidFill>
-                        <a:srgbClr val="000000"/>
+                        <a:srgbClr val="666666"/>
                       </a:solidFill>
                       <a:prstDash val="solid"/>
                     </a:lnB>
-                    <a:noFill/>
+                    <a:solidFill>
+                      <a:srgbClr val="cccccc"/>
+                    </a:solidFill>
                   </a:tcPr>
                 </a:tc>
                 <a:tc>
@@ -5710,7 +6914,11 @@
                       <a:noAutofit/>
                     </a:bodyPr>
                     <a:p>
-                      <a:pPr algn="r"/>
+                      <a:pPr algn="r">
+                        <a:lnSpc>
+                          <a:spcPct val="100000"/>
+                        </a:lnSpc>
+                      </a:pPr>
                       <a:r>
                         <a:rPr b="0" lang="ru-RU" sz="1800" spc="-1" strike="noStrike">
                           <a:solidFill>
@@ -5731,29 +6939,31 @@
                   <a:tcPr anchor="t" marL="36000" marR="36000">
                     <a:lnL w="7200">
                       <a:solidFill>
-                        <a:srgbClr val="000000"/>
+                        <a:srgbClr val="666666"/>
                       </a:solidFill>
                       <a:prstDash val="solid"/>
                     </a:lnL>
                     <a:lnR w="7200">
                       <a:solidFill>
-                        <a:srgbClr val="000000"/>
+                        <a:srgbClr val="666666"/>
                       </a:solidFill>
                       <a:prstDash val="solid"/>
                     </a:lnR>
                     <a:lnT w="7200">
                       <a:solidFill>
-                        <a:srgbClr val="000000"/>
+                        <a:srgbClr val="666666"/>
                       </a:solidFill>
                       <a:prstDash val="solid"/>
                     </a:lnT>
                     <a:lnB w="7200">
                       <a:solidFill>
-                        <a:srgbClr val="000000"/>
+                        <a:srgbClr val="666666"/>
                       </a:solidFill>
                       <a:prstDash val="solid"/>
                     </a:lnB>
-                    <a:noFill/>
+                    <a:solidFill>
+                      <a:srgbClr val="cccccc"/>
+                    </a:solidFill>
                   </a:tcPr>
                 </a:tc>
                 <a:tc>
@@ -5762,7 +6972,11 @@
                       <a:noAutofit/>
                     </a:bodyPr>
                     <a:p>
-                      <a:pPr algn="r"/>
+                      <a:pPr algn="r">
+                        <a:lnSpc>
+                          <a:spcPct val="100000"/>
+                        </a:lnSpc>
+                      </a:pPr>
                       <a:r>
                         <a:rPr b="0" lang="ru-RU" sz="1800" spc="-1" strike="noStrike">
                           <a:solidFill>
@@ -5783,29 +6997,31 @@
                   <a:tcPr anchor="t" marL="36000" marR="36000">
                     <a:lnL w="7200">
                       <a:solidFill>
-                        <a:srgbClr val="000000"/>
+                        <a:srgbClr val="666666"/>
                       </a:solidFill>
                       <a:prstDash val="solid"/>
                     </a:lnL>
                     <a:lnR w="7200">
                       <a:solidFill>
-                        <a:srgbClr val="000000"/>
+                        <a:srgbClr val="666666"/>
                       </a:solidFill>
                       <a:prstDash val="solid"/>
                     </a:lnR>
                     <a:lnT w="7200">
                       <a:solidFill>
-                        <a:srgbClr val="000000"/>
+                        <a:srgbClr val="666666"/>
                       </a:solidFill>
                       <a:prstDash val="solid"/>
                     </a:lnT>
                     <a:lnB w="7200">
                       <a:solidFill>
-                        <a:srgbClr val="000000"/>
+                        <a:srgbClr val="666666"/>
                       </a:solidFill>
                       <a:prstDash val="solid"/>
                     </a:lnB>
-                    <a:noFill/>
+                    <a:solidFill>
+                      <a:srgbClr val="cccccc"/>
+                    </a:solidFill>
                   </a:tcPr>
                 </a:tc>
                 <a:tc>
@@ -5814,7 +7030,11 @@
                       <a:noAutofit/>
                     </a:bodyPr>
                     <a:p>
-                      <a:pPr algn="r"/>
+                      <a:pPr algn="r">
+                        <a:lnSpc>
+                          <a:spcPct val="100000"/>
+                        </a:lnSpc>
+                      </a:pPr>
                       <a:r>
                         <a:rPr b="0" lang="ru-RU" sz="1800" spc="-1" strike="noStrike">
                           <a:solidFill>
@@ -5835,29 +7055,31 @@
                   <a:tcPr anchor="t" marL="36000" marR="36000">
                     <a:lnL w="7200">
                       <a:solidFill>
-                        <a:srgbClr val="000000"/>
+                        <a:srgbClr val="666666"/>
                       </a:solidFill>
                       <a:prstDash val="solid"/>
                     </a:lnL>
                     <a:lnR w="7200">
                       <a:solidFill>
-                        <a:srgbClr val="000000"/>
+                        <a:srgbClr val="666666"/>
                       </a:solidFill>
                       <a:prstDash val="solid"/>
                     </a:lnR>
                     <a:lnT w="7200">
                       <a:solidFill>
-                        <a:srgbClr val="000000"/>
+                        <a:srgbClr val="666666"/>
                       </a:solidFill>
                       <a:prstDash val="solid"/>
                     </a:lnT>
                     <a:lnB w="7200">
                       <a:solidFill>
-                        <a:srgbClr val="000000"/>
+                        <a:srgbClr val="666666"/>
                       </a:solidFill>
                       <a:prstDash val="solid"/>
                     </a:lnB>
-                    <a:noFill/>
+                    <a:solidFill>
+                      <a:srgbClr val="cccccc"/>
+                    </a:solidFill>
                   </a:tcPr>
                 </a:tc>
               </a:tr>
@@ -5868,6 +7090,11 @@
                       <a:noAutofit/>
                     </a:bodyPr>
                     <a:p>
+                      <a:pPr>
+                        <a:lnSpc>
+                          <a:spcPct val="100000"/>
+                        </a:lnSpc>
+                      </a:pPr>
                       <a:r>
                         <a:rPr b="0" lang="ru-RU" sz="1800" spc="-1" strike="noStrike">
                           <a:solidFill>
@@ -5888,29 +7115,31 @@
                   <a:tcPr anchor="t" marL="36000" marR="36000">
                     <a:lnL w="7200">
                       <a:solidFill>
-                        <a:srgbClr val="000000"/>
+                        <a:srgbClr val="666666"/>
                       </a:solidFill>
                       <a:prstDash val="solid"/>
                     </a:lnL>
                     <a:lnR w="7200">
                       <a:solidFill>
-                        <a:srgbClr val="000000"/>
+                        <a:srgbClr val="666666"/>
                       </a:solidFill>
                       <a:prstDash val="solid"/>
                     </a:lnR>
                     <a:lnT w="7200">
                       <a:solidFill>
-                        <a:srgbClr val="000000"/>
+                        <a:srgbClr val="666666"/>
                       </a:solidFill>
                       <a:prstDash val="solid"/>
                     </a:lnT>
                     <a:lnB w="7200">
                       <a:solidFill>
-                        <a:srgbClr val="000000"/>
+                        <a:srgbClr val="666666"/>
                       </a:solidFill>
                       <a:prstDash val="solid"/>
                     </a:lnB>
-                    <a:noFill/>
+                    <a:solidFill>
+                      <a:srgbClr val="ffffff"/>
+                    </a:solidFill>
                   </a:tcPr>
                 </a:tc>
                 <a:tc>
@@ -5919,7 +7148,11 @@
                       <a:noAutofit/>
                     </a:bodyPr>
                     <a:p>
-                      <a:pPr algn="r"/>
+                      <a:pPr algn="r">
+                        <a:lnSpc>
+                          <a:spcPct val="100000"/>
+                        </a:lnSpc>
+                      </a:pPr>
                       <a:r>
                         <a:rPr b="0" lang="ru-RU" sz="1800" spc="-1" strike="noStrike">
                           <a:solidFill>
@@ -5940,29 +7173,31 @@
                   <a:tcPr anchor="t" marL="36000" marR="36000">
                     <a:lnL w="7200">
                       <a:solidFill>
-                        <a:srgbClr val="000000"/>
+                        <a:srgbClr val="666666"/>
                       </a:solidFill>
                       <a:prstDash val="solid"/>
                     </a:lnL>
                     <a:lnR w="7200">
                       <a:solidFill>
-                        <a:srgbClr val="000000"/>
+                        <a:srgbClr val="666666"/>
                       </a:solidFill>
                       <a:prstDash val="solid"/>
                     </a:lnR>
                     <a:lnT w="7200">
                       <a:solidFill>
-                        <a:srgbClr val="000000"/>
+                        <a:srgbClr val="666666"/>
                       </a:solidFill>
                       <a:prstDash val="solid"/>
                     </a:lnT>
                     <a:lnB w="7200">
                       <a:solidFill>
-                        <a:srgbClr val="000000"/>
+                        <a:srgbClr val="666666"/>
                       </a:solidFill>
                       <a:prstDash val="solid"/>
                     </a:lnB>
-                    <a:noFill/>
+                    <a:solidFill>
+                      <a:srgbClr val="ffffff"/>
+                    </a:solidFill>
                   </a:tcPr>
                 </a:tc>
                 <a:tc>
@@ -5971,6 +7206,11 @@
                       <a:noAutofit/>
                     </a:bodyPr>
                     <a:p>
+                      <a:pPr>
+                        <a:lnSpc>
+                          <a:spcPct val="100000"/>
+                        </a:lnSpc>
+                      </a:pPr>
                       <a:r>
                         <a:rPr b="0" lang="ru-RU" sz="1800" spc="-1" strike="noStrike">
                           <a:solidFill>
@@ -5991,29 +7231,31 @@
                   <a:tcPr anchor="t" marL="36000" marR="36000">
                     <a:lnL w="7200">
                       <a:solidFill>
-                        <a:srgbClr val="000000"/>
+                        <a:srgbClr val="666666"/>
                       </a:solidFill>
                       <a:prstDash val="solid"/>
                     </a:lnL>
                     <a:lnR w="7200">
                       <a:solidFill>
-                        <a:srgbClr val="000000"/>
+                        <a:srgbClr val="666666"/>
                       </a:solidFill>
                       <a:prstDash val="solid"/>
                     </a:lnR>
                     <a:lnT w="7200">
                       <a:solidFill>
-                        <a:srgbClr val="000000"/>
+                        <a:srgbClr val="666666"/>
                       </a:solidFill>
                       <a:prstDash val="solid"/>
                     </a:lnT>
                     <a:lnB w="7200">
                       <a:solidFill>
-                        <a:srgbClr val="000000"/>
+                        <a:srgbClr val="666666"/>
                       </a:solidFill>
                       <a:prstDash val="solid"/>
                     </a:lnB>
-                    <a:noFill/>
+                    <a:solidFill>
+                      <a:srgbClr val="ffffff"/>
+                    </a:solidFill>
                   </a:tcPr>
                 </a:tc>
                 <a:tc>
@@ -6022,6 +7264,11 @@
                       <a:noAutofit/>
                     </a:bodyPr>
                     <a:p>
+                      <a:pPr>
+                        <a:lnSpc>
+                          <a:spcPct val="100000"/>
+                        </a:lnSpc>
+                      </a:pPr>
                       <a:r>
                         <a:rPr b="0" lang="ru-RU" sz="1800" spc="-1" strike="noStrike">
                           <a:solidFill>
@@ -6042,29 +7289,31 @@
                   <a:tcPr anchor="t" marL="36000" marR="36000">
                     <a:lnL w="7200">
                       <a:solidFill>
-                        <a:srgbClr val="000000"/>
+                        <a:srgbClr val="666666"/>
                       </a:solidFill>
                       <a:prstDash val="solid"/>
                     </a:lnL>
                     <a:lnR w="7200">
                       <a:solidFill>
-                        <a:srgbClr val="000000"/>
+                        <a:srgbClr val="666666"/>
                       </a:solidFill>
                       <a:prstDash val="solid"/>
                     </a:lnR>
                     <a:lnT w="7200">
                       <a:solidFill>
-                        <a:srgbClr val="000000"/>
+                        <a:srgbClr val="666666"/>
                       </a:solidFill>
                       <a:prstDash val="solid"/>
                     </a:lnT>
                     <a:lnB w="7200">
                       <a:solidFill>
-                        <a:srgbClr val="000000"/>
+                        <a:srgbClr val="666666"/>
                       </a:solidFill>
                       <a:prstDash val="solid"/>
                     </a:lnB>
-                    <a:noFill/>
+                    <a:solidFill>
+                      <a:srgbClr val="ffffff"/>
+                    </a:solidFill>
                   </a:tcPr>
                 </a:tc>
                 <a:tc>
@@ -6073,6 +7322,11 @@
                       <a:noAutofit/>
                     </a:bodyPr>
                     <a:p>
+                      <a:pPr>
+                        <a:lnSpc>
+                          <a:spcPct val="100000"/>
+                        </a:lnSpc>
+                      </a:pPr>
                       <a:r>
                         <a:rPr b="0" lang="ru-RU" sz="1800" spc="-1" strike="noStrike">
                           <a:solidFill>
@@ -6093,29 +7347,31 @@
                   <a:tcPr anchor="t" marL="36000" marR="36000">
                     <a:lnL w="7200">
                       <a:solidFill>
-                        <a:srgbClr val="000000"/>
+                        <a:srgbClr val="666666"/>
                       </a:solidFill>
                       <a:prstDash val="solid"/>
                     </a:lnL>
                     <a:lnR w="7200">
                       <a:solidFill>
-                        <a:srgbClr val="000000"/>
+                        <a:srgbClr val="666666"/>
                       </a:solidFill>
                       <a:prstDash val="solid"/>
                     </a:lnR>
                     <a:lnT w="7200">
                       <a:solidFill>
-                        <a:srgbClr val="000000"/>
+                        <a:srgbClr val="666666"/>
                       </a:solidFill>
                       <a:prstDash val="solid"/>
                     </a:lnT>
                     <a:lnB w="7200">
                       <a:solidFill>
-                        <a:srgbClr val="000000"/>
+                        <a:srgbClr val="666666"/>
                       </a:solidFill>
                       <a:prstDash val="solid"/>
                     </a:lnB>
-                    <a:noFill/>
+                    <a:solidFill>
+                      <a:srgbClr val="ffffff"/>
+                    </a:solidFill>
                   </a:tcPr>
                 </a:tc>
                 <a:tc>
@@ -6124,7 +7380,11 @@
                       <a:noAutofit/>
                     </a:bodyPr>
                     <a:p>
-                      <a:pPr algn="r"/>
+                      <a:pPr algn="r">
+                        <a:lnSpc>
+                          <a:spcPct val="100000"/>
+                        </a:lnSpc>
+                      </a:pPr>
                       <a:r>
                         <a:rPr b="0" lang="ru-RU" sz="1800" spc="-1" strike="noStrike">
                           <a:solidFill>
@@ -6145,29 +7405,31 @@
                   <a:tcPr anchor="t" marL="36000" marR="36000">
                     <a:lnL w="7200">
                       <a:solidFill>
-                        <a:srgbClr val="000000"/>
+                        <a:srgbClr val="666666"/>
                       </a:solidFill>
                       <a:prstDash val="solid"/>
                     </a:lnL>
                     <a:lnR w="7200">
                       <a:solidFill>
-                        <a:srgbClr val="000000"/>
+                        <a:srgbClr val="666666"/>
                       </a:solidFill>
                       <a:prstDash val="solid"/>
                     </a:lnR>
                     <a:lnT w="7200">
                       <a:solidFill>
-                        <a:srgbClr val="000000"/>
+                        <a:srgbClr val="666666"/>
                       </a:solidFill>
                       <a:prstDash val="solid"/>
                     </a:lnT>
                     <a:lnB w="7200">
                       <a:solidFill>
-                        <a:srgbClr val="000000"/>
+                        <a:srgbClr val="666666"/>
                       </a:solidFill>
                       <a:prstDash val="solid"/>
                     </a:lnB>
-                    <a:noFill/>
+                    <a:solidFill>
+                      <a:srgbClr val="ffffff"/>
+                    </a:solidFill>
                   </a:tcPr>
                 </a:tc>
                 <a:tc>
@@ -6176,7 +7438,11 @@
                       <a:noAutofit/>
                     </a:bodyPr>
                     <a:p>
-                      <a:pPr algn="r"/>
+                      <a:pPr algn="r">
+                        <a:lnSpc>
+                          <a:spcPct val="100000"/>
+                        </a:lnSpc>
+                      </a:pPr>
                       <a:r>
                         <a:rPr b="0" lang="ru-RU" sz="1800" spc="-1" strike="noStrike">
                           <a:solidFill>
@@ -6197,29 +7463,31 @@
                   <a:tcPr anchor="t" marL="36000" marR="36000">
                     <a:lnL w="7200">
                       <a:solidFill>
-                        <a:srgbClr val="000000"/>
+                        <a:srgbClr val="666666"/>
                       </a:solidFill>
                       <a:prstDash val="solid"/>
                     </a:lnL>
                     <a:lnR w="7200">
                       <a:solidFill>
-                        <a:srgbClr val="000000"/>
+                        <a:srgbClr val="666666"/>
                       </a:solidFill>
                       <a:prstDash val="solid"/>
                     </a:lnR>
                     <a:lnT w="7200">
                       <a:solidFill>
-                        <a:srgbClr val="000000"/>
+                        <a:srgbClr val="666666"/>
                       </a:solidFill>
                       <a:prstDash val="solid"/>
                     </a:lnT>
                     <a:lnB w="7200">
                       <a:solidFill>
-                        <a:srgbClr val="000000"/>
+                        <a:srgbClr val="666666"/>
                       </a:solidFill>
                       <a:prstDash val="solid"/>
                     </a:lnB>
-                    <a:noFill/>
+                    <a:solidFill>
+                      <a:srgbClr val="ffffff"/>
+                    </a:solidFill>
                   </a:tcPr>
                 </a:tc>
                 <a:tc>
@@ -6228,7 +7496,11 @@
                       <a:noAutofit/>
                     </a:bodyPr>
                     <a:p>
-                      <a:pPr algn="r"/>
+                      <a:pPr algn="r">
+                        <a:lnSpc>
+                          <a:spcPct val="100000"/>
+                        </a:lnSpc>
+                      </a:pPr>
                       <a:r>
                         <a:rPr b="0" lang="ru-RU" sz="1800" spc="-1" strike="noStrike">
                           <a:solidFill>
@@ -6249,29 +7521,31 @@
                   <a:tcPr anchor="t" marL="36000" marR="36000">
                     <a:lnL w="7200">
                       <a:solidFill>
-                        <a:srgbClr val="000000"/>
+                        <a:srgbClr val="666666"/>
                       </a:solidFill>
                       <a:prstDash val="solid"/>
                     </a:lnL>
                     <a:lnR w="7200">
                       <a:solidFill>
-                        <a:srgbClr val="000000"/>
+                        <a:srgbClr val="666666"/>
                       </a:solidFill>
                       <a:prstDash val="solid"/>
                     </a:lnR>
                     <a:lnT w="7200">
                       <a:solidFill>
-                        <a:srgbClr val="000000"/>
+                        <a:srgbClr val="666666"/>
                       </a:solidFill>
                       <a:prstDash val="solid"/>
                     </a:lnT>
                     <a:lnB w="7200">
                       <a:solidFill>
-                        <a:srgbClr val="000000"/>
+                        <a:srgbClr val="666666"/>
                       </a:solidFill>
                       <a:prstDash val="solid"/>
                     </a:lnB>
-                    <a:noFill/>
+                    <a:solidFill>
+                      <a:srgbClr val="ffffff"/>
+                    </a:solidFill>
                   </a:tcPr>
                 </a:tc>
               </a:tr>
@@ -6282,6 +7556,11 @@
                       <a:noAutofit/>
                     </a:bodyPr>
                     <a:p>
+                      <a:pPr>
+                        <a:lnSpc>
+                          <a:spcPct val="100000"/>
+                        </a:lnSpc>
+                      </a:pPr>
                       <a:r>
                         <a:rPr b="0" lang="ru-RU" sz="1800" spc="-1" strike="noStrike">
                           <a:solidFill>
@@ -6302,29 +7581,31 @@
                   <a:tcPr anchor="t" marL="36000" marR="36000">
                     <a:lnL w="7200">
                       <a:solidFill>
-                        <a:srgbClr val="000000"/>
+                        <a:srgbClr val="666666"/>
                       </a:solidFill>
                       <a:prstDash val="solid"/>
                     </a:lnL>
                     <a:lnR w="7200">
                       <a:solidFill>
-                        <a:srgbClr val="000000"/>
+                        <a:srgbClr val="666666"/>
                       </a:solidFill>
                       <a:prstDash val="solid"/>
                     </a:lnR>
                     <a:lnT w="7200">
                       <a:solidFill>
-                        <a:srgbClr val="000000"/>
+                        <a:srgbClr val="666666"/>
                       </a:solidFill>
                       <a:prstDash val="solid"/>
                     </a:lnT>
                     <a:lnB w="7200">
                       <a:solidFill>
-                        <a:srgbClr val="000000"/>
+                        <a:srgbClr val="666666"/>
                       </a:solidFill>
                       <a:prstDash val="solid"/>
                     </a:lnB>
-                    <a:noFill/>
+                    <a:solidFill>
+                      <a:srgbClr val="cccccc"/>
+                    </a:solidFill>
                   </a:tcPr>
                 </a:tc>
                 <a:tc>
@@ -6333,7 +7614,11 @@
                       <a:noAutofit/>
                     </a:bodyPr>
                     <a:p>
-                      <a:pPr algn="r"/>
+                      <a:pPr algn="r">
+                        <a:lnSpc>
+                          <a:spcPct val="100000"/>
+                        </a:lnSpc>
+                      </a:pPr>
                       <a:r>
                         <a:rPr b="0" lang="ru-RU" sz="1800" spc="-1" strike="noStrike">
                           <a:solidFill>
@@ -6354,29 +7639,31 @@
                   <a:tcPr anchor="t" marL="36000" marR="36000">
                     <a:lnL w="7200">
                       <a:solidFill>
-                        <a:srgbClr val="000000"/>
+                        <a:srgbClr val="666666"/>
                       </a:solidFill>
                       <a:prstDash val="solid"/>
                     </a:lnL>
                     <a:lnR w="7200">
                       <a:solidFill>
-                        <a:srgbClr val="000000"/>
+                        <a:srgbClr val="666666"/>
                       </a:solidFill>
                       <a:prstDash val="solid"/>
                     </a:lnR>
                     <a:lnT w="7200">
                       <a:solidFill>
-                        <a:srgbClr val="000000"/>
+                        <a:srgbClr val="666666"/>
                       </a:solidFill>
                       <a:prstDash val="solid"/>
                     </a:lnT>
                     <a:lnB w="7200">
                       <a:solidFill>
-                        <a:srgbClr val="000000"/>
+                        <a:srgbClr val="666666"/>
                       </a:solidFill>
                       <a:prstDash val="solid"/>
                     </a:lnB>
-                    <a:noFill/>
+                    <a:solidFill>
+                      <a:srgbClr val="cccccc"/>
+                    </a:solidFill>
                   </a:tcPr>
                 </a:tc>
                 <a:tc>
@@ -6385,6 +7672,11 @@
                       <a:noAutofit/>
                     </a:bodyPr>
                     <a:p>
+                      <a:pPr>
+                        <a:lnSpc>
+                          <a:spcPct val="100000"/>
+                        </a:lnSpc>
+                      </a:pPr>
                       <a:r>
                         <a:rPr b="0" lang="ru-RU" sz="1800" spc="-1" strike="noStrike">
                           <a:solidFill>
@@ -6405,29 +7697,31 @@
                   <a:tcPr anchor="t" marL="36000" marR="36000">
                     <a:lnL w="7200">
                       <a:solidFill>
-                        <a:srgbClr val="000000"/>
+                        <a:srgbClr val="666666"/>
                       </a:solidFill>
                       <a:prstDash val="solid"/>
                     </a:lnL>
                     <a:lnR w="7200">
                       <a:solidFill>
-                        <a:srgbClr val="000000"/>
+                        <a:srgbClr val="666666"/>
                       </a:solidFill>
                       <a:prstDash val="solid"/>
                     </a:lnR>
                     <a:lnT w="7200">
                       <a:solidFill>
-                        <a:srgbClr val="000000"/>
+                        <a:srgbClr val="666666"/>
                       </a:solidFill>
                       <a:prstDash val="solid"/>
                     </a:lnT>
                     <a:lnB w="7200">
                       <a:solidFill>
-                        <a:srgbClr val="000000"/>
+                        <a:srgbClr val="666666"/>
                       </a:solidFill>
                       <a:prstDash val="solid"/>
                     </a:lnB>
-                    <a:noFill/>
+                    <a:solidFill>
+                      <a:srgbClr val="cccccc"/>
+                    </a:solidFill>
                   </a:tcPr>
                 </a:tc>
                 <a:tc>
@@ -6436,6 +7730,11 @@
                       <a:noAutofit/>
                     </a:bodyPr>
                     <a:p>
+                      <a:pPr>
+                        <a:lnSpc>
+                          <a:spcPct val="100000"/>
+                        </a:lnSpc>
+                      </a:pPr>
                       <a:r>
                         <a:rPr b="0" lang="ru-RU" sz="1800" spc="-1" strike="noStrike">
                           <a:solidFill>
@@ -6456,29 +7755,31 @@
                   <a:tcPr anchor="t" marL="36000" marR="36000">
                     <a:lnL w="7200">
                       <a:solidFill>
-                        <a:srgbClr val="000000"/>
+                        <a:srgbClr val="666666"/>
                       </a:solidFill>
                       <a:prstDash val="solid"/>
                     </a:lnL>
                     <a:lnR w="7200">
                       <a:solidFill>
-                        <a:srgbClr val="000000"/>
+                        <a:srgbClr val="666666"/>
                       </a:solidFill>
                       <a:prstDash val="solid"/>
                     </a:lnR>
                     <a:lnT w="7200">
                       <a:solidFill>
-                        <a:srgbClr val="000000"/>
+                        <a:srgbClr val="666666"/>
                       </a:solidFill>
                       <a:prstDash val="solid"/>
                     </a:lnT>
                     <a:lnB w="7200">
                       <a:solidFill>
-                        <a:srgbClr val="000000"/>
+                        <a:srgbClr val="666666"/>
                       </a:solidFill>
                       <a:prstDash val="solid"/>
                     </a:lnB>
-                    <a:noFill/>
+                    <a:solidFill>
+                      <a:srgbClr val="cccccc"/>
+                    </a:solidFill>
                   </a:tcPr>
                 </a:tc>
                 <a:tc>
@@ -6487,6 +7788,11 @@
                       <a:noAutofit/>
                     </a:bodyPr>
                     <a:p>
+                      <a:pPr>
+                        <a:lnSpc>
+                          <a:spcPct val="100000"/>
+                        </a:lnSpc>
+                      </a:pPr>
                       <a:r>
                         <a:rPr b="0" lang="ru-RU" sz="1800" spc="-1" strike="noStrike">
                           <a:solidFill>
@@ -6507,29 +7813,31 @@
                   <a:tcPr anchor="t" marL="36000" marR="36000">
                     <a:lnL w="7200">
                       <a:solidFill>
-                        <a:srgbClr val="000000"/>
+                        <a:srgbClr val="666666"/>
                       </a:solidFill>
                       <a:prstDash val="solid"/>
                     </a:lnL>
                     <a:lnR w="7200">
                       <a:solidFill>
-                        <a:srgbClr val="000000"/>
+                        <a:srgbClr val="666666"/>
                       </a:solidFill>
                       <a:prstDash val="solid"/>
                     </a:lnR>
                     <a:lnT w="7200">
                       <a:solidFill>
-                        <a:srgbClr val="000000"/>
+                        <a:srgbClr val="666666"/>
                       </a:solidFill>
                       <a:prstDash val="solid"/>
                     </a:lnT>
                     <a:lnB w="7200">
                       <a:solidFill>
-                        <a:srgbClr val="000000"/>
+                        <a:srgbClr val="666666"/>
                       </a:solidFill>
                       <a:prstDash val="solid"/>
                     </a:lnB>
-                    <a:noFill/>
+                    <a:solidFill>
+                      <a:srgbClr val="cccccc"/>
+                    </a:solidFill>
                   </a:tcPr>
                 </a:tc>
                 <a:tc>
@@ -6538,7 +7846,11 @@
                       <a:noAutofit/>
                     </a:bodyPr>
                     <a:p>
-                      <a:pPr algn="r"/>
+                      <a:pPr algn="r">
+                        <a:lnSpc>
+                          <a:spcPct val="100000"/>
+                        </a:lnSpc>
+                      </a:pPr>
                       <a:r>
                         <a:rPr b="0" lang="ru-RU" sz="1800" spc="-1" strike="noStrike">
                           <a:solidFill>
@@ -6559,29 +7871,31 @@
                   <a:tcPr anchor="t" marL="36000" marR="36000">
                     <a:lnL w="7200">
                       <a:solidFill>
-                        <a:srgbClr val="000000"/>
+                        <a:srgbClr val="666666"/>
                       </a:solidFill>
                       <a:prstDash val="solid"/>
                     </a:lnL>
                     <a:lnR w="7200">
                       <a:solidFill>
-                        <a:srgbClr val="000000"/>
+                        <a:srgbClr val="666666"/>
                       </a:solidFill>
                       <a:prstDash val="solid"/>
                     </a:lnR>
                     <a:lnT w="7200">
                       <a:solidFill>
-                        <a:srgbClr val="000000"/>
+                        <a:srgbClr val="666666"/>
                       </a:solidFill>
                       <a:prstDash val="solid"/>
                     </a:lnT>
                     <a:lnB w="7200">
                       <a:solidFill>
-                        <a:srgbClr val="000000"/>
+                        <a:srgbClr val="666666"/>
                       </a:solidFill>
                       <a:prstDash val="solid"/>
                     </a:lnB>
-                    <a:noFill/>
+                    <a:solidFill>
+                      <a:srgbClr val="cccccc"/>
+                    </a:solidFill>
                   </a:tcPr>
                 </a:tc>
                 <a:tc>
@@ -6590,7 +7904,11 @@
                       <a:noAutofit/>
                     </a:bodyPr>
                     <a:p>
-                      <a:pPr algn="r"/>
+                      <a:pPr algn="r">
+                        <a:lnSpc>
+                          <a:spcPct val="100000"/>
+                        </a:lnSpc>
+                      </a:pPr>
                       <a:r>
                         <a:rPr b="0" lang="ru-RU" sz="1800" spc="-1" strike="noStrike">
                           <a:solidFill>
@@ -6611,29 +7929,31 @@
                   <a:tcPr anchor="t" marL="36000" marR="36000">
                     <a:lnL w="7200">
                       <a:solidFill>
-                        <a:srgbClr val="000000"/>
+                        <a:srgbClr val="666666"/>
                       </a:solidFill>
                       <a:prstDash val="solid"/>
                     </a:lnL>
                     <a:lnR w="7200">
                       <a:solidFill>
-                        <a:srgbClr val="000000"/>
+                        <a:srgbClr val="666666"/>
                       </a:solidFill>
                       <a:prstDash val="solid"/>
                     </a:lnR>
                     <a:lnT w="7200">
                       <a:solidFill>
-                        <a:srgbClr val="000000"/>
+                        <a:srgbClr val="666666"/>
                       </a:solidFill>
                       <a:prstDash val="solid"/>
                     </a:lnT>
                     <a:lnB w="7200">
                       <a:solidFill>
-                        <a:srgbClr val="000000"/>
+                        <a:srgbClr val="666666"/>
                       </a:solidFill>
                       <a:prstDash val="solid"/>
                     </a:lnB>
-                    <a:noFill/>
+                    <a:solidFill>
+                      <a:srgbClr val="cccccc"/>
+                    </a:solidFill>
                   </a:tcPr>
                 </a:tc>
                 <a:tc>
@@ -6642,7 +7962,11 @@
                       <a:noAutofit/>
                     </a:bodyPr>
                     <a:p>
-                      <a:pPr algn="r"/>
+                      <a:pPr algn="r">
+                        <a:lnSpc>
+                          <a:spcPct val="100000"/>
+                        </a:lnSpc>
+                      </a:pPr>
                       <a:r>
                         <a:rPr b="0" lang="ru-RU" sz="1800" spc="-1" strike="noStrike">
                           <a:solidFill>
@@ -6663,29 +7987,31 @@
                   <a:tcPr anchor="t" marL="36000" marR="36000">
                     <a:lnL w="7200">
                       <a:solidFill>
-                        <a:srgbClr val="000000"/>
+                        <a:srgbClr val="666666"/>
                       </a:solidFill>
                       <a:prstDash val="solid"/>
                     </a:lnL>
                     <a:lnR w="7200">
                       <a:solidFill>
-                        <a:srgbClr val="000000"/>
+                        <a:srgbClr val="666666"/>
                       </a:solidFill>
                       <a:prstDash val="solid"/>
                     </a:lnR>
                     <a:lnT w="7200">
                       <a:solidFill>
-                        <a:srgbClr val="000000"/>
+                        <a:srgbClr val="666666"/>
                       </a:solidFill>
                       <a:prstDash val="solid"/>
                     </a:lnT>
                     <a:lnB w="7200">
                       <a:solidFill>
-                        <a:srgbClr val="000000"/>
+                        <a:srgbClr val="666666"/>
                       </a:solidFill>
                       <a:prstDash val="solid"/>
                     </a:lnB>
-                    <a:noFill/>
+                    <a:solidFill>
+                      <a:srgbClr val="cccccc"/>
+                    </a:solidFill>
                   </a:tcPr>
                 </a:tc>
               </a:tr>
@@ -6696,6 +8022,11 @@
                       <a:noAutofit/>
                     </a:bodyPr>
                     <a:p>
+                      <a:pPr>
+                        <a:lnSpc>
+                          <a:spcPct val="100000"/>
+                        </a:lnSpc>
+                      </a:pPr>
                       <a:r>
                         <a:rPr b="0" lang="ru-RU" sz="1800" spc="-1" strike="noStrike">
                           <a:solidFill>
@@ -6716,29 +8047,31 @@
                   <a:tcPr anchor="t" marL="36000" marR="36000">
                     <a:lnL w="7200">
                       <a:solidFill>
-                        <a:srgbClr val="000000"/>
+                        <a:srgbClr val="666666"/>
                       </a:solidFill>
                       <a:prstDash val="solid"/>
                     </a:lnL>
                     <a:lnR w="7200">
                       <a:solidFill>
-                        <a:srgbClr val="000000"/>
+                        <a:srgbClr val="666666"/>
                       </a:solidFill>
                       <a:prstDash val="solid"/>
                     </a:lnR>
                     <a:lnT w="7200">
                       <a:solidFill>
-                        <a:srgbClr val="000000"/>
+                        <a:srgbClr val="666666"/>
                       </a:solidFill>
                       <a:prstDash val="solid"/>
                     </a:lnT>
                     <a:lnB w="7200">
                       <a:solidFill>
-                        <a:srgbClr val="000000"/>
+                        <a:srgbClr val="666666"/>
                       </a:solidFill>
                       <a:prstDash val="solid"/>
                     </a:lnB>
-                    <a:noFill/>
+                    <a:solidFill>
+                      <a:srgbClr val="ffffff"/>
+                    </a:solidFill>
                   </a:tcPr>
                 </a:tc>
                 <a:tc>
@@ -6747,7 +8080,11 @@
                       <a:noAutofit/>
                     </a:bodyPr>
                     <a:p>
-                      <a:pPr algn="r"/>
+                      <a:pPr algn="r">
+                        <a:lnSpc>
+                          <a:spcPct val="100000"/>
+                        </a:lnSpc>
+                      </a:pPr>
                       <a:r>
                         <a:rPr b="0" lang="ru-RU" sz="1800" spc="-1" strike="noStrike">
                           <a:solidFill>
@@ -6768,29 +8105,31 @@
                   <a:tcPr anchor="t" marL="36000" marR="36000">
                     <a:lnL w="7200">
                       <a:solidFill>
-                        <a:srgbClr val="000000"/>
+                        <a:srgbClr val="666666"/>
                       </a:solidFill>
                       <a:prstDash val="solid"/>
                     </a:lnL>
                     <a:lnR w="7200">
                       <a:solidFill>
-                        <a:srgbClr val="000000"/>
+                        <a:srgbClr val="666666"/>
                       </a:solidFill>
                       <a:prstDash val="solid"/>
                     </a:lnR>
                     <a:lnT w="7200">
                       <a:solidFill>
-                        <a:srgbClr val="000000"/>
+                        <a:srgbClr val="666666"/>
                       </a:solidFill>
                       <a:prstDash val="solid"/>
                     </a:lnT>
                     <a:lnB w="7200">
                       <a:solidFill>
-                        <a:srgbClr val="000000"/>
+                        <a:srgbClr val="666666"/>
                       </a:solidFill>
                       <a:prstDash val="solid"/>
                     </a:lnB>
-                    <a:noFill/>
+                    <a:solidFill>
+                      <a:srgbClr val="ffffff"/>
+                    </a:solidFill>
                   </a:tcPr>
                 </a:tc>
                 <a:tc>
@@ -6799,6 +8138,11 @@
                       <a:noAutofit/>
                     </a:bodyPr>
                     <a:p>
+                      <a:pPr>
+                        <a:lnSpc>
+                          <a:spcPct val="100000"/>
+                        </a:lnSpc>
+                      </a:pPr>
                       <a:r>
                         <a:rPr b="0" lang="ru-RU" sz="1800" spc="-1" strike="noStrike">
                           <a:solidFill>
@@ -6819,29 +8163,31 @@
                   <a:tcPr anchor="t" marL="36000" marR="36000">
                     <a:lnL w="7200">
                       <a:solidFill>
-                        <a:srgbClr val="000000"/>
+                        <a:srgbClr val="666666"/>
                       </a:solidFill>
                       <a:prstDash val="solid"/>
                     </a:lnL>
                     <a:lnR w="7200">
                       <a:solidFill>
-                        <a:srgbClr val="000000"/>
+                        <a:srgbClr val="666666"/>
                       </a:solidFill>
                       <a:prstDash val="solid"/>
                     </a:lnR>
                     <a:lnT w="7200">
                       <a:solidFill>
-                        <a:srgbClr val="000000"/>
+                        <a:srgbClr val="666666"/>
                       </a:solidFill>
                       <a:prstDash val="solid"/>
                     </a:lnT>
                     <a:lnB w="7200">
                       <a:solidFill>
-                        <a:srgbClr val="000000"/>
+                        <a:srgbClr val="666666"/>
                       </a:solidFill>
                       <a:prstDash val="solid"/>
                     </a:lnB>
-                    <a:noFill/>
+                    <a:solidFill>
+                      <a:srgbClr val="ffffff"/>
+                    </a:solidFill>
                   </a:tcPr>
                 </a:tc>
                 <a:tc>
@@ -6850,6 +8196,11 @@
                       <a:noAutofit/>
                     </a:bodyPr>
                     <a:p>
+                      <a:pPr>
+                        <a:lnSpc>
+                          <a:spcPct val="100000"/>
+                        </a:lnSpc>
+                      </a:pPr>
                       <a:r>
                         <a:rPr b="0" lang="ru-RU" sz="1800" spc="-1" strike="noStrike">
                           <a:solidFill>
@@ -6870,29 +8221,31 @@
                   <a:tcPr anchor="t" marL="36000" marR="36000">
                     <a:lnL w="7200">
                       <a:solidFill>
-                        <a:srgbClr val="000000"/>
+                        <a:srgbClr val="666666"/>
                       </a:solidFill>
                       <a:prstDash val="solid"/>
                     </a:lnL>
                     <a:lnR w="7200">
                       <a:solidFill>
-                        <a:srgbClr val="000000"/>
+                        <a:srgbClr val="666666"/>
                       </a:solidFill>
                       <a:prstDash val="solid"/>
                     </a:lnR>
                     <a:lnT w="7200">
                       <a:solidFill>
-                        <a:srgbClr val="000000"/>
+                        <a:srgbClr val="666666"/>
                       </a:solidFill>
                       <a:prstDash val="solid"/>
                     </a:lnT>
                     <a:lnB w="7200">
                       <a:solidFill>
-                        <a:srgbClr val="000000"/>
+                        <a:srgbClr val="666666"/>
                       </a:solidFill>
                       <a:prstDash val="solid"/>
                     </a:lnB>
-                    <a:noFill/>
+                    <a:solidFill>
+                      <a:srgbClr val="ffffff"/>
+                    </a:solidFill>
                   </a:tcPr>
                 </a:tc>
                 <a:tc>
@@ -6901,6 +8254,11 @@
                       <a:noAutofit/>
                     </a:bodyPr>
                     <a:p>
+                      <a:pPr>
+                        <a:lnSpc>
+                          <a:spcPct val="100000"/>
+                        </a:lnSpc>
+                      </a:pPr>
                       <a:r>
                         <a:rPr b="0" lang="ru-RU" sz="1800" spc="-1" strike="noStrike">
                           <a:solidFill>
@@ -6921,29 +8279,31 @@
                   <a:tcPr anchor="t" marL="36000" marR="36000">
                     <a:lnL w="7200">
                       <a:solidFill>
-                        <a:srgbClr val="000000"/>
+                        <a:srgbClr val="666666"/>
                       </a:solidFill>
                       <a:prstDash val="solid"/>
                     </a:lnL>
                     <a:lnR w="7200">
                       <a:solidFill>
-                        <a:srgbClr val="000000"/>
+                        <a:srgbClr val="666666"/>
                       </a:solidFill>
                       <a:prstDash val="solid"/>
                     </a:lnR>
                     <a:lnT w="7200">
                       <a:solidFill>
-                        <a:srgbClr val="000000"/>
+                        <a:srgbClr val="666666"/>
                       </a:solidFill>
                       <a:prstDash val="solid"/>
                     </a:lnT>
                     <a:lnB w="7200">
                       <a:solidFill>
-                        <a:srgbClr val="000000"/>
+                        <a:srgbClr val="666666"/>
                       </a:solidFill>
                       <a:prstDash val="solid"/>
                     </a:lnB>
-                    <a:noFill/>
+                    <a:solidFill>
+                      <a:srgbClr val="ffffff"/>
+                    </a:solidFill>
                   </a:tcPr>
                 </a:tc>
                 <a:tc>
@@ -6952,7 +8312,11 @@
                       <a:noAutofit/>
                     </a:bodyPr>
                     <a:p>
-                      <a:pPr algn="r"/>
+                      <a:pPr algn="r">
+                        <a:lnSpc>
+                          <a:spcPct val="100000"/>
+                        </a:lnSpc>
+                      </a:pPr>
                       <a:r>
                         <a:rPr b="0" lang="ru-RU" sz="1800" spc="-1" strike="noStrike">
                           <a:solidFill>
@@ -6973,29 +8337,31 @@
                   <a:tcPr anchor="t" marL="36000" marR="36000">
                     <a:lnL w="7200">
                       <a:solidFill>
-                        <a:srgbClr val="000000"/>
+                        <a:srgbClr val="666666"/>
                       </a:solidFill>
                       <a:prstDash val="solid"/>
                     </a:lnL>
                     <a:lnR w="7200">
                       <a:solidFill>
-                        <a:srgbClr val="000000"/>
+                        <a:srgbClr val="666666"/>
                       </a:solidFill>
                       <a:prstDash val="solid"/>
                     </a:lnR>
                     <a:lnT w="7200">
                       <a:solidFill>
-                        <a:srgbClr val="000000"/>
+                        <a:srgbClr val="666666"/>
                       </a:solidFill>
                       <a:prstDash val="solid"/>
                     </a:lnT>
                     <a:lnB w="7200">
                       <a:solidFill>
-                        <a:srgbClr val="000000"/>
+                        <a:srgbClr val="666666"/>
                       </a:solidFill>
                       <a:prstDash val="solid"/>
                     </a:lnB>
-                    <a:noFill/>
+                    <a:solidFill>
+                      <a:srgbClr val="ffffff"/>
+                    </a:solidFill>
                   </a:tcPr>
                 </a:tc>
                 <a:tc>
@@ -7004,7 +8370,11 @@
                       <a:noAutofit/>
                     </a:bodyPr>
                     <a:p>
-                      <a:pPr algn="r"/>
+                      <a:pPr algn="r">
+                        <a:lnSpc>
+                          <a:spcPct val="100000"/>
+                        </a:lnSpc>
+                      </a:pPr>
                       <a:r>
                         <a:rPr b="0" lang="ru-RU" sz="1800" spc="-1" strike="noStrike">
                           <a:solidFill>
@@ -7025,29 +8395,31 @@
                   <a:tcPr anchor="t" marL="36000" marR="36000">
                     <a:lnL w="7200">
                       <a:solidFill>
-                        <a:srgbClr val="000000"/>
+                        <a:srgbClr val="666666"/>
                       </a:solidFill>
                       <a:prstDash val="solid"/>
                     </a:lnL>
                     <a:lnR w="7200">
                       <a:solidFill>
-                        <a:srgbClr val="000000"/>
+                        <a:srgbClr val="666666"/>
                       </a:solidFill>
                       <a:prstDash val="solid"/>
                     </a:lnR>
                     <a:lnT w="7200">
                       <a:solidFill>
-                        <a:srgbClr val="000000"/>
+                        <a:srgbClr val="666666"/>
                       </a:solidFill>
                       <a:prstDash val="solid"/>
                     </a:lnT>
                     <a:lnB w="7200">
                       <a:solidFill>
-                        <a:srgbClr val="000000"/>
+                        <a:srgbClr val="666666"/>
                       </a:solidFill>
                       <a:prstDash val="solid"/>
                     </a:lnB>
-                    <a:noFill/>
+                    <a:solidFill>
+                      <a:srgbClr val="ffffff"/>
+                    </a:solidFill>
                   </a:tcPr>
                 </a:tc>
                 <a:tc>
@@ -7056,7 +8428,11 @@
                       <a:noAutofit/>
                     </a:bodyPr>
                     <a:p>
-                      <a:pPr algn="r"/>
+                      <a:pPr algn="r">
+                        <a:lnSpc>
+                          <a:spcPct val="100000"/>
+                        </a:lnSpc>
+                      </a:pPr>
                       <a:r>
                         <a:rPr b="0" lang="ru-RU" sz="1800" spc="-1" strike="noStrike">
                           <a:solidFill>
@@ -7077,29 +8453,31 @@
                   <a:tcPr anchor="t" marL="36000" marR="36000">
                     <a:lnL w="7200">
                       <a:solidFill>
-                        <a:srgbClr val="000000"/>
+                        <a:srgbClr val="666666"/>
                       </a:solidFill>
                       <a:prstDash val="solid"/>
                     </a:lnL>
                     <a:lnR w="7200">
                       <a:solidFill>
-                        <a:srgbClr val="000000"/>
+                        <a:srgbClr val="666666"/>
                       </a:solidFill>
                       <a:prstDash val="solid"/>
                     </a:lnR>
                     <a:lnT w="7200">
                       <a:solidFill>
-                        <a:srgbClr val="000000"/>
+                        <a:srgbClr val="666666"/>
                       </a:solidFill>
                       <a:prstDash val="solid"/>
                     </a:lnT>
                     <a:lnB w="7200">
                       <a:solidFill>
-                        <a:srgbClr val="000000"/>
+                        <a:srgbClr val="666666"/>
                       </a:solidFill>
                       <a:prstDash val="solid"/>
                     </a:lnB>
-                    <a:noFill/>
+                    <a:solidFill>
+                      <a:srgbClr val="ffffff"/>
+                    </a:solidFill>
                   </a:tcPr>
                 </a:tc>
               </a:tr>
@@ -7110,6 +8488,11 @@
                       <a:noAutofit/>
                     </a:bodyPr>
                     <a:p>
+                      <a:pPr>
+                        <a:lnSpc>
+                          <a:spcPct val="100000"/>
+                        </a:lnSpc>
+                      </a:pPr>
                       <a:r>
                         <a:rPr b="0" lang="ru-RU" sz="1800" spc="-1" strike="noStrike">
                           <a:solidFill>
@@ -7130,29 +8513,31 @@
                   <a:tcPr anchor="t" marL="36000" marR="36000">
                     <a:lnL w="7200">
                       <a:solidFill>
-                        <a:srgbClr val="000000"/>
+                        <a:srgbClr val="666666"/>
                       </a:solidFill>
                       <a:prstDash val="solid"/>
                     </a:lnL>
                     <a:lnR w="7200">
                       <a:solidFill>
-                        <a:srgbClr val="000000"/>
+                        <a:srgbClr val="666666"/>
                       </a:solidFill>
                       <a:prstDash val="solid"/>
                     </a:lnR>
                     <a:lnT w="7200">
                       <a:solidFill>
-                        <a:srgbClr val="000000"/>
+                        <a:srgbClr val="666666"/>
                       </a:solidFill>
                       <a:prstDash val="solid"/>
                     </a:lnT>
                     <a:lnB w="7200">
                       <a:solidFill>
-                        <a:srgbClr val="000000"/>
+                        <a:srgbClr val="666666"/>
                       </a:solidFill>
                       <a:prstDash val="solid"/>
                     </a:lnB>
-                    <a:noFill/>
+                    <a:solidFill>
+                      <a:srgbClr val="cccccc"/>
+                    </a:solidFill>
                   </a:tcPr>
                 </a:tc>
                 <a:tc>
@@ -7161,7 +8546,11 @@
                       <a:noAutofit/>
                     </a:bodyPr>
                     <a:p>
-                      <a:pPr algn="r"/>
+                      <a:pPr algn="r">
+                        <a:lnSpc>
+                          <a:spcPct val="100000"/>
+                        </a:lnSpc>
+                      </a:pPr>
                       <a:r>
                         <a:rPr b="0" lang="ru-RU" sz="1800" spc="-1" strike="noStrike">
                           <a:solidFill>
@@ -7182,29 +8571,31 @@
                   <a:tcPr anchor="t" marL="36000" marR="36000">
                     <a:lnL w="7200">
                       <a:solidFill>
-                        <a:srgbClr val="000000"/>
+                        <a:srgbClr val="666666"/>
                       </a:solidFill>
                       <a:prstDash val="solid"/>
                     </a:lnL>
                     <a:lnR w="7200">
                       <a:solidFill>
-                        <a:srgbClr val="000000"/>
+                        <a:srgbClr val="666666"/>
                       </a:solidFill>
                       <a:prstDash val="solid"/>
                     </a:lnR>
                     <a:lnT w="7200">
                       <a:solidFill>
-                        <a:srgbClr val="000000"/>
+                        <a:srgbClr val="666666"/>
                       </a:solidFill>
                       <a:prstDash val="solid"/>
                     </a:lnT>
                     <a:lnB w="7200">
                       <a:solidFill>
-                        <a:srgbClr val="000000"/>
+                        <a:srgbClr val="666666"/>
                       </a:solidFill>
                       <a:prstDash val="solid"/>
                     </a:lnB>
-                    <a:noFill/>
+                    <a:solidFill>
+                      <a:srgbClr val="cccccc"/>
+                    </a:solidFill>
                   </a:tcPr>
                 </a:tc>
                 <a:tc>
@@ -7213,6 +8604,11 @@
                       <a:noAutofit/>
                     </a:bodyPr>
                     <a:p>
+                      <a:pPr>
+                        <a:lnSpc>
+                          <a:spcPct val="100000"/>
+                        </a:lnSpc>
+                      </a:pPr>
                       <a:r>
                         <a:rPr b="0" lang="ru-RU" sz="1800" spc="-1" strike="noStrike">
                           <a:solidFill>
@@ -7233,29 +8629,31 @@
                   <a:tcPr anchor="t" marL="36000" marR="36000">
                     <a:lnL w="7200">
                       <a:solidFill>
-                        <a:srgbClr val="000000"/>
+                        <a:srgbClr val="666666"/>
                       </a:solidFill>
                       <a:prstDash val="solid"/>
                     </a:lnL>
                     <a:lnR w="7200">
                       <a:solidFill>
-                        <a:srgbClr val="000000"/>
+                        <a:srgbClr val="666666"/>
                       </a:solidFill>
                       <a:prstDash val="solid"/>
                     </a:lnR>
                     <a:lnT w="7200">
                       <a:solidFill>
-                        <a:srgbClr val="000000"/>
+                        <a:srgbClr val="666666"/>
                       </a:solidFill>
                       <a:prstDash val="solid"/>
                     </a:lnT>
                     <a:lnB w="7200">
                       <a:solidFill>
-                        <a:srgbClr val="000000"/>
+                        <a:srgbClr val="666666"/>
                       </a:solidFill>
                       <a:prstDash val="solid"/>
                     </a:lnB>
-                    <a:noFill/>
+                    <a:solidFill>
+                      <a:srgbClr val="cccccc"/>
+                    </a:solidFill>
                   </a:tcPr>
                 </a:tc>
                 <a:tc>
@@ -7264,6 +8662,11 @@
                       <a:noAutofit/>
                     </a:bodyPr>
                     <a:p>
+                      <a:pPr>
+                        <a:lnSpc>
+                          <a:spcPct val="100000"/>
+                        </a:lnSpc>
+                      </a:pPr>
                       <a:r>
                         <a:rPr b="0" lang="ru-RU" sz="1800" spc="-1" strike="noStrike">
                           <a:solidFill>
@@ -7284,29 +8687,31 @@
                   <a:tcPr anchor="t" marL="36000" marR="36000">
                     <a:lnL w="7200">
                       <a:solidFill>
-                        <a:srgbClr val="000000"/>
+                        <a:srgbClr val="666666"/>
                       </a:solidFill>
                       <a:prstDash val="solid"/>
                     </a:lnL>
                     <a:lnR w="7200">
                       <a:solidFill>
-                        <a:srgbClr val="000000"/>
+                        <a:srgbClr val="666666"/>
                       </a:solidFill>
                       <a:prstDash val="solid"/>
                     </a:lnR>
                     <a:lnT w="7200">
                       <a:solidFill>
-                        <a:srgbClr val="000000"/>
+                        <a:srgbClr val="666666"/>
                       </a:solidFill>
                       <a:prstDash val="solid"/>
                     </a:lnT>
                     <a:lnB w="7200">
                       <a:solidFill>
-                        <a:srgbClr val="000000"/>
+                        <a:srgbClr val="666666"/>
                       </a:solidFill>
                       <a:prstDash val="solid"/>
                     </a:lnB>
-                    <a:noFill/>
+                    <a:solidFill>
+                      <a:srgbClr val="cccccc"/>
+                    </a:solidFill>
                   </a:tcPr>
                 </a:tc>
                 <a:tc>
@@ -7315,6 +8720,11 @@
                       <a:noAutofit/>
                     </a:bodyPr>
                     <a:p>
+                      <a:pPr>
+                        <a:lnSpc>
+                          <a:spcPct val="100000"/>
+                        </a:lnSpc>
+                      </a:pPr>
                       <a:r>
                         <a:rPr b="0" lang="ru-RU" sz="1800" spc="-1" strike="noStrike">
                           <a:solidFill>
@@ -7335,29 +8745,31 @@
                   <a:tcPr anchor="t" marL="36000" marR="36000">
                     <a:lnL w="7200">
                       <a:solidFill>
-                        <a:srgbClr val="000000"/>
+                        <a:srgbClr val="666666"/>
                       </a:solidFill>
                       <a:prstDash val="solid"/>
                     </a:lnL>
                     <a:lnR w="7200">
                       <a:solidFill>
-                        <a:srgbClr val="000000"/>
+                        <a:srgbClr val="666666"/>
                       </a:solidFill>
                       <a:prstDash val="solid"/>
                     </a:lnR>
                     <a:lnT w="7200">
                       <a:solidFill>
-                        <a:srgbClr val="000000"/>
+                        <a:srgbClr val="666666"/>
                       </a:solidFill>
                       <a:prstDash val="solid"/>
                     </a:lnT>
                     <a:lnB w="7200">
                       <a:solidFill>
-                        <a:srgbClr val="000000"/>
+                        <a:srgbClr val="666666"/>
                       </a:solidFill>
                       <a:prstDash val="solid"/>
                     </a:lnB>
-                    <a:noFill/>
+                    <a:solidFill>
+                      <a:srgbClr val="cccccc"/>
+                    </a:solidFill>
                   </a:tcPr>
                 </a:tc>
                 <a:tc>
@@ -7366,7 +8778,11 @@
                       <a:noAutofit/>
                     </a:bodyPr>
                     <a:p>
-                      <a:pPr algn="r"/>
+                      <a:pPr algn="r">
+                        <a:lnSpc>
+                          <a:spcPct val="100000"/>
+                        </a:lnSpc>
+                      </a:pPr>
                       <a:r>
                         <a:rPr b="0" lang="ru-RU" sz="1800" spc="-1" strike="noStrike">
                           <a:solidFill>
@@ -7387,29 +8803,31 @@
                   <a:tcPr anchor="t" marL="36000" marR="36000">
                     <a:lnL w="7200">
                       <a:solidFill>
-                        <a:srgbClr val="000000"/>
+                        <a:srgbClr val="666666"/>
                       </a:solidFill>
                       <a:prstDash val="solid"/>
                     </a:lnL>
                     <a:lnR w="7200">
                       <a:solidFill>
-                        <a:srgbClr val="000000"/>
+                        <a:srgbClr val="666666"/>
                       </a:solidFill>
                       <a:prstDash val="solid"/>
                     </a:lnR>
                     <a:lnT w="7200">
                       <a:solidFill>
-                        <a:srgbClr val="000000"/>
+                        <a:srgbClr val="666666"/>
                       </a:solidFill>
                       <a:prstDash val="solid"/>
                     </a:lnT>
                     <a:lnB w="7200">
                       <a:solidFill>
-                        <a:srgbClr val="000000"/>
+                        <a:srgbClr val="666666"/>
                       </a:solidFill>
                       <a:prstDash val="solid"/>
                     </a:lnB>
-                    <a:noFill/>
+                    <a:solidFill>
+                      <a:srgbClr val="cccccc"/>
+                    </a:solidFill>
                   </a:tcPr>
                 </a:tc>
                 <a:tc>
@@ -7418,7 +8836,11 @@
                       <a:noAutofit/>
                     </a:bodyPr>
                     <a:p>
-                      <a:pPr algn="r"/>
+                      <a:pPr algn="r">
+                        <a:lnSpc>
+                          <a:spcPct val="100000"/>
+                        </a:lnSpc>
+                      </a:pPr>
                       <a:r>
                         <a:rPr b="0" lang="ru-RU" sz="1800" spc="-1" strike="noStrike">
                           <a:solidFill>
@@ -7439,29 +8861,31 @@
                   <a:tcPr anchor="t" marL="36000" marR="36000">
                     <a:lnL w="7200">
                       <a:solidFill>
-                        <a:srgbClr val="000000"/>
+                        <a:srgbClr val="666666"/>
                       </a:solidFill>
                       <a:prstDash val="solid"/>
                     </a:lnL>
                     <a:lnR w="7200">
                       <a:solidFill>
-                        <a:srgbClr val="000000"/>
+                        <a:srgbClr val="666666"/>
                       </a:solidFill>
                       <a:prstDash val="solid"/>
                     </a:lnR>
                     <a:lnT w="7200">
                       <a:solidFill>
-                        <a:srgbClr val="000000"/>
+                        <a:srgbClr val="666666"/>
                       </a:solidFill>
                       <a:prstDash val="solid"/>
                     </a:lnT>
                     <a:lnB w="7200">
                       <a:solidFill>
-                        <a:srgbClr val="000000"/>
+                        <a:srgbClr val="666666"/>
                       </a:solidFill>
                       <a:prstDash val="solid"/>
                     </a:lnB>
-                    <a:noFill/>
+                    <a:solidFill>
+                      <a:srgbClr val="cccccc"/>
+                    </a:solidFill>
                   </a:tcPr>
                 </a:tc>
                 <a:tc>
@@ -7470,7 +8894,11 @@
                       <a:noAutofit/>
                     </a:bodyPr>
                     <a:p>
-                      <a:pPr algn="r"/>
+                      <a:pPr algn="r">
+                        <a:lnSpc>
+                          <a:spcPct val="100000"/>
+                        </a:lnSpc>
+                      </a:pPr>
                       <a:r>
                         <a:rPr b="0" lang="ru-RU" sz="1800" spc="-1" strike="noStrike">
                           <a:solidFill>
@@ -7491,29 +8919,31 @@
                   <a:tcPr anchor="t" marL="36000" marR="36000">
                     <a:lnL w="7200">
                       <a:solidFill>
-                        <a:srgbClr val="000000"/>
+                        <a:srgbClr val="666666"/>
                       </a:solidFill>
                       <a:prstDash val="solid"/>
                     </a:lnL>
                     <a:lnR w="7200">
                       <a:solidFill>
-                        <a:srgbClr val="000000"/>
+                        <a:srgbClr val="666666"/>
                       </a:solidFill>
                       <a:prstDash val="solid"/>
                     </a:lnR>
                     <a:lnT w="7200">
                       <a:solidFill>
-                        <a:srgbClr val="000000"/>
+                        <a:srgbClr val="666666"/>
                       </a:solidFill>
                       <a:prstDash val="solid"/>
                     </a:lnT>
                     <a:lnB w="7200">
                       <a:solidFill>
-                        <a:srgbClr val="000000"/>
+                        <a:srgbClr val="666666"/>
                       </a:solidFill>
                       <a:prstDash val="solid"/>
                     </a:lnB>
-                    <a:noFill/>
+                    <a:solidFill>
+                      <a:srgbClr val="cccccc"/>
+                    </a:solidFill>
                   </a:tcPr>
                 </a:tc>
               </a:tr>
@@ -7524,6 +8954,11 @@
                       <a:noAutofit/>
                     </a:bodyPr>
                     <a:p>
+                      <a:pPr>
+                        <a:lnSpc>
+                          <a:spcPct val="100000"/>
+                        </a:lnSpc>
+                      </a:pPr>
                       <a:r>
                         <a:rPr b="0" lang="ru-RU" sz="1800" spc="-1" strike="noStrike">
                           <a:solidFill>
@@ -7544,29 +8979,31 @@
                   <a:tcPr anchor="t" marL="36000" marR="36000">
                     <a:lnL w="7200">
                       <a:solidFill>
-                        <a:srgbClr val="000000"/>
+                        <a:srgbClr val="666666"/>
                       </a:solidFill>
                       <a:prstDash val="solid"/>
                     </a:lnL>
                     <a:lnR w="7200">
                       <a:solidFill>
-                        <a:srgbClr val="000000"/>
+                        <a:srgbClr val="666666"/>
                       </a:solidFill>
                       <a:prstDash val="solid"/>
                     </a:lnR>
                     <a:lnT w="7200">
                       <a:solidFill>
-                        <a:srgbClr val="000000"/>
+                        <a:srgbClr val="666666"/>
                       </a:solidFill>
                       <a:prstDash val="solid"/>
                     </a:lnT>
                     <a:lnB w="7200">
                       <a:solidFill>
-                        <a:srgbClr val="000000"/>
+                        <a:srgbClr val="666666"/>
                       </a:solidFill>
                       <a:prstDash val="solid"/>
                     </a:lnB>
-                    <a:noFill/>
+                    <a:solidFill>
+                      <a:srgbClr val="ffffff"/>
+                    </a:solidFill>
                   </a:tcPr>
                 </a:tc>
                 <a:tc>
@@ -7575,7 +9012,11 @@
                       <a:noAutofit/>
                     </a:bodyPr>
                     <a:p>
-                      <a:pPr algn="r"/>
+                      <a:pPr algn="r">
+                        <a:lnSpc>
+                          <a:spcPct val="100000"/>
+                        </a:lnSpc>
+                      </a:pPr>
                       <a:r>
                         <a:rPr b="0" lang="ru-RU" sz="1800" spc="-1" strike="noStrike">
                           <a:solidFill>
@@ -7596,29 +9037,31 @@
                   <a:tcPr anchor="t" marL="36000" marR="36000">
                     <a:lnL w="7200">
                       <a:solidFill>
-                        <a:srgbClr val="000000"/>
+                        <a:srgbClr val="666666"/>
                       </a:solidFill>
                       <a:prstDash val="solid"/>
                     </a:lnL>
                     <a:lnR w="7200">
                       <a:solidFill>
-                        <a:srgbClr val="000000"/>
+                        <a:srgbClr val="666666"/>
                       </a:solidFill>
                       <a:prstDash val="solid"/>
                     </a:lnR>
                     <a:lnT w="7200">
                       <a:solidFill>
-                        <a:srgbClr val="000000"/>
+                        <a:srgbClr val="666666"/>
                       </a:solidFill>
                       <a:prstDash val="solid"/>
                     </a:lnT>
                     <a:lnB w="7200">
                       <a:solidFill>
-                        <a:srgbClr val="000000"/>
+                        <a:srgbClr val="666666"/>
                       </a:solidFill>
                       <a:prstDash val="solid"/>
                     </a:lnB>
-                    <a:noFill/>
+                    <a:solidFill>
+                      <a:srgbClr val="ffffff"/>
+                    </a:solidFill>
                   </a:tcPr>
                 </a:tc>
                 <a:tc>
@@ -7627,6 +9070,11 @@
                       <a:noAutofit/>
                     </a:bodyPr>
                     <a:p>
+                      <a:pPr>
+                        <a:lnSpc>
+                          <a:spcPct val="100000"/>
+                        </a:lnSpc>
+                      </a:pPr>
                       <a:r>
                         <a:rPr b="0" lang="ru-RU" sz="1800" spc="-1" strike="noStrike">
                           <a:solidFill>
@@ -7647,29 +9095,31 @@
                   <a:tcPr anchor="t" marL="36000" marR="36000">
                     <a:lnL w="7200">
                       <a:solidFill>
-                        <a:srgbClr val="000000"/>
+                        <a:srgbClr val="666666"/>
                       </a:solidFill>
                       <a:prstDash val="solid"/>
                     </a:lnL>
                     <a:lnR w="7200">
                       <a:solidFill>
-                        <a:srgbClr val="000000"/>
+                        <a:srgbClr val="666666"/>
                       </a:solidFill>
                       <a:prstDash val="solid"/>
                     </a:lnR>
                     <a:lnT w="7200">
                       <a:solidFill>
-                        <a:srgbClr val="000000"/>
+                        <a:srgbClr val="666666"/>
                       </a:solidFill>
                       <a:prstDash val="solid"/>
                     </a:lnT>
                     <a:lnB w="7200">
                       <a:solidFill>
-                        <a:srgbClr val="000000"/>
+                        <a:srgbClr val="666666"/>
                       </a:solidFill>
                       <a:prstDash val="solid"/>
                     </a:lnB>
-                    <a:noFill/>
+                    <a:solidFill>
+                      <a:srgbClr val="ffffff"/>
+                    </a:solidFill>
                   </a:tcPr>
                 </a:tc>
                 <a:tc>
@@ -7678,6 +9128,11 @@
                       <a:noAutofit/>
                     </a:bodyPr>
                     <a:p>
+                      <a:pPr>
+                        <a:lnSpc>
+                          <a:spcPct val="100000"/>
+                        </a:lnSpc>
+                      </a:pPr>
                       <a:r>
                         <a:rPr b="0" lang="ru-RU" sz="1800" spc="-1" strike="noStrike">
                           <a:solidFill>
@@ -7698,29 +9153,31 @@
                   <a:tcPr anchor="t" marL="36000" marR="36000">
                     <a:lnL w="7200">
                       <a:solidFill>
-                        <a:srgbClr val="000000"/>
+                        <a:srgbClr val="666666"/>
                       </a:solidFill>
                       <a:prstDash val="solid"/>
                     </a:lnL>
                     <a:lnR w="7200">
                       <a:solidFill>
-                        <a:srgbClr val="000000"/>
+                        <a:srgbClr val="666666"/>
                       </a:solidFill>
                       <a:prstDash val="solid"/>
                     </a:lnR>
                     <a:lnT w="7200">
                       <a:solidFill>
-                        <a:srgbClr val="000000"/>
+                        <a:srgbClr val="666666"/>
                       </a:solidFill>
                       <a:prstDash val="solid"/>
                     </a:lnT>
                     <a:lnB w="7200">
                       <a:solidFill>
-                        <a:srgbClr val="000000"/>
+                        <a:srgbClr val="666666"/>
                       </a:solidFill>
                       <a:prstDash val="solid"/>
                     </a:lnB>
-                    <a:noFill/>
+                    <a:solidFill>
+                      <a:srgbClr val="ffffff"/>
+                    </a:solidFill>
                   </a:tcPr>
                 </a:tc>
                 <a:tc>
@@ -7729,6 +9186,11 @@
                       <a:noAutofit/>
                     </a:bodyPr>
                     <a:p>
+                      <a:pPr>
+                        <a:lnSpc>
+                          <a:spcPct val="100000"/>
+                        </a:lnSpc>
+                      </a:pPr>
                       <a:r>
                         <a:rPr b="0" lang="ru-RU" sz="1800" spc="-1" strike="noStrike">
                           <a:solidFill>
@@ -7749,29 +9211,31 @@
                   <a:tcPr anchor="t" marL="36000" marR="36000">
                     <a:lnL w="7200">
                       <a:solidFill>
-                        <a:srgbClr val="000000"/>
+                        <a:srgbClr val="666666"/>
                       </a:solidFill>
                       <a:prstDash val="solid"/>
                     </a:lnL>
                     <a:lnR w="7200">
                       <a:solidFill>
-                        <a:srgbClr val="000000"/>
+                        <a:srgbClr val="666666"/>
                       </a:solidFill>
                       <a:prstDash val="solid"/>
                     </a:lnR>
                     <a:lnT w="7200">
                       <a:solidFill>
-                        <a:srgbClr val="000000"/>
+                        <a:srgbClr val="666666"/>
                       </a:solidFill>
                       <a:prstDash val="solid"/>
                     </a:lnT>
                     <a:lnB w="7200">
                       <a:solidFill>
-                        <a:srgbClr val="000000"/>
+                        <a:srgbClr val="666666"/>
                       </a:solidFill>
                       <a:prstDash val="solid"/>
                     </a:lnB>
-                    <a:noFill/>
+                    <a:solidFill>
+                      <a:srgbClr val="ffffff"/>
+                    </a:solidFill>
                   </a:tcPr>
                 </a:tc>
                 <a:tc>
@@ -7780,7 +9244,11 @@
                       <a:noAutofit/>
                     </a:bodyPr>
                     <a:p>
-                      <a:pPr algn="r"/>
+                      <a:pPr algn="r">
+                        <a:lnSpc>
+                          <a:spcPct val="100000"/>
+                        </a:lnSpc>
+                      </a:pPr>
                       <a:r>
                         <a:rPr b="0" lang="ru-RU" sz="1800" spc="-1" strike="noStrike">
                           <a:solidFill>
@@ -7801,29 +9269,31 @@
                   <a:tcPr anchor="t" marL="36000" marR="36000">
                     <a:lnL w="7200">
                       <a:solidFill>
-                        <a:srgbClr val="000000"/>
+                        <a:srgbClr val="666666"/>
                       </a:solidFill>
                       <a:prstDash val="solid"/>
                     </a:lnL>
                     <a:lnR w="7200">
                       <a:solidFill>
-                        <a:srgbClr val="000000"/>
+                        <a:srgbClr val="666666"/>
                       </a:solidFill>
                       <a:prstDash val="solid"/>
                     </a:lnR>
                     <a:lnT w="7200">
                       <a:solidFill>
-                        <a:srgbClr val="000000"/>
+                        <a:srgbClr val="666666"/>
                       </a:solidFill>
                       <a:prstDash val="solid"/>
                     </a:lnT>
                     <a:lnB w="7200">
                       <a:solidFill>
-                        <a:srgbClr val="000000"/>
+                        <a:srgbClr val="666666"/>
                       </a:solidFill>
                       <a:prstDash val="solid"/>
                     </a:lnB>
-                    <a:noFill/>
+                    <a:solidFill>
+                      <a:srgbClr val="ffffff"/>
+                    </a:solidFill>
                   </a:tcPr>
                 </a:tc>
                 <a:tc>
@@ -7832,7 +9302,11 @@
                       <a:noAutofit/>
                     </a:bodyPr>
                     <a:p>
-                      <a:pPr algn="r"/>
+                      <a:pPr algn="r">
+                        <a:lnSpc>
+                          <a:spcPct val="100000"/>
+                        </a:lnSpc>
+                      </a:pPr>
                       <a:r>
                         <a:rPr b="0" lang="ru-RU" sz="1800" spc="-1" strike="noStrike">
                           <a:solidFill>
@@ -7853,29 +9327,31 @@
                   <a:tcPr anchor="t" marL="36000" marR="36000">
                     <a:lnL w="7200">
                       <a:solidFill>
-                        <a:srgbClr val="000000"/>
+                        <a:srgbClr val="666666"/>
                       </a:solidFill>
                       <a:prstDash val="solid"/>
                     </a:lnL>
                     <a:lnR w="7200">
                       <a:solidFill>
-                        <a:srgbClr val="000000"/>
+                        <a:srgbClr val="666666"/>
                       </a:solidFill>
                       <a:prstDash val="solid"/>
                     </a:lnR>
                     <a:lnT w="7200">
                       <a:solidFill>
-                        <a:srgbClr val="000000"/>
+                        <a:srgbClr val="666666"/>
                       </a:solidFill>
                       <a:prstDash val="solid"/>
                     </a:lnT>
                     <a:lnB w="7200">
                       <a:solidFill>
-                        <a:srgbClr val="000000"/>
+                        <a:srgbClr val="666666"/>
                       </a:solidFill>
                       <a:prstDash val="solid"/>
                     </a:lnB>
-                    <a:noFill/>
+                    <a:solidFill>
+                      <a:srgbClr val="ffffff"/>
+                    </a:solidFill>
                   </a:tcPr>
                 </a:tc>
                 <a:tc>
@@ -7884,7 +9360,11 @@
                       <a:noAutofit/>
                     </a:bodyPr>
                     <a:p>
-                      <a:pPr algn="r"/>
+                      <a:pPr algn="r">
+                        <a:lnSpc>
+                          <a:spcPct val="100000"/>
+                        </a:lnSpc>
+                      </a:pPr>
                       <a:r>
                         <a:rPr b="0" lang="ru-RU" sz="1800" spc="-1" strike="noStrike">
                           <a:solidFill>
@@ -7905,29 +9385,31 @@
                   <a:tcPr anchor="t" marL="36000" marR="36000">
                     <a:lnL w="7200">
                       <a:solidFill>
-                        <a:srgbClr val="000000"/>
+                        <a:srgbClr val="666666"/>
                       </a:solidFill>
                       <a:prstDash val="solid"/>
                     </a:lnL>
                     <a:lnR w="7200">
                       <a:solidFill>
-                        <a:srgbClr val="000000"/>
+                        <a:srgbClr val="666666"/>
                       </a:solidFill>
                       <a:prstDash val="solid"/>
                     </a:lnR>
                     <a:lnT w="7200">
                       <a:solidFill>
-                        <a:srgbClr val="000000"/>
+                        <a:srgbClr val="666666"/>
                       </a:solidFill>
                       <a:prstDash val="solid"/>
                     </a:lnT>
                     <a:lnB w="7200">
                       <a:solidFill>
-                        <a:srgbClr val="000000"/>
+                        <a:srgbClr val="666666"/>
                       </a:solidFill>
                       <a:prstDash val="solid"/>
                     </a:lnB>
-                    <a:noFill/>
+                    <a:solidFill>
+                      <a:srgbClr val="ffffff"/>
+                    </a:solidFill>
                   </a:tcPr>
                 </a:tc>
               </a:tr>
@@ -7935,6 +9417,48 @@
           </a:graphicData>
         </a:graphic>
       </p:graphicFrame>
+      <p:sp>
+        <p:nvSpPr>
+          <p:cNvPr id="37" name=""/>
+          <p:cNvSpPr txBox="1"/>
+          <p:nvPr/>
+        </p:nvSpPr>
+        <p:spPr>
+          <a:xfrm>
+            <a:off x="180000" y="6305400"/>
+            <a:ext cx="3425400" cy="427320"/>
+          </a:xfrm>
+          <a:prstGeom prst="rect">
+            <a:avLst/>
+          </a:prstGeom>
+          <a:noFill/>
+          <a:ln w="0">
+            <a:noFill/>
+          </a:ln>
+        </p:spPr>
+        <p:txBody>
+          <a:bodyPr lIns="90000" rIns="90000" tIns="45000" bIns="45000" anchor="t">
+            <a:noAutofit/>
+          </a:bodyPr>
+          <a:p>
+            <a:fld id="{5BA077B0-2C13-45B6-8B31-DB195C2F85F8}" type="slidenum">
+              <a:rPr b="0" lang="ru-RU" sz="2400" spc="-1" strike="noStrike">
+                <a:solidFill>
+                  <a:srgbClr val="000000"/>
+                </a:solidFill>
+                <a:latin typeface="Times New Roman"/>
+              </a:rPr>
+              <a:t>&lt;номер&gt;</a:t>
+            </a:fld>
+            <a:endParaRPr b="0" lang="ru-RU" sz="2400" spc="-1" strike="noStrike">
+              <a:solidFill>
+                <a:srgbClr val="000000"/>
+              </a:solidFill>
+              <a:latin typeface="Times New Roman"/>
+            </a:endParaRPr>
+          </a:p>
+        </p:txBody>
+      </p:sp>
     </p:spTree>
   </p:cSld>
   <mc:AlternateContent>
@@ -7951,6 +9475,14 @@
 <file path=ppt/slides/slide8.xml><?xml version="1.0" encoding="utf-8"?>
 <p:sld xmlns:a="http://schemas.openxmlformats.org/drawingml/2006/main" xmlns:p="http://schemas.openxmlformats.org/presentationml/2006/main" xmlns:r="http://schemas.openxmlformats.org/officeDocument/2006/relationships" xmlns:p14="http://schemas.microsoft.com/office/powerpoint/2010/main" xmlns:p15="http://schemas.microsoft.com/office/powerpoint/2012/main" xmlns:mc="http://schemas.openxmlformats.org/markup-compatibility/2006">
   <p:cSld>
+    <p:bg>
+      <p:bgPr>
+        <a:blipFill rotWithShape="0">
+          <a:blip r:embed="rId1"/>
+          <a:tile tx="0" ty="0" sx="100000" sy="100000" algn="ctr"/>
+        </a:blipFill>
+      </p:bgPr>
+    </p:bg>
     <p:spTree>
       <p:nvGrpSpPr>
         <p:cNvPr id="1" name=""/>
@@ -7967,7 +9499,7 @@
       </p:grpSpPr>
       <p:sp>
         <p:nvSpPr>
-          <p:cNvPr id="27" name="PlaceHolder 1"/>
+          <p:cNvPr id="38" name="PlaceHolder 1"/>
           <p:cNvSpPr>
             <a:spLocks noGrp="1"/>
           </p:cNvSpPr>
@@ -7978,7 +9510,7 @@
         <p:spPr>
           <a:xfrm>
             <a:off x="360000" y="273240"/>
-            <a:ext cx="8229240" cy="446760"/>
+            <a:ext cx="8228880" cy="446400"/>
           </a:xfrm>
           <a:prstGeom prst="rect">
             <a:avLst/>
@@ -8023,14 +9555,14 @@
       </p:sp>
       <p:sp>
         <p:nvSpPr>
-          <p:cNvPr id="28" name=""/>
-          <p:cNvSpPr txBox="1"/>
+          <p:cNvPr id="39" name=""/>
+          <p:cNvSpPr/>
           <p:nvPr/>
         </p:nvSpPr>
         <p:spPr>
           <a:xfrm>
             <a:off x="3600000" y="900000"/>
-            <a:ext cx="5040000" cy="360000"/>
+            <a:ext cx="5039640" cy="359640"/>
           </a:xfrm>
           <a:prstGeom prst="rect">
             <a:avLst/>
@@ -8040,6 +9572,12 @@
             <a:noFill/>
           </a:ln>
         </p:spPr>
+        <p:style>
+          <a:lnRef idx="0"/>
+          <a:fillRef idx="0"/>
+          <a:effectRef idx="0"/>
+          <a:fontRef idx="minor"/>
+        </p:style>
         <p:txBody>
           <a:bodyPr lIns="90000" rIns="90000" tIns="45000" bIns="45000" anchor="t">
             <a:noAutofit/>
@@ -8067,25 +9605,25 @@
               <a:solidFill>
                 <a:srgbClr val="000000"/>
               </a:solidFill>
-              <a:latin typeface="Times New Roman"/>
+              <a:latin typeface="Arial"/>
             </a:endParaRPr>
           </a:p>
         </p:txBody>
       </p:sp>
       <p:pic>
         <p:nvPicPr>
-          <p:cNvPr id="29" name="" descr=""/>
+          <p:cNvPr id="40" name="" descr=""/>
           <p:cNvPicPr/>
           <p:nvPr/>
         </p:nvPicPr>
         <p:blipFill>
-          <a:blip r:embed="rId1"/>
+          <a:blip r:embed="rId2"/>
           <a:stretch/>
         </p:blipFill>
         <p:spPr>
           <a:xfrm>
-            <a:off x="198000" y="1620000"/>
-            <a:ext cx="4122000" cy="900000"/>
+            <a:off x="4859640" y="5400360"/>
+            <a:ext cx="4121640" cy="899640"/>
           </a:xfrm>
           <a:prstGeom prst="rect">
             <a:avLst/>
@@ -8097,18 +9635,18 @@
       </p:pic>
       <p:pic>
         <p:nvPicPr>
-          <p:cNvPr id="30" name="" descr=""/>
+          <p:cNvPr id="41" name="" descr=""/>
           <p:cNvPicPr/>
           <p:nvPr/>
         </p:nvPicPr>
         <p:blipFill>
-          <a:blip r:embed="rId2"/>
+          <a:blip r:embed="rId3"/>
           <a:stretch/>
         </p:blipFill>
         <p:spPr>
           <a:xfrm>
-            <a:off x="4680000" y="1620000"/>
-            <a:ext cx="4236480" cy="3223440"/>
+            <a:off x="4859640" y="1620000"/>
+            <a:ext cx="4056480" cy="3223080"/>
           </a:xfrm>
           <a:prstGeom prst="rect">
             <a:avLst/>
@@ -8120,14 +9658,14 @@
       </p:pic>
       <p:sp>
         <p:nvSpPr>
-          <p:cNvPr id="31" name=""/>
-          <p:cNvSpPr txBox="1"/>
+          <p:cNvPr id="42" name=""/>
+          <p:cNvSpPr/>
           <p:nvPr/>
         </p:nvSpPr>
         <p:spPr>
           <a:xfrm>
-            <a:off x="180000" y="2880000"/>
-            <a:ext cx="4680000" cy="3240000"/>
+            <a:off x="180000" y="1260000"/>
+            <a:ext cx="4679640" cy="4859640"/>
           </a:xfrm>
           <a:prstGeom prst="rect">
             <a:avLst/>
@@ -8137,11 +9675,22 @@
             <a:noFill/>
           </a:ln>
         </p:spPr>
+        <p:style>
+          <a:lnRef idx="0"/>
+          <a:fillRef idx="0"/>
+          <a:effectRef idx="0"/>
+          <a:fontRef idx="minor"/>
+        </p:style>
         <p:txBody>
           <a:bodyPr lIns="90000" rIns="90000" tIns="45000" bIns="45000" anchor="t">
             <a:noAutofit/>
           </a:bodyPr>
           <a:p>
+            <a:pPr>
+              <a:lnSpc>
+                <a:spcPct val="100000"/>
+              </a:lnSpc>
+            </a:pPr>
             <a:r>
               <a:rPr b="0" lang="ru-RU" sz="1500" spc="-1" strike="noStrike">
                 <a:solidFill>
@@ -8168,7 +9717,7 @@
               </a:tabLst>
             </a:pPr>
             <a:r>
-              <a:rPr b="0" lang="ru-RU" sz="1500" spc="-1" strike="noStrike">
+              <a:rPr b="0" lang="ru-RU" sz="2100" spc="-1" strike="noStrike">
                 <a:solidFill>
                   <a:srgbClr val="000000"/>
                 </a:solidFill>
@@ -8188,7 +9737,7 @@
               <a:t> </a:t>
             </a:r>
             <a:r>
-              <a:rPr b="0" lang="ru-RU" sz="1500" spc="-1" strike="noStrike">
+              <a:rPr b="0" lang="ru-RU" sz="1800" spc="-1" strike="noStrike">
                 <a:solidFill>
                   <a:srgbClr val="000000"/>
                 </a:solidFill>
@@ -8198,7 +9747,7 @@
               <a:t>(</a:t>
             </a:r>
             <a:r>
-              <a:rPr b="0" i="1" lang="ru-RU" sz="1200" spc="-1" strike="noStrike">
+              <a:rPr b="0" i="1" lang="ru-RU" sz="1800" spc="-1" strike="noStrike">
                 <a:solidFill>
                   <a:srgbClr val="000000"/>
                 </a:solidFill>
@@ -8208,27 +9757,17 @@
               <a:t> </a:t>
             </a:r>
             <a:r>
-              <a:rPr b="0" i="1" lang="en-US" sz="1200" spc="-1" strike="noStrike">
+              <a:rPr b="0" i="1" lang="en-US" sz="1800" spc="-1" strike="noStrike">
                 <a:solidFill>
                   <a:srgbClr val="000000"/>
                 </a:solidFill>
                 <a:latin typeface="Times New Roman"/>
                 <a:ea typeface="Arial"/>
               </a:rPr>
-              <a:t>По двум районам Краснодара собраны заведения, адреса, отзывы, рейтинг и признаки локации</a:t>
+              <a:t>По двум районам Краснодара собраны заведения, адреса, отзывы, рейтинг и признаки локации. </a:t>
             </a:r>
             <a:r>
-              <a:rPr b="0" i="1" lang="en-US" sz="1300" spc="-1" strike="noStrike">
-                <a:solidFill>
-                  <a:srgbClr val="000000"/>
-                </a:solidFill>
-                <a:latin typeface="Times New Roman"/>
-                <a:ea typeface="Arial"/>
-              </a:rPr>
-              <a:t>. </a:t>
-            </a:r>
-            <a:r>
-              <a:rPr b="0" lang="en-US" sz="1500" spc="-1" strike="noStrike">
+              <a:rPr b="0" lang="en-US" sz="1800" spc="-1" strike="noStrike">
                 <a:solidFill>
                   <a:srgbClr val="000000"/>
                 </a:solidFill>
@@ -8237,7 +9776,7 @@
               </a:rPr>
               <a:t>)</a:t>
             </a:r>
-            <a:endParaRPr b="0" lang="ru-RU" sz="1500" spc="-1" strike="noStrike">
+            <a:endParaRPr b="0" lang="ru-RU" sz="1800" spc="-1" strike="noStrike">
               <a:solidFill>
                 <a:srgbClr val="000000"/>
               </a:solidFill>
@@ -8254,7 +9793,7 @@
               </a:tabLst>
             </a:pPr>
             <a:r>
-              <a:rPr b="0" lang="en-US" sz="1500" spc="-1" strike="noStrike">
+              <a:rPr b="0" lang="en-US" sz="2100" spc="-1" strike="noStrike">
                 <a:solidFill>
                   <a:srgbClr val="000000"/>
                 </a:solidFill>
@@ -8264,7 +9803,7 @@
               <a:t>2. </a:t>
             </a:r>
             <a:r>
-              <a:rPr b="0" lang="en-US" sz="1500" spc="-1" strike="noStrike">
+              <a:rPr b="0" lang="en-US" sz="2100" spc="-1" strike="noStrike">
                 <a:solidFill>
                   <a:srgbClr val="172033"/>
                 </a:solidFill>
@@ -8274,17 +9813,17 @@
               <a:t>Отбор диапазона</a:t>
             </a:r>
             <a:r>
-              <a:rPr b="1" lang="en-US" sz="1200" spc="-1" strike="noStrike">
+              <a:rPr b="1" lang="en-US" sz="1800" spc="-1" strike="noStrike">
                 <a:solidFill>
                   <a:srgbClr val="172033"/>
                 </a:solidFill>
-                <a:latin typeface="Arial"/>
+                <a:latin typeface="Times New Roman"/>
                 <a:ea typeface="Arial"/>
               </a:rPr>
               <a:t> </a:t>
             </a:r>
             <a:r>
-              <a:rPr b="0" lang="en-US" sz="1200" spc="-1" strike="noStrike">
+              <a:rPr b="0" lang="en-US" sz="1800" spc="-1" strike="noStrike">
                 <a:solidFill>
                   <a:srgbClr val="172033"/>
                 </a:solidFill>
@@ -8294,27 +9833,17 @@
               <a:t>(</a:t>
             </a:r>
             <a:r>
-              <a:rPr b="0" i="1" lang="en-US" sz="1200" spc="-1" strike="noStrike">
+              <a:rPr b="0" i="1" lang="en-US" sz="1800" spc="-1" strike="noStrike">
                 <a:solidFill>
                   <a:srgbClr val="000000"/>
                 </a:solidFill>
                 <a:latin typeface="Times New Roman"/>
                 <a:ea typeface="Arial"/>
               </a:rPr>
-              <a:t> </a:t>
+              <a:t> Из строк 162-250 выбраны 40 записей для дальнейшей финансовой проверки.</a:t>
             </a:r>
             <a:r>
-              <a:rPr b="0" i="1" lang="en-US" sz="1200" spc="-1" strike="noStrike">
-                <a:solidFill>
-                  <a:srgbClr val="000000"/>
-                </a:solidFill>
-                <a:latin typeface="Times New Roman"/>
-                <a:ea typeface="Arial"/>
-              </a:rPr>
-              <a:t>Из строк 162-250 выбраны 40 записей для дальнейшей финансовой проверки.</a:t>
-            </a:r>
-            <a:r>
-              <a:rPr b="0" lang="en-US" sz="1200" spc="-1" strike="noStrike">
+              <a:rPr b="0" lang="en-US" sz="1800" spc="-1" strike="noStrike">
                 <a:solidFill>
                   <a:srgbClr val="172033"/>
                 </a:solidFill>
@@ -8323,7 +9852,7 @@
               </a:rPr>
               <a:t> )</a:t>
             </a:r>
-            <a:endParaRPr b="0" lang="ru-RU" sz="1200" spc="-1" strike="noStrike">
+            <a:endParaRPr b="0" lang="ru-RU" sz="1800" spc="-1" strike="noStrike">
               <a:solidFill>
                 <a:srgbClr val="000000"/>
               </a:solidFill>
@@ -8340,24 +9869,14 @@
               </a:tabLst>
             </a:pPr>
             <a:r>
-              <a:rPr b="0" lang="en-US" sz="1200" spc="-1" strike="noStrike">
-                <a:solidFill>
-                  <a:srgbClr val="172033"/>
-                </a:solidFill>
-                <a:latin typeface="Arial"/>
-                <a:ea typeface="Arial"/>
-              </a:rPr>
-              <a:t>3. </a:t>
-            </a:r>
-            <a:r>
-              <a:rPr b="0" lang="en-US" sz="1500" spc="-1" strike="noStrike">
+              <a:rPr b="0" lang="en-US" sz="2100" spc="-1" strike="noStrike">
                 <a:solidFill>
                   <a:srgbClr val="172033"/>
                 </a:solidFill>
                 <a:latin typeface="Times New Roman"/>
                 <a:ea typeface="Arial"/>
               </a:rPr>
-              <a:t>Сопоставление с юрлицами</a:t>
+              <a:t>3. Сопоставление с юрлицами</a:t>
             </a:r>
             <a:r>
               <a:rPr b="1" lang="en-US" sz="1200" spc="-1" strike="noStrike">
@@ -8370,7 +9889,7 @@
               <a:t> </a:t>
             </a:r>
             <a:r>
-              <a:rPr b="0" lang="en-US" sz="1200" spc="-1" strike="noStrike">
+              <a:rPr b="0" lang="en-US" sz="1800" spc="-1" strike="noStrike">
                 <a:solidFill>
                   <a:srgbClr val="172033"/>
                 </a:solidFill>
@@ -8380,7 +9899,7 @@
               <a:t>(</a:t>
             </a:r>
             <a:r>
-              <a:rPr b="1" lang="en-US" sz="1200" spc="-1" strike="noStrike">
+              <a:rPr b="1" lang="en-US" sz="1800" spc="-1" strike="noStrike">
                 <a:solidFill>
                   <a:srgbClr val="172033"/>
                 </a:solidFill>
@@ -8390,7 +9909,7 @@
               <a:t> </a:t>
             </a:r>
             <a:r>
-              <a:rPr b="0" i="1" lang="en-US" sz="1200" spc="-1" strike="noStrike">
+              <a:rPr b="0" i="1" lang="en-US" sz="1800" spc="-1" strike="noStrike">
                 <a:solidFill>
                   <a:srgbClr val="000000"/>
                 </a:solidFill>
@@ -8400,7 +9919,7 @@
               <a:t>Для заведений найдены ИНН и годовая отчетность БФО ФНС за 2023-2025. </a:t>
             </a:r>
             <a:r>
-              <a:rPr b="0" lang="en-US" sz="1200" spc="-1" strike="noStrike">
+              <a:rPr b="0" lang="en-US" sz="1800" spc="-1" strike="noStrike">
                 <a:solidFill>
                   <a:srgbClr val="172033"/>
                 </a:solidFill>
@@ -8409,7 +9928,7 @@
               </a:rPr>
               <a:t>)</a:t>
             </a:r>
-            <a:endParaRPr b="0" lang="ru-RU" sz="1200" spc="-1" strike="noStrike">
+            <a:endParaRPr b="0" lang="ru-RU" sz="1800" spc="-1" strike="noStrike">
               <a:solidFill>
                 <a:srgbClr val="000000"/>
               </a:solidFill>
@@ -8442,6 +9961,16 @@
               </a:tabLst>
             </a:pPr>
             <a:r>
+              <a:rPr b="0" lang="en-US" sz="2100" spc="-1" strike="noStrike">
+                <a:solidFill>
+                  <a:srgbClr val="172033"/>
+                </a:solidFill>
+                <a:latin typeface="Arial"/>
+                <a:ea typeface="Arial"/>
+              </a:rPr>
+              <a:t>4</a:t>
+            </a:r>
+            <a:r>
               <a:rPr b="0" lang="en-US" sz="1200" spc="-1" strike="noStrike">
                 <a:solidFill>
                   <a:srgbClr val="172033"/>
@@ -8449,7 +9978,7 @@
                 <a:latin typeface="Arial"/>
                 <a:ea typeface="Arial"/>
               </a:rPr>
-              <a:t>4.</a:t>
+              <a:t>.</a:t>
             </a:r>
             <a:r>
               <a:rPr b="0" lang="en-US" sz="1200" spc="-1" strike="noStrike">
@@ -8462,7 +9991,7 @@
               <a:t> </a:t>
             </a:r>
             <a:r>
-              <a:rPr b="0" lang="en-US" sz="1500" spc="-1" strike="noStrike">
+              <a:rPr b="0" lang="en-US" sz="2100" spc="-1" strike="noStrike">
                 <a:solidFill>
                   <a:srgbClr val="000000"/>
                 </a:solidFill>
@@ -8482,7 +10011,7 @@
               <a:t> </a:t>
             </a:r>
             <a:r>
-              <a:rPr b="0" lang="en-US" sz="1200" spc="-1" strike="noStrike">
+              <a:rPr b="0" lang="en-US" sz="1800" spc="-1" strike="noStrike">
                 <a:solidFill>
                   <a:srgbClr val="172033"/>
                 </a:solidFill>
@@ -8492,7 +10021,7 @@
               <a:t>(</a:t>
             </a:r>
             <a:r>
-              <a:rPr b="1" i="1" lang="en-US" sz="1200" spc="-1" strike="noStrike">
+              <a:rPr b="1" i="1" lang="en-US" sz="1800" spc="-1" strike="noStrike">
                 <a:solidFill>
                   <a:srgbClr val="000000"/>
                 </a:solidFill>
@@ -8502,7 +10031,7 @@
               <a:t> </a:t>
             </a:r>
             <a:r>
-              <a:rPr b="0" i="1" lang="en-US" sz="1200" spc="-1" strike="noStrike">
+              <a:rPr b="0" i="1" lang="en-US" sz="1800" spc="-1" strike="noStrike">
                 <a:solidFill>
                   <a:srgbClr val="000000"/>
                 </a:solidFill>
@@ -8512,7 +10041,7 @@
               <a:t>Показатель рассчитан по формуле: ((прибыль - убыток) / прибыль) x 100.</a:t>
             </a:r>
             <a:r>
-              <a:rPr b="1" lang="en-US" sz="1200" spc="-1" strike="noStrike">
+              <a:rPr b="1" lang="en-US" sz="1800" spc="-1" strike="noStrike">
                 <a:solidFill>
                   <a:srgbClr val="172033"/>
                 </a:solidFill>
@@ -8522,7 +10051,7 @@
               <a:t> </a:t>
             </a:r>
             <a:r>
-              <a:rPr b="0" lang="en-US" sz="1200" spc="-1" strike="noStrike">
+              <a:rPr b="0" lang="en-US" sz="1800" spc="-1" strike="noStrike">
                 <a:solidFill>
                   <a:srgbClr val="172033"/>
                 </a:solidFill>
@@ -8531,7 +10060,7 @@
               </a:rPr>
               <a:t>)</a:t>
             </a:r>
-            <a:endParaRPr b="0" lang="ru-RU" sz="1200" spc="-1" strike="noStrike">
+            <a:endParaRPr b="0" lang="ru-RU" sz="1800" spc="-1" strike="noStrike">
               <a:solidFill>
                 <a:srgbClr val="000000"/>
               </a:solidFill>
@@ -8572,6 +10101,48 @@
           </a:p>
         </p:txBody>
       </p:sp>
+      <p:sp>
+        <p:nvSpPr>
+          <p:cNvPr id="43" name=""/>
+          <p:cNvSpPr txBox="1"/>
+          <p:nvPr/>
+        </p:nvSpPr>
+        <p:spPr>
+          <a:xfrm>
+            <a:off x="534600" y="6052680"/>
+            <a:ext cx="3425400" cy="427320"/>
+          </a:xfrm>
+          <a:prstGeom prst="rect">
+            <a:avLst/>
+          </a:prstGeom>
+          <a:noFill/>
+          <a:ln w="0">
+            <a:noFill/>
+          </a:ln>
+        </p:spPr>
+        <p:txBody>
+          <a:bodyPr lIns="90000" rIns="90000" tIns="45000" bIns="45000" anchor="t">
+            <a:noAutofit/>
+          </a:bodyPr>
+          <a:p>
+            <a:fld id="{5360BE5D-4237-437B-B207-2C7F3820215A}" type="slidenum">
+              <a:rPr b="0" lang="ru-RU" sz="2400" spc="-1" strike="noStrike">
+                <a:solidFill>
+                  <a:srgbClr val="000000"/>
+                </a:solidFill>
+                <a:latin typeface="Times New Roman"/>
+              </a:rPr>
+              <a:t>&lt;номер&gt;</a:t>
+            </a:fld>
+            <a:endParaRPr b="0" lang="ru-RU" sz="2400" spc="-1" strike="noStrike">
+              <a:solidFill>
+                <a:srgbClr val="000000"/>
+              </a:solidFill>
+              <a:latin typeface="Times New Roman"/>
+            </a:endParaRPr>
+          </a:p>
+        </p:txBody>
+      </p:sp>
     </p:spTree>
   </p:cSld>
   <mc:AlternateContent>
@@ -8588,6 +10159,14 @@
 <file path=ppt/slides/slide9.xml><?xml version="1.0" encoding="utf-8"?>
 <p:sld xmlns:a="http://schemas.openxmlformats.org/drawingml/2006/main" xmlns:p="http://schemas.openxmlformats.org/presentationml/2006/main" xmlns:r="http://schemas.openxmlformats.org/officeDocument/2006/relationships" xmlns:p14="http://schemas.microsoft.com/office/powerpoint/2010/main" xmlns:p15="http://schemas.microsoft.com/office/powerpoint/2012/main" xmlns:mc="http://schemas.openxmlformats.org/markup-compatibility/2006">
   <p:cSld>
+    <p:bg>
+      <p:bgPr>
+        <a:blipFill rotWithShape="0">
+          <a:blip r:embed="rId1"/>
+          <a:tile tx="0" ty="0" sx="100000" sy="100000" algn="ctr"/>
+        </a:blipFill>
+      </p:bgPr>
+    </p:bg>
     <p:spTree>
       <p:nvGrpSpPr>
         <p:cNvPr id="1" name=""/>
@@ -8604,14 +10183,14 @@
       </p:grpSpPr>
       <p:sp>
         <p:nvSpPr>
-          <p:cNvPr id="32" name=""/>
-          <p:cNvSpPr txBox="1"/>
+          <p:cNvPr id="44" name=""/>
+          <p:cNvSpPr/>
           <p:nvPr/>
         </p:nvSpPr>
         <p:spPr>
           <a:xfrm>
             <a:off x="364680" y="273600"/>
-            <a:ext cx="8229240" cy="446760"/>
+            <a:ext cx="8228880" cy="446400"/>
           </a:xfrm>
           <a:prstGeom prst="rect">
             <a:avLst/>
@@ -8621,6 +10200,12 @@
             <a:noFill/>
           </a:ln>
         </p:spPr>
+        <p:style>
+          <a:lnRef idx="0"/>
+          <a:fillRef idx="0"/>
+          <a:effectRef idx="0"/>
+          <a:fontRef idx="minor"/>
+        </p:style>
         <p:txBody>
           <a:bodyPr lIns="0" rIns="0" tIns="0" bIns="0" anchor="ctr">
             <a:noAutofit/>
@@ -8655,29 +10240,13 @@
       </p:sp>
       <p:graphicFrame>
         <p:nvGraphicFramePr>
-          <p:cNvPr id="33" name=""/>
+          <p:cNvPr id="45" name=""/>
           <p:cNvGraphicFramePr/>
           <p:nvPr/>
         </p:nvGraphicFramePr>
         <p:xfrm>
           <a:off x="256680" y="912240"/>
-          <a:ext cx="5143320" cy="3047760"/>
-        </p:xfrm>
-        <a:graphic>
-          <a:graphicData uri="http://schemas.openxmlformats.org/drawingml/2006/chart">
-            <c:chart xmlns:c="http://schemas.openxmlformats.org/drawingml/2006/chart" xmlns:r="http://schemas.openxmlformats.org/officeDocument/2006/relationships" r:id="rId1"/>
-          </a:graphicData>
-        </a:graphic>
-      </p:graphicFrame>
-      <p:graphicFrame>
-        <p:nvGraphicFramePr>
-          <p:cNvPr id="34" name=""/>
-          <p:cNvGraphicFramePr/>
-          <p:nvPr/>
-        </p:nvGraphicFramePr>
-        <p:xfrm>
-          <a:off x="3600000" y="4140000"/>
-          <a:ext cx="5503320" cy="2507760"/>
+          <a:ext cx="5142960" cy="3047400"/>
         </p:xfrm>
         <a:graphic>
           <a:graphicData uri="http://schemas.openxmlformats.org/drawingml/2006/chart">
@@ -8685,6 +10254,64 @@
           </a:graphicData>
         </a:graphic>
       </p:graphicFrame>
+      <p:graphicFrame>
+        <p:nvGraphicFramePr>
+          <p:cNvPr id="46" name=""/>
+          <p:cNvGraphicFramePr/>
+          <p:nvPr/>
+        </p:nvGraphicFramePr>
+        <p:xfrm>
+          <a:off x="3600000" y="4140000"/>
+          <a:ext cx="5502960" cy="2507400"/>
+        </p:xfrm>
+        <a:graphic>
+          <a:graphicData uri="http://schemas.openxmlformats.org/drawingml/2006/chart">
+            <c:chart xmlns:c="http://schemas.openxmlformats.org/drawingml/2006/chart" xmlns:r="http://schemas.openxmlformats.org/officeDocument/2006/relationships" r:id="rId3"/>
+          </a:graphicData>
+        </a:graphic>
+      </p:graphicFrame>
+      <p:sp>
+        <p:nvSpPr>
+          <p:cNvPr id="47" name=""/>
+          <p:cNvSpPr txBox="1"/>
+          <p:nvPr/>
+        </p:nvSpPr>
+        <p:spPr>
+          <a:xfrm>
+            <a:off x="174600" y="6052680"/>
+            <a:ext cx="3425400" cy="427320"/>
+          </a:xfrm>
+          <a:prstGeom prst="rect">
+            <a:avLst/>
+          </a:prstGeom>
+          <a:noFill/>
+          <a:ln w="0">
+            <a:noFill/>
+          </a:ln>
+        </p:spPr>
+        <p:txBody>
+          <a:bodyPr lIns="90000" rIns="90000" tIns="45000" bIns="45000" anchor="t">
+            <a:noAutofit/>
+          </a:bodyPr>
+          <a:p>
+            <a:fld id="{4A200D93-156D-417F-9D95-9F60B1CEC270}" type="slidenum">
+              <a:rPr b="0" lang="ru-RU" sz="2400" spc="-1" strike="noStrike">
+                <a:solidFill>
+                  <a:srgbClr val="000000"/>
+                </a:solidFill>
+                <a:latin typeface="Times New Roman"/>
+              </a:rPr>
+              <a:t>&lt;номер&gt;</a:t>
+            </a:fld>
+            <a:endParaRPr b="0" lang="ru-RU" sz="2400" spc="-1" strike="noStrike">
+              <a:solidFill>
+                <a:srgbClr val="000000"/>
+              </a:solidFill>
+              <a:latin typeface="Times New Roman"/>
+            </a:endParaRPr>
+          </a:p>
+        </p:txBody>
+      </p:sp>
     </p:spTree>
   </p:cSld>
   <mc:AlternateContent>
@@ -8802,4 +10429,110 @@
     </a:fmtScheme>
   </a:themeElements>
 </a:theme>
+</file>
+
+<file path=ppt/theme/theme2.xml><?xml version="1.0" encoding="utf-8"?>
+<a:theme xmlns:a="http://schemas.openxmlformats.org/drawingml/2006/main" xmlns:r="http://schemas.openxmlformats.org/officeDocument/2006/relationships" name="Office Theme">
+  <a:themeElements>
+    <a:clrScheme name="LibreOffice">
+      <a:dk1>
+        <a:srgbClr val="000000"/>
+      </a:dk1>
+      <a:lt1>
+        <a:srgbClr val="ffffff"/>
+      </a:lt1>
+      <a:dk2>
+        <a:srgbClr val="000000"/>
+      </a:dk2>
+      <a:lt2>
+        <a:srgbClr val="ffffff"/>
+      </a:lt2>
+      <a:accent1>
+        <a:srgbClr val="18a303"/>
+      </a:accent1>
+      <a:accent2>
+        <a:srgbClr val="0369a3"/>
+      </a:accent2>
+      <a:accent3>
+        <a:srgbClr val="a33e03"/>
+      </a:accent3>
+      <a:accent4>
+        <a:srgbClr val="8e03a3"/>
+      </a:accent4>
+      <a:accent5>
+        <a:srgbClr val="c99c00"/>
+      </a:accent5>
+      <a:accent6>
+        <a:srgbClr val="c9211e"/>
+      </a:accent6>
+      <a:hlink>
+        <a:srgbClr val="0000ee"/>
+      </a:hlink>
+      <a:folHlink>
+        <a:srgbClr val="551a8b"/>
+      </a:folHlink>
+    </a:clrScheme>
+    <a:fontScheme name="Office">
+      <a:majorFont>
+        <a:latin typeface="Arial" pitchFamily="0" charset="1"/>
+        <a:ea typeface="DejaVu Sans" pitchFamily="0" charset="1"/>
+        <a:cs typeface="DejaVu Sans" pitchFamily="0" charset="1"/>
+      </a:majorFont>
+      <a:minorFont>
+        <a:latin typeface="Arial" pitchFamily="0" charset="1"/>
+        <a:ea typeface="DejaVu Sans" pitchFamily="0" charset="1"/>
+        <a:cs typeface="DejaVu Sans" pitchFamily="0" charset="1"/>
+      </a:minorFont>
+    </a:fontScheme>
+    <a:fmtScheme>
+      <a:fillStyleLst>
+        <a:solidFill>
+          <a:schemeClr val="phClr"/>
+        </a:solidFill>
+        <a:solidFill>
+          <a:schemeClr val="phClr"/>
+        </a:solidFill>
+        <a:solidFill>
+          <a:schemeClr val="phClr"/>
+        </a:solidFill>
+      </a:fillStyleLst>
+      <a:lnStyleLst>
+        <a:ln w="6350" cap="flat" cmpd="sng" algn="ctr">
+          <a:prstDash val="solid"/>
+          <a:miter/>
+        </a:ln>
+        <a:ln w="6350" cap="flat" cmpd="sng" algn="ctr">
+          <a:prstDash val="solid"/>
+          <a:miter/>
+        </a:ln>
+        <a:ln w="6350" cap="flat" cmpd="sng" algn="ctr">
+          <a:prstDash val="solid"/>
+          <a:miter/>
+        </a:ln>
+      </a:lnStyleLst>
+      <a:effectStyleLst>
+        <a:effectStyle>
+          <a:effectLst/>
+        </a:effectStyle>
+        <a:effectStyle>
+          <a:effectLst/>
+        </a:effectStyle>
+        <a:effectStyle>
+          <a:effectLst/>
+        </a:effectStyle>
+      </a:effectStyleLst>
+      <a:bgFillStyleLst>
+        <a:solidFill>
+          <a:schemeClr val="phClr"/>
+        </a:solidFill>
+        <a:solidFill>
+          <a:schemeClr val="phClr"/>
+        </a:solidFill>
+        <a:solidFill>
+          <a:schemeClr val="phClr"/>
+        </a:solidFill>
+      </a:bgFillStyleLst>
+    </a:fmtScheme>
+  </a:themeElements>
+</a:theme>
 </file>